--- a/ppt/Grade09/G9_S102_Propagation_of_Sound_2.pptx
+++ b/ppt/Grade09/G9_S102_Propagation_of_Sound_2.pptx
@@ -40,6 +40,8 @@
     <p:sldId id="288" r:id="rId40"/>
     <p:sldId id="289" r:id="rId41"/>
     <p:sldId id="290" r:id="rId42"/>
+    <p:sldId id="291" r:id="rId43"/>
+    <p:sldId id="292" r:id="rId44"/>
   </p:sldIdLst>
   <p:sldSz cx="12191695" cy="6858000" type="screen4x3"/>
   <p:notesSz cx="6858000" cy="9144000"/>
@@ -561,6 +563,146 @@
 </p:notes>
 </file>
 
+<file path=ppt/notesSlides/notesSlide10.xml><?xml version="1.0" encoding="utf-8"?>
+<p:notes xmlns:a="http://schemas.openxmlformats.org/drawingml/2006/main" xmlns:p="http://schemas.openxmlformats.org/presentationml/2006/main" xmlns:r="http://schemas.openxmlformats.org/officeDocument/2006/relationships">
+  <p:cSld>
+    <p:spTree>
+      <p:nvGrpSpPr>
+        <p:cNvPr id="1" name=""/>
+        <p:cNvGrpSpPr/>
+        <p:nvPr/>
+      </p:nvGrpSpPr>
+      <p:grpSpPr>
+        <a:xfrm>
+          <a:off x="0" y="0"/>
+          <a:ext cx="0" cy="0"/>
+          <a:chOff x="0" y="0"/>
+          <a:chExt cx="0" cy="0"/>
+        </a:xfrm>
+      </p:grpSpPr>
+      <p:sp>
+        <p:nvSpPr>
+          <p:cNvPr id="2" name="Slide Image Placeholder 1"/>
+          <p:cNvSpPr>
+            <a:spLocks noGrp="1"/>
+          </p:cNvSpPr>
+          <p:nvPr>
+            <p:ph type="sldImg" idx="2"/>
+          </p:nvPr>
+        </p:nvSpPr>
+        <p:spPr/>
+      </p:sp>
+      <p:sp>
+        <p:nvSpPr>
+          <p:cNvPr id="3" name="Notes Placeholder 2"/>
+          <p:cNvSpPr>
+            <a:spLocks noGrp="1"/>
+          </p:cNvSpPr>
+          <p:nvPr>
+            <p:ph type="body" idx="3" sz="quarter"/>
+          </p:nvPr>
+        </p:nvSpPr>
+        <p:spPr/>
+        <p:txBody>
+          <a:bodyPr/>
+          <a:lstStyle/>
+          <a:p>
+            <a:r>
+              <a:t>The advantages flow from the short wavelength: directed beam, fine detail, plus it is non-ionising and safe.</a:t>
+            </a:r>
+          </a:p>
+        </p:txBody>
+      </p:sp>
+      <p:sp>
+        <p:nvSpPr>
+          <p:cNvPr id="4" name="Slide Number Placeholder 3"/>
+          <p:cNvSpPr>
+            <a:spLocks noGrp="1"/>
+          </p:cNvSpPr>
+          <p:nvPr>
+            <p:ph type="sldNum" idx="5" sz="quarter"/>
+          </p:nvPr>
+        </p:nvSpPr>
+        <p:spPr/>
+      </p:sp>
+    </p:spTree>
+  </p:cSld>
+  <p:clrMapOvr>
+    <a:masterClrMapping/>
+  </p:clrMapOvr>
+</p:notes>
+</file>
+
+<file path=ppt/notesSlides/notesSlide11.xml><?xml version="1.0" encoding="utf-8"?>
+<p:notes xmlns:a="http://schemas.openxmlformats.org/drawingml/2006/main" xmlns:p="http://schemas.openxmlformats.org/presentationml/2006/main" xmlns:r="http://schemas.openxmlformats.org/officeDocument/2006/relationships">
+  <p:cSld>
+    <p:spTree>
+      <p:nvGrpSpPr>
+        <p:cNvPr id="1" name=""/>
+        <p:cNvGrpSpPr/>
+        <p:nvPr/>
+      </p:nvGrpSpPr>
+      <p:grpSpPr>
+        <a:xfrm>
+          <a:off x="0" y="0"/>
+          <a:ext cx="0" cy="0"/>
+          <a:chOff x="0" y="0"/>
+          <a:chExt cx="0" cy="0"/>
+        </a:xfrm>
+      </p:grpSpPr>
+      <p:sp>
+        <p:nvSpPr>
+          <p:cNvPr id="2" name="Slide Image Placeholder 1"/>
+          <p:cNvSpPr>
+            <a:spLocks noGrp="1"/>
+          </p:cNvSpPr>
+          <p:nvPr>
+            <p:ph type="sldImg" idx="2"/>
+          </p:nvPr>
+        </p:nvSpPr>
+        <p:spPr/>
+      </p:sp>
+      <p:sp>
+        <p:nvSpPr>
+          <p:cNvPr id="3" name="Notes Placeholder 2"/>
+          <p:cNvSpPr>
+            <a:spLocks noGrp="1"/>
+          </p:cNvSpPr>
+          <p:nvPr>
+            <p:ph type="body" idx="3" sz="quarter"/>
+          </p:nvPr>
+        </p:nvSpPr>
+        <p:spPr/>
+        <p:txBody>
+          <a:bodyPr/>
+          <a:lstStyle/>
+          <a:p>
+            <a:r>
+              <a:t>Rapid recap; the affects/does-not-affect lists and ultrasound uses are the key exam points.</a:t>
+            </a:r>
+          </a:p>
+        </p:txBody>
+      </p:sp>
+      <p:sp>
+        <p:nvSpPr>
+          <p:cNvPr id="4" name="Slide Number Placeholder 3"/>
+          <p:cNvSpPr>
+            <a:spLocks noGrp="1"/>
+          </p:cNvSpPr>
+          <p:nvPr>
+            <p:ph type="sldNum" idx="5" sz="quarter"/>
+          </p:nvPr>
+        </p:nvSpPr>
+        <p:spPr/>
+      </p:sp>
+    </p:spTree>
+  </p:cSld>
+  <p:clrMapOvr>
+    <a:masterClrMapping/>
+  </p:clrMapOvr>
+</p:notes>
+</file>
+
 <file path=ppt/notesSlides/notesSlide2.xml><?xml version="1.0" encoding="utf-8"?>
 <p:notes xmlns:a="http://schemas.openxmlformats.org/drawingml/2006/main" xmlns:p="http://schemas.openxmlformats.org/presentationml/2006/main" xmlns:r="http://schemas.openxmlformats.org/officeDocument/2006/relationships">
   <p:cSld>
@@ -886,7 +1028,7 @@
           <a:lstStyle/>
           <a:p>
             <a:r>
-              <a:t>The three ranges around the 20 Hz–20 kHz audible band. Infrasonic below, ultrasonic above.</a:t>
+              <a:t>Sound reflects like light; a distinct echo needs the reflector ≥ ~17 m away (0.1 s gap). Basis of the echo method and SONAR.</a:t>
             </a:r>
           </a:p>
         </p:txBody>
@@ -956,7 +1098,7 @@
           <a:lstStyle/>
           <a:p>
             <a:r>
-              <a:t>Ultrasound's short wavelength gives fine detail and a narrow beam — ideal for imaging, SONAR, cleaning and testing.</a:t>
+              <a:t>The three characteristics — loudness, pitch, quality — plus the music-vs-noise distinction.</a:t>
             </a:r>
           </a:p>
         </p:txBody>
@@ -1026,7 +1168,7 @@
           <a:lstStyle/>
           <a:p>
             <a:r>
-              <a:t>The advantages flow from the short wavelength: directed beam, fine detail, plus it is non-ionising and safe.</a:t>
+              <a:t>The three ranges around the 20 Hz–20 kHz audible band. Infrasonic below, ultrasonic above.</a:t>
             </a:r>
           </a:p>
         </p:txBody>
@@ -1096,7 +1238,7 @@
           <a:lstStyle/>
           <a:p>
             <a:r>
-              <a:t>Rapid recap; the affects/does-not-affect lists and ultrasound uses are the key exam points.</a:t>
+              <a:t>Ultrasound's short wavelength gives fine detail and a narrow beam — ideal for imaging, SONAR, cleaning and testing.</a:t>
             </a:r>
           </a:p>
         </p:txBody>
@@ -13180,7 +13322,7 @@
     <p:bg>
       <p:bgPr>
         <a:solidFill>
-          <a:srgbClr val="1D2433"/>
+          <a:srgbClr val="F4F6F8"/>
         </a:solidFill>
         <a:effectLst/>
       </p:bgPr>
@@ -13200,10 +13342,54 @@
         </p:nvSpPr>
         <p:spPr>
           <a:xfrm>
-            <a:off x="8595360" y="-1463040"/>
-            <a:ext cx="4937760" cy="4937760"/>
+            <a:off x="10927080" y="365760"/>
+            <a:ext cx="868680" cy="868680"/>
           </a:xfrm>
           <a:prstGeom prst="ellipse">
+            <a:avLst/>
+          </a:prstGeom>
+          <a:noFill/>
+          <a:ln w="15875">
+            <a:solidFill>
+              <a:srgbClr val="DDE2E8"/>
+            </a:solidFill>
+          </a:ln>
+          <a:effectLst/>
+        </p:spPr>
+        <p:style>
+          <a:lnRef idx="1">
+            <a:schemeClr val="accent1"/>
+          </a:lnRef>
+          <a:fillRef idx="3">
+            <a:schemeClr val="accent1"/>
+          </a:fillRef>
+          <a:effectRef idx="2">
+            <a:schemeClr val="accent1"/>
+          </a:effectRef>
+          <a:fontRef idx="minor">
+            <a:schemeClr val="lt1"/>
+          </a:fontRef>
+        </p:style>
+        <p:txBody>
+          <a:bodyPr rtlCol="0" anchor="ctr"/>
+          <a:lstStyle/>
+          <a:p>
+            <a:pPr algn="ctr"/>
+          </a:p>
+        </p:txBody>
+      </p:sp>
+      <p:sp>
+        <p:nvSpPr>
+          <p:cNvPr id="3" name="Rectangle 2"/>
+          <p:cNvSpPr/>
+          <p:nvPr/>
+        </p:nvSpPr>
+        <p:spPr>
+          <a:xfrm>
+            <a:off x="548640" y="502920"/>
+            <a:ext cx="256032" cy="256032"/>
+          </a:xfrm>
+          <a:prstGeom prst="rect">
             <a:avLst/>
           </a:prstGeom>
           <a:solidFill>
@@ -13238,14 +13424,14 @@
       </p:sp>
       <p:sp>
         <p:nvSpPr>
-          <p:cNvPr id="3" name="TextBox 2"/>
-          <p:cNvSpPr txBox="1"/>
-          <p:nvPr/>
-        </p:nvSpPr>
-        <p:spPr>
-          <a:xfrm>
-            <a:off x="8503920" y="3108960"/>
-            <a:ext cx="3383280" cy="2743200"/>
+          <p:cNvPr id="4" name="TextBox 3"/>
+          <p:cNvSpPr txBox="1"/>
+          <p:nvPr/>
+        </p:nvSpPr>
+        <p:spPr>
+          <a:xfrm>
+            <a:off x="914400" y="457200"/>
+            <a:ext cx="9509760" cy="320040"/>
           </a:xfrm>
           <a:prstGeom prst="rect">
             <a:avLst/>
@@ -13258,29 +13444,29 @@
           </a:bodyPr>
           <a:lstStyle/>
           <a:p>
-            <a:pPr algn="r"/>
-            <a:r>
-              <a:rPr sz="20000" b="1" i="0">
-                <a:solidFill>
-                  <a:srgbClr val="263149"/>
-                </a:solidFill>
-                <a:latin typeface="Calibri"/>
-              </a:rPr>
-              <a:t>2</a:t>
-            </a:r>
-          </a:p>
-        </p:txBody>
-      </p:sp>
-      <p:sp>
-        <p:nvSpPr>
-          <p:cNvPr id="4" name="TextBox 3"/>
-          <p:cNvSpPr txBox="1"/>
-          <p:nvPr/>
-        </p:nvSpPr>
-        <p:spPr>
-          <a:xfrm>
-            <a:off x="777240" y="2148840"/>
-            <a:ext cx="6949440" cy="457200"/>
+            <a:pPr algn="l"/>
+            <a:r>
+              <a:rPr sz="1300" b="1" i="0">
+                <a:solidFill>
+                  <a:srgbClr val="6A4C93"/>
+                </a:solidFill>
+                <a:latin typeface="Arial"/>
+              </a:rPr>
+              <a:t>REFLECTION &amp; ECHO</a:t>
+            </a:r>
+          </a:p>
+        </p:txBody>
+      </p:sp>
+      <p:sp>
+        <p:nvSpPr>
+          <p:cNvPr id="5" name="TextBox 4"/>
+          <p:cNvSpPr txBox="1"/>
+          <p:nvPr/>
+        </p:nvSpPr>
+        <p:spPr>
+          <a:xfrm>
+            <a:off x="548640" y="777240"/>
+            <a:ext cx="9966960" cy="822960"/>
           </a:xfrm>
           <a:prstGeom prst="rect">
             <a:avLst/>
@@ -13295,27 +13481,149 @@
           <a:p>
             <a:pPr algn="l"/>
             <a:r>
-              <a:rPr sz="1600" b="1" i="0">
-                <a:solidFill>
-                  <a:srgbClr val="FFC300"/>
-                </a:solidFill>
-                <a:latin typeface="Arial"/>
-              </a:rPr>
-              <a:t>PART 2</a:t>
-            </a:r>
-          </a:p>
-        </p:txBody>
-      </p:sp>
-      <p:sp>
-        <p:nvSpPr>
-          <p:cNvPr id="5" name="TextBox 4"/>
-          <p:cNvSpPr txBox="1"/>
-          <p:nvPr/>
-        </p:nvSpPr>
-        <p:spPr>
-          <a:xfrm>
-            <a:off x="777240" y="2697480"/>
-            <a:ext cx="7498079" cy="1097280"/>
+              <a:rPr sz="3000" b="1" i="0">
+                <a:solidFill>
+                  <a:srgbClr val="1D2433"/>
+                </a:solidFill>
+                <a:latin typeface="Calibri"/>
+              </a:rPr>
+              <a:t>Reflection of Sound and the Echo</a:t>
+            </a:r>
+          </a:p>
+        </p:txBody>
+      </p:sp>
+      <p:sp>
+        <p:nvSpPr>
+          <p:cNvPr id="6" name="Rounded Rectangle 5"/>
+          <p:cNvSpPr/>
+          <p:nvPr/>
+        </p:nvSpPr>
+        <p:spPr>
+          <a:xfrm>
+            <a:off x="640080" y="1920240"/>
+            <a:ext cx="5212080" cy="1600200"/>
+          </a:xfrm>
+          <a:prstGeom prst="roundRect">
+            <a:avLst>
+              <a:gd name="adj" fmla="val 5000"/>
+            </a:avLst>
+          </a:prstGeom>
+          <a:solidFill>
+            <a:srgbClr val="FFFFFF"/>
+          </a:solidFill>
+          <a:ln>
+            <a:noFill/>
+          </a:ln>
+          <a:effectLst>
+            <a:outerShdw blurRad="88900" dist="38100" dir="5400000" rotWithShape="0" algn="bl">
+              <a:srgbClr val="000000">
+                <a:alpha val="16000"/>
+              </a:srgbClr>
+            </a:outerShdw>
+          </a:effectLst>
+        </p:spPr>
+        <p:style>
+          <a:lnRef idx="1">
+            <a:schemeClr val="accent1"/>
+          </a:lnRef>
+          <a:fillRef idx="3">
+            <a:schemeClr val="accent1"/>
+          </a:fillRef>
+          <a:effectRef idx="2">
+            <a:schemeClr val="accent1"/>
+          </a:effectRef>
+          <a:fontRef idx="minor">
+            <a:schemeClr val="lt1"/>
+          </a:fontRef>
+        </p:style>
+        <p:txBody>
+          <a:bodyPr rtlCol="0" anchor="ctr"/>
+          <a:lstStyle/>
+          <a:p>
+            <a:pPr algn="ctr"/>
+          </a:p>
+        </p:txBody>
+      </p:sp>
+      <p:sp>
+        <p:nvSpPr>
+          <p:cNvPr id="7" name="Rounded Rectangle 6"/>
+          <p:cNvSpPr/>
+          <p:nvPr/>
+        </p:nvSpPr>
+        <p:spPr>
+          <a:xfrm>
+            <a:off x="960119" y="2212848"/>
+            <a:ext cx="502920" cy="502920"/>
+          </a:xfrm>
+          <a:prstGeom prst="roundRect">
+            <a:avLst>
+              <a:gd name="adj" fmla="val 30000"/>
+            </a:avLst>
+          </a:prstGeom>
+          <a:solidFill>
+            <a:srgbClr val="0A9396"/>
+          </a:solidFill>
+          <a:ln>
+            <a:noFill/>
+          </a:ln>
+          <a:effectLst/>
+        </p:spPr>
+        <p:style>
+          <a:lnRef idx="1">
+            <a:schemeClr val="accent1"/>
+          </a:lnRef>
+          <a:fillRef idx="3">
+            <a:schemeClr val="accent1"/>
+          </a:fillRef>
+          <a:effectRef idx="2">
+            <a:schemeClr val="accent1"/>
+          </a:effectRef>
+          <a:fontRef idx="minor">
+            <a:schemeClr val="lt1"/>
+          </a:fontRef>
+        </p:style>
+        <p:txBody>
+          <a:bodyPr rtlCol="0" anchor="ctr"/>
+          <a:lstStyle/>
+          <a:p>
+            <a:pPr algn="ctr"/>
+          </a:p>
+        </p:txBody>
+      </p:sp>
+      <p:pic>
+        <p:nvPicPr>
+          <p:cNvPr id="8" name="Picture 7" descr="mirror_FFFFFF.png"/>
+          <p:cNvPicPr>
+            <a:picLocks noChangeAspect="1"/>
+          </p:cNvPicPr>
+          <p:nvPr/>
+        </p:nvPicPr>
+        <p:blipFill>
+          <a:blip r:embed="rId2"/>
+          <a:stretch>
+            <a:fillRect/>
+          </a:stretch>
+        </p:blipFill>
+        <p:spPr>
+          <a:xfrm>
+            <a:off x="1070762" y="2323490"/>
+            <a:ext cx="281635" cy="281635"/>
+          </a:xfrm>
+          <a:prstGeom prst="rect">
+            <a:avLst/>
+          </a:prstGeom>
+        </p:spPr>
+      </p:pic>
+      <p:sp>
+        <p:nvSpPr>
+          <p:cNvPr id="9" name="TextBox 8"/>
+          <p:cNvSpPr txBox="1"/>
+          <p:nvPr/>
+        </p:nvSpPr>
+        <p:spPr>
+          <a:xfrm>
+            <a:off x="1645920" y="2176272"/>
+            <a:ext cx="3931920" cy="457200"/>
           </a:xfrm>
           <a:prstGeom prst="rect">
             <a:avLst/>
@@ -13330,27 +13638,27 @@
           <a:p>
             <a:pPr algn="l"/>
             <a:r>
-              <a:rPr sz="4200" b="1" i="0">
-                <a:solidFill>
-                  <a:srgbClr val="FFFFFF"/>
-                </a:solidFill>
-                <a:latin typeface="Calibri"/>
-              </a:rPr>
-              <a:t>Infrasound, Ultrasound &amp; Uses</a:t>
-            </a:r>
-          </a:p>
-        </p:txBody>
-      </p:sp>
-      <p:sp>
-        <p:nvSpPr>
-          <p:cNvPr id="6" name="TextBox 5"/>
-          <p:cNvSpPr txBox="1"/>
-          <p:nvPr/>
-        </p:nvSpPr>
-        <p:spPr>
-          <a:xfrm>
-            <a:off x="777240" y="4114800"/>
-            <a:ext cx="7315200" cy="822960"/>
+              <a:rPr sz="1700" b="1" i="0">
+                <a:solidFill>
+                  <a:srgbClr val="1D2433"/>
+                </a:solidFill>
+                <a:latin typeface="Calibri"/>
+              </a:rPr>
+              <a:t>Sound reflects</a:t>
+            </a:r>
+          </a:p>
+        </p:txBody>
+      </p:sp>
+      <p:sp>
+        <p:nvSpPr>
+          <p:cNvPr id="10" name="TextBox 9"/>
+          <p:cNvSpPr txBox="1"/>
+          <p:nvPr/>
+        </p:nvSpPr>
+        <p:spPr>
+          <a:xfrm>
+            <a:off x="1645920" y="2670048"/>
+            <a:ext cx="3931920" cy="685800"/>
           </a:xfrm>
           <a:prstGeom prst="rect">
             <a:avLst/>
@@ -13365,13 +13673,589 @@
           <a:p>
             <a:pPr algn="l"/>
             <a:r>
-              <a:rPr sz="1800" b="0" i="0">
-                <a:solidFill>
-                  <a:srgbClr val="CADCFC"/>
-                </a:solidFill>
-                <a:latin typeface="Calibri"/>
-              </a:rPr>
-              <a:t>Sounds beyond our hearing</a:t>
+              <a:rPr sz="1350" b="0" i="0">
+                <a:solidFill>
+                  <a:srgbClr val="6B7280"/>
+                </a:solidFill>
+                <a:latin typeface="Calibri"/>
+              </a:rPr>
+              <a:t>Sound bounces off hard surfaces, obeying the same laws as light (angle in = angle out).</a:t>
+            </a:r>
+          </a:p>
+        </p:txBody>
+      </p:sp>
+      <p:sp>
+        <p:nvSpPr>
+          <p:cNvPr id="11" name="Rounded Rectangle 10"/>
+          <p:cNvSpPr/>
+          <p:nvPr/>
+        </p:nvSpPr>
+        <p:spPr>
+          <a:xfrm>
+            <a:off x="6217920" y="1920240"/>
+            <a:ext cx="5212080" cy="1600200"/>
+          </a:xfrm>
+          <a:prstGeom prst="roundRect">
+            <a:avLst>
+              <a:gd name="adj" fmla="val 5000"/>
+            </a:avLst>
+          </a:prstGeom>
+          <a:solidFill>
+            <a:srgbClr val="FFFFFF"/>
+          </a:solidFill>
+          <a:ln>
+            <a:noFill/>
+          </a:ln>
+          <a:effectLst>
+            <a:outerShdw blurRad="88900" dist="38100" dir="5400000" rotWithShape="0" algn="bl">
+              <a:srgbClr val="000000">
+                <a:alpha val="16000"/>
+              </a:srgbClr>
+            </a:outerShdw>
+          </a:effectLst>
+        </p:spPr>
+        <p:style>
+          <a:lnRef idx="1">
+            <a:schemeClr val="accent1"/>
+          </a:lnRef>
+          <a:fillRef idx="3">
+            <a:schemeClr val="accent1"/>
+          </a:fillRef>
+          <a:effectRef idx="2">
+            <a:schemeClr val="accent1"/>
+          </a:effectRef>
+          <a:fontRef idx="minor">
+            <a:schemeClr val="lt1"/>
+          </a:fontRef>
+        </p:style>
+        <p:txBody>
+          <a:bodyPr rtlCol="0" anchor="ctr"/>
+          <a:lstStyle/>
+          <a:p>
+            <a:pPr algn="ctr"/>
+          </a:p>
+        </p:txBody>
+      </p:sp>
+      <p:sp>
+        <p:nvSpPr>
+          <p:cNvPr id="12" name="Rounded Rectangle 11"/>
+          <p:cNvSpPr/>
+          <p:nvPr/>
+        </p:nvSpPr>
+        <p:spPr>
+          <a:xfrm>
+            <a:off x="6537960" y="2212848"/>
+            <a:ext cx="502920" cy="502920"/>
+          </a:xfrm>
+          <a:prstGeom prst="roundRect">
+            <a:avLst>
+              <a:gd name="adj" fmla="val 30000"/>
+            </a:avLst>
+          </a:prstGeom>
+          <a:solidFill>
+            <a:srgbClr val="F4801A"/>
+          </a:solidFill>
+          <a:ln>
+            <a:noFill/>
+          </a:ln>
+          <a:effectLst/>
+        </p:spPr>
+        <p:style>
+          <a:lnRef idx="1">
+            <a:schemeClr val="accent1"/>
+          </a:lnRef>
+          <a:fillRef idx="3">
+            <a:schemeClr val="accent1"/>
+          </a:fillRef>
+          <a:effectRef idx="2">
+            <a:schemeClr val="accent1"/>
+          </a:effectRef>
+          <a:fontRef idx="minor">
+            <a:schemeClr val="lt1"/>
+          </a:fontRef>
+        </p:style>
+        <p:txBody>
+          <a:bodyPr rtlCol="0" anchor="ctr"/>
+          <a:lstStyle/>
+          <a:p>
+            <a:pPr algn="ctr"/>
+          </a:p>
+        </p:txBody>
+      </p:sp>
+      <p:pic>
+        <p:nvPicPr>
+          <p:cNvPr id="13" name="Picture 12" descr="sound_FFFFFF.png"/>
+          <p:cNvPicPr>
+            <a:picLocks noChangeAspect="1"/>
+          </p:cNvPicPr>
+          <p:nvPr/>
+        </p:nvPicPr>
+        <p:blipFill>
+          <a:blip r:embed="rId3"/>
+          <a:stretch>
+            <a:fillRect/>
+          </a:stretch>
+        </p:blipFill>
+        <p:spPr>
+          <a:xfrm>
+            <a:off x="6648602" y="2323490"/>
+            <a:ext cx="281635" cy="281635"/>
+          </a:xfrm>
+          <a:prstGeom prst="rect">
+            <a:avLst/>
+          </a:prstGeom>
+        </p:spPr>
+      </p:pic>
+      <p:sp>
+        <p:nvSpPr>
+          <p:cNvPr id="14" name="TextBox 13"/>
+          <p:cNvSpPr txBox="1"/>
+          <p:nvPr/>
+        </p:nvSpPr>
+        <p:spPr>
+          <a:xfrm>
+            <a:off x="7223760" y="2176272"/>
+            <a:ext cx="3931920" cy="457200"/>
+          </a:xfrm>
+          <a:prstGeom prst="rect">
+            <a:avLst/>
+          </a:prstGeom>
+          <a:noFill/>
+        </p:spPr>
+        <p:txBody>
+          <a:bodyPr wrap="square" anchor="t" lIns="0" rIns="0" tIns="0" bIns="0">
+            <a:spAutoFit/>
+          </a:bodyPr>
+          <a:lstStyle/>
+          <a:p>
+            <a:pPr algn="l"/>
+            <a:r>
+              <a:rPr sz="1700" b="1" i="0">
+                <a:solidFill>
+                  <a:srgbClr val="1D2433"/>
+                </a:solidFill>
+                <a:latin typeface="Calibri"/>
+              </a:rPr>
+              <a:t>Echo</a:t>
+            </a:r>
+          </a:p>
+        </p:txBody>
+      </p:sp>
+      <p:sp>
+        <p:nvSpPr>
+          <p:cNvPr id="15" name="TextBox 14"/>
+          <p:cNvSpPr txBox="1"/>
+          <p:nvPr/>
+        </p:nvSpPr>
+        <p:spPr>
+          <a:xfrm>
+            <a:off x="7223760" y="2670048"/>
+            <a:ext cx="3931920" cy="685800"/>
+          </a:xfrm>
+          <a:prstGeom prst="rect">
+            <a:avLst/>
+          </a:prstGeom>
+          <a:noFill/>
+        </p:spPr>
+        <p:txBody>
+          <a:bodyPr wrap="square" anchor="t" lIns="0" rIns="0" tIns="0" bIns="0">
+            <a:spAutoFit/>
+          </a:bodyPr>
+          <a:lstStyle/>
+          <a:p>
+            <a:pPr algn="l"/>
+            <a:r>
+              <a:rPr sz="1350" b="0" i="0">
+                <a:solidFill>
+                  <a:srgbClr val="6B7280"/>
+                </a:solidFill>
+                <a:latin typeface="Calibri"/>
+              </a:rPr>
+              <a:t>A reflected sound heard separately from the original is an echo.</a:t>
+            </a:r>
+          </a:p>
+        </p:txBody>
+      </p:sp>
+      <p:sp>
+        <p:nvSpPr>
+          <p:cNvPr id="16" name="Rounded Rectangle 15"/>
+          <p:cNvSpPr/>
+          <p:nvPr/>
+        </p:nvSpPr>
+        <p:spPr>
+          <a:xfrm>
+            <a:off x="640080" y="3749039"/>
+            <a:ext cx="5212080" cy="1600200"/>
+          </a:xfrm>
+          <a:prstGeom prst="roundRect">
+            <a:avLst>
+              <a:gd name="adj" fmla="val 5000"/>
+            </a:avLst>
+          </a:prstGeom>
+          <a:solidFill>
+            <a:srgbClr val="FFFFFF"/>
+          </a:solidFill>
+          <a:ln>
+            <a:noFill/>
+          </a:ln>
+          <a:effectLst>
+            <a:outerShdw blurRad="88900" dist="38100" dir="5400000" rotWithShape="0" algn="bl">
+              <a:srgbClr val="000000">
+                <a:alpha val="16000"/>
+              </a:srgbClr>
+            </a:outerShdw>
+          </a:effectLst>
+        </p:spPr>
+        <p:style>
+          <a:lnRef idx="1">
+            <a:schemeClr val="accent1"/>
+          </a:lnRef>
+          <a:fillRef idx="3">
+            <a:schemeClr val="accent1"/>
+          </a:fillRef>
+          <a:effectRef idx="2">
+            <a:schemeClr val="accent1"/>
+          </a:effectRef>
+          <a:fontRef idx="minor">
+            <a:schemeClr val="lt1"/>
+          </a:fontRef>
+        </p:style>
+        <p:txBody>
+          <a:bodyPr rtlCol="0" anchor="ctr"/>
+          <a:lstStyle/>
+          <a:p>
+            <a:pPr algn="ctr"/>
+          </a:p>
+        </p:txBody>
+      </p:sp>
+      <p:sp>
+        <p:nvSpPr>
+          <p:cNvPr id="17" name="Rounded Rectangle 16"/>
+          <p:cNvSpPr/>
+          <p:nvPr/>
+        </p:nvSpPr>
+        <p:spPr>
+          <a:xfrm>
+            <a:off x="960119" y="4041648"/>
+            <a:ext cx="502920" cy="502920"/>
+          </a:xfrm>
+          <a:prstGeom prst="roundRect">
+            <a:avLst>
+              <a:gd name="adj" fmla="val 30000"/>
+            </a:avLst>
+          </a:prstGeom>
+          <a:solidFill>
+            <a:srgbClr val="6A4C93"/>
+          </a:solidFill>
+          <a:ln>
+            <a:noFill/>
+          </a:ln>
+          <a:effectLst/>
+        </p:spPr>
+        <p:style>
+          <a:lnRef idx="1">
+            <a:schemeClr val="accent1"/>
+          </a:lnRef>
+          <a:fillRef idx="3">
+            <a:schemeClr val="accent1"/>
+          </a:fillRef>
+          <a:effectRef idx="2">
+            <a:schemeClr val="accent1"/>
+          </a:effectRef>
+          <a:fontRef idx="minor">
+            <a:schemeClr val="lt1"/>
+          </a:fontRef>
+        </p:style>
+        <p:txBody>
+          <a:bodyPr rtlCol="0" anchor="ctr"/>
+          <a:lstStyle/>
+          <a:p>
+            <a:pPr algn="ctr"/>
+          </a:p>
+        </p:txBody>
+      </p:sp>
+      <p:pic>
+        <p:nvPicPr>
+          <p:cNvPr id="18" name="Picture 17" descr="spark_FFFFFF.png"/>
+          <p:cNvPicPr>
+            <a:picLocks noChangeAspect="1"/>
+          </p:cNvPicPr>
+          <p:nvPr/>
+        </p:nvPicPr>
+        <p:blipFill>
+          <a:blip r:embed="rId4"/>
+          <a:stretch>
+            <a:fillRect/>
+          </a:stretch>
+        </p:blipFill>
+        <p:spPr>
+          <a:xfrm>
+            <a:off x="1070762" y="4152290"/>
+            <a:ext cx="281635" cy="281635"/>
+          </a:xfrm>
+          <a:prstGeom prst="rect">
+            <a:avLst/>
+          </a:prstGeom>
+        </p:spPr>
+      </p:pic>
+      <p:sp>
+        <p:nvSpPr>
+          <p:cNvPr id="19" name="TextBox 18"/>
+          <p:cNvSpPr txBox="1"/>
+          <p:nvPr/>
+        </p:nvSpPr>
+        <p:spPr>
+          <a:xfrm>
+            <a:off x="1645920" y="4005072"/>
+            <a:ext cx="3931920" cy="457200"/>
+          </a:xfrm>
+          <a:prstGeom prst="rect">
+            <a:avLst/>
+          </a:prstGeom>
+          <a:noFill/>
+        </p:spPr>
+        <p:txBody>
+          <a:bodyPr wrap="square" anchor="t" lIns="0" rIns="0" tIns="0" bIns="0">
+            <a:spAutoFit/>
+          </a:bodyPr>
+          <a:lstStyle/>
+          <a:p>
+            <a:pPr algn="l"/>
+            <a:r>
+              <a:rPr sz="1700" b="1" i="0">
+                <a:solidFill>
+                  <a:srgbClr val="1D2433"/>
+                </a:solidFill>
+                <a:latin typeface="Calibri"/>
+              </a:rPr>
+              <a:t>Condition</a:t>
+            </a:r>
+          </a:p>
+        </p:txBody>
+      </p:sp>
+      <p:sp>
+        <p:nvSpPr>
+          <p:cNvPr id="20" name="TextBox 19"/>
+          <p:cNvSpPr txBox="1"/>
+          <p:nvPr/>
+        </p:nvSpPr>
+        <p:spPr>
+          <a:xfrm>
+            <a:off x="1645920" y="4498848"/>
+            <a:ext cx="3931920" cy="685800"/>
+          </a:xfrm>
+          <a:prstGeom prst="rect">
+            <a:avLst/>
+          </a:prstGeom>
+          <a:noFill/>
+        </p:spPr>
+        <p:txBody>
+          <a:bodyPr wrap="square" anchor="t" lIns="0" rIns="0" tIns="0" bIns="0">
+            <a:spAutoFit/>
+          </a:bodyPr>
+          <a:lstStyle/>
+          <a:p>
+            <a:pPr algn="l"/>
+            <a:r>
+              <a:rPr sz="1350" b="0" i="0">
+                <a:solidFill>
+                  <a:srgbClr val="6B7280"/>
+                </a:solidFill>
+                <a:latin typeface="Calibri"/>
+              </a:rPr>
+              <a:t>The reflector must be far enough that the echo returns at least 0.1 s later (about 17 m away).</a:t>
+            </a:r>
+          </a:p>
+        </p:txBody>
+      </p:sp>
+      <p:sp>
+        <p:nvSpPr>
+          <p:cNvPr id="21" name="Rounded Rectangle 20"/>
+          <p:cNvSpPr/>
+          <p:nvPr/>
+        </p:nvSpPr>
+        <p:spPr>
+          <a:xfrm>
+            <a:off x="6217920" y="3749039"/>
+            <a:ext cx="5212080" cy="1600200"/>
+          </a:xfrm>
+          <a:prstGeom prst="roundRect">
+            <a:avLst>
+              <a:gd name="adj" fmla="val 5000"/>
+            </a:avLst>
+          </a:prstGeom>
+          <a:solidFill>
+            <a:srgbClr val="FFFFFF"/>
+          </a:solidFill>
+          <a:ln>
+            <a:noFill/>
+          </a:ln>
+          <a:effectLst>
+            <a:outerShdw blurRad="88900" dist="38100" dir="5400000" rotWithShape="0" algn="bl">
+              <a:srgbClr val="000000">
+                <a:alpha val="16000"/>
+              </a:srgbClr>
+            </a:outerShdw>
+          </a:effectLst>
+        </p:spPr>
+        <p:style>
+          <a:lnRef idx="1">
+            <a:schemeClr val="accent1"/>
+          </a:lnRef>
+          <a:fillRef idx="3">
+            <a:schemeClr val="accent1"/>
+          </a:fillRef>
+          <a:effectRef idx="2">
+            <a:schemeClr val="accent1"/>
+          </a:effectRef>
+          <a:fontRef idx="minor">
+            <a:schemeClr val="lt1"/>
+          </a:fontRef>
+        </p:style>
+        <p:txBody>
+          <a:bodyPr rtlCol="0" anchor="ctr"/>
+          <a:lstStyle/>
+          <a:p>
+            <a:pPr algn="ctr"/>
+          </a:p>
+        </p:txBody>
+      </p:sp>
+      <p:sp>
+        <p:nvSpPr>
+          <p:cNvPr id="22" name="Rounded Rectangle 21"/>
+          <p:cNvSpPr/>
+          <p:nvPr/>
+        </p:nvSpPr>
+        <p:spPr>
+          <a:xfrm>
+            <a:off x="6537960" y="4041648"/>
+            <a:ext cx="502920" cy="502920"/>
+          </a:xfrm>
+          <a:prstGeom prst="roundRect">
+            <a:avLst>
+              <a:gd name="adj" fmla="val 30000"/>
+            </a:avLst>
+          </a:prstGeom>
+          <a:solidFill>
+            <a:srgbClr val="E63946"/>
+          </a:solidFill>
+          <a:ln>
+            <a:noFill/>
+          </a:ln>
+          <a:effectLst/>
+        </p:spPr>
+        <p:style>
+          <a:lnRef idx="1">
+            <a:schemeClr val="accent1"/>
+          </a:lnRef>
+          <a:fillRef idx="3">
+            <a:schemeClr val="accent1"/>
+          </a:fillRef>
+          <a:effectRef idx="2">
+            <a:schemeClr val="accent1"/>
+          </a:effectRef>
+          <a:fontRef idx="minor">
+            <a:schemeClr val="lt1"/>
+          </a:fontRef>
+        </p:style>
+        <p:txBody>
+          <a:bodyPr rtlCol="0" anchor="ctr"/>
+          <a:lstStyle/>
+          <a:p>
+            <a:pPr algn="ctr"/>
+          </a:p>
+        </p:txBody>
+      </p:sp>
+      <p:pic>
+        <p:nvPicPr>
+          <p:cNvPr id="23" name="Picture 22" descr="target_FFFFFF.png"/>
+          <p:cNvPicPr>
+            <a:picLocks noChangeAspect="1"/>
+          </p:cNvPicPr>
+          <p:nvPr/>
+        </p:nvPicPr>
+        <p:blipFill>
+          <a:blip r:embed="rId5"/>
+          <a:stretch>
+            <a:fillRect/>
+          </a:stretch>
+        </p:blipFill>
+        <p:spPr>
+          <a:xfrm>
+            <a:off x="6648602" y="4152290"/>
+            <a:ext cx="281635" cy="281635"/>
+          </a:xfrm>
+          <a:prstGeom prst="rect">
+            <a:avLst/>
+          </a:prstGeom>
+        </p:spPr>
+      </p:pic>
+      <p:sp>
+        <p:nvSpPr>
+          <p:cNvPr id="24" name="TextBox 23"/>
+          <p:cNvSpPr txBox="1"/>
+          <p:nvPr/>
+        </p:nvSpPr>
+        <p:spPr>
+          <a:xfrm>
+            <a:off x="7223760" y="4005072"/>
+            <a:ext cx="3931920" cy="457200"/>
+          </a:xfrm>
+          <a:prstGeom prst="rect">
+            <a:avLst/>
+          </a:prstGeom>
+          <a:noFill/>
+        </p:spPr>
+        <p:txBody>
+          <a:bodyPr wrap="square" anchor="t" lIns="0" rIns="0" tIns="0" bIns="0">
+            <a:spAutoFit/>
+          </a:bodyPr>
+          <a:lstStyle/>
+          <a:p>
+            <a:pPr algn="l"/>
+            <a:r>
+              <a:rPr sz="1700" b="1" i="0">
+                <a:solidFill>
+                  <a:srgbClr val="1D2433"/>
+                </a:solidFill>
+                <a:latin typeface="Calibri"/>
+              </a:rPr>
+              <a:t>Uses</a:t>
+            </a:r>
+          </a:p>
+        </p:txBody>
+      </p:sp>
+      <p:sp>
+        <p:nvSpPr>
+          <p:cNvPr id="25" name="TextBox 24"/>
+          <p:cNvSpPr txBox="1"/>
+          <p:nvPr/>
+        </p:nvSpPr>
+        <p:spPr>
+          <a:xfrm>
+            <a:off x="7223760" y="4498848"/>
+            <a:ext cx="3931920" cy="685800"/>
+          </a:xfrm>
+          <a:prstGeom prst="rect">
+            <a:avLst/>
+          </a:prstGeom>
+          <a:noFill/>
+        </p:spPr>
+        <p:txBody>
+          <a:bodyPr wrap="square" anchor="t" lIns="0" rIns="0" tIns="0" bIns="0">
+            <a:spAutoFit/>
+          </a:bodyPr>
+          <a:lstStyle/>
+          <a:p>
+            <a:pPr algn="l"/>
+            <a:r>
+              <a:rPr sz="1350" b="0" i="0">
+                <a:solidFill>
+                  <a:srgbClr val="6B7280"/>
+                </a:solidFill>
+                <a:latin typeface="Calibri"/>
+              </a:rPr>
+              <a:t>Echoes are used in SONAR and depth-sounding, and to measure the speed of sound.</a:t>
             </a:r>
           </a:p>
         </p:txBody>
@@ -14700,7 +15584,7 @@
                 </a:solidFill>
                 <a:latin typeface="Arial"/>
               </a:rPr>
-              <a:t>RANGE</a:t>
+              <a:t>CHARACTERISTICS</a:t>
             </a:r>
           </a:p>
         </p:txBody>
@@ -14735,7 +15619,7 @@
                 </a:solidFill>
                 <a:latin typeface="Calibri"/>
               </a:rPr>
-              <a:t>Infrasonic, Sonic and Ultrasonic</a:t>
+              <a:t>Characteristics of a Musical Sound</a:t>
             </a:r>
           </a:p>
         </p:txBody>
@@ -14840,7 +15724,7 @@
       </p:sp>
       <p:pic>
         <p:nvPicPr>
-          <p:cNvPr id="8" name="Picture 7" descr="sound_FFFFFF.png"/>
+          <p:cNvPr id="8" name="Picture 7" descr="spark_FFFFFF.png"/>
           <p:cNvPicPr>
             <a:picLocks noChangeAspect="1"/>
           </p:cNvPicPr>
@@ -14892,7 +15776,7 @@
                 </a:solidFill>
                 <a:latin typeface="Calibri"/>
               </a:rPr>
-              <a:t>Audible (sonic)</a:t>
+              <a:t>Loudness</a:t>
             </a:r>
           </a:p>
         </p:txBody>
@@ -14927,7 +15811,7 @@
                 </a:solidFill>
                 <a:latin typeface="Calibri"/>
               </a:rPr>
-              <a:t>Frequencies we can hear: about 20 Hz to 20,000 Hz.</a:t>
+              <a:t>Set by the amplitude — a bigger vibration sounds louder.</a:t>
             </a:r>
           </a:p>
         </p:txBody>
@@ -15039,7 +15923,7 @@
           <p:nvPr/>
         </p:nvPicPr>
         <p:blipFill>
-          <a:blip r:embed="rId3"/>
+          <a:blip r:embed="rId2"/>
           <a:stretch>
             <a:fillRect/>
           </a:stretch>
@@ -15084,7 +15968,7 @@
                 </a:solidFill>
                 <a:latin typeface="Calibri"/>
               </a:rPr>
-              <a:t>Infrasonic</a:t>
+              <a:t>Pitch</a:t>
             </a:r>
           </a:p>
         </p:txBody>
@@ -15119,7 +16003,7 @@
                 </a:solidFill>
                 <a:latin typeface="Calibri"/>
               </a:rPr>
-              <a:t>Below 20 Hz — too low to hear; from earthquakes and large animals like elephants.</a:t>
+              <a:t>Set by the frequency — a higher frequency sounds higher-pitched.</a:t>
             </a:r>
           </a:p>
         </p:txBody>
@@ -15231,7 +16115,7 @@
           <p:nvPr/>
         </p:nvPicPr>
         <p:blipFill>
-          <a:blip r:embed="rId3"/>
+          <a:blip r:embed="rId2"/>
           <a:stretch>
             <a:fillRect/>
           </a:stretch>
@@ -15276,7 +16160,7 @@
                 </a:solidFill>
                 <a:latin typeface="Calibri"/>
               </a:rPr>
-              <a:t>Ultrasonic</a:t>
+              <a:t>Quality (timbre)</a:t>
             </a:r>
           </a:p>
         </p:txBody>
@@ -15311,7 +16195,7 @@
                 </a:solidFill>
                 <a:latin typeface="Calibri"/>
               </a:rPr>
-              <a:t>Above 20,000 Hz — too high to hear; produced and heard by bats and dolphins.</a:t>
+              <a:t>Lets us tell two instruments apart even at the same pitch and loudness.</a:t>
             </a:r>
           </a:p>
         </p:txBody>
@@ -15416,7 +16300,7 @@
       </p:sp>
       <p:pic>
         <p:nvPicPr>
-          <p:cNvPr id="23" name="Picture 22" descr="spark_FFFFFF.png"/>
+          <p:cNvPr id="23" name="Picture 22" descr="sound_FFFFFF.png"/>
           <p:cNvPicPr>
             <a:picLocks noChangeAspect="1"/>
           </p:cNvPicPr>
@@ -15468,7 +16352,7 @@
                 </a:solidFill>
                 <a:latin typeface="Calibri"/>
               </a:rPr>
-              <a:t>With age</a:t>
+              <a:t>Musical note vs noise</a:t>
             </a:r>
           </a:p>
         </p:txBody>
@@ -15503,7 +16387,7 @@
                 </a:solidFill>
                 <a:latin typeface="Calibri"/>
               </a:rPr>
-              <a:t>The upper limit of human hearing drops as we grow older.</a:t>
+              <a:t>A note has a regular, pleasant waveform; noise is irregular and jarring.</a:t>
             </a:r>
           </a:p>
         </p:txBody>
@@ -15522,7 +16406,7 @@
     <p:bg>
       <p:bgPr>
         <a:solidFill>
-          <a:srgbClr val="F4F6F8"/>
+          <a:srgbClr val="1D2433"/>
         </a:solidFill>
         <a:effectLst/>
       </p:bgPr>
@@ -15542,54 +16426,10 @@
         </p:nvSpPr>
         <p:spPr>
           <a:xfrm>
-            <a:off x="10927080" y="365760"/>
-            <a:ext cx="868680" cy="868680"/>
+            <a:off x="8595360" y="-1463040"/>
+            <a:ext cx="4937760" cy="4937760"/>
           </a:xfrm>
           <a:prstGeom prst="ellipse">
-            <a:avLst/>
-          </a:prstGeom>
-          <a:noFill/>
-          <a:ln w="15875">
-            <a:solidFill>
-              <a:srgbClr val="DDE2E8"/>
-            </a:solidFill>
-          </a:ln>
-          <a:effectLst/>
-        </p:spPr>
-        <p:style>
-          <a:lnRef idx="1">
-            <a:schemeClr val="accent1"/>
-          </a:lnRef>
-          <a:fillRef idx="3">
-            <a:schemeClr val="accent1"/>
-          </a:fillRef>
-          <a:effectRef idx="2">
-            <a:schemeClr val="accent1"/>
-          </a:effectRef>
-          <a:fontRef idx="minor">
-            <a:schemeClr val="lt1"/>
-          </a:fontRef>
-        </p:style>
-        <p:txBody>
-          <a:bodyPr rtlCol="0" anchor="ctr"/>
-          <a:lstStyle/>
-          <a:p>
-            <a:pPr algn="ctr"/>
-          </a:p>
-        </p:txBody>
-      </p:sp>
-      <p:sp>
-        <p:nvSpPr>
-          <p:cNvPr id="3" name="Rectangle 2"/>
-          <p:cNvSpPr/>
-          <p:nvPr/>
-        </p:nvSpPr>
-        <p:spPr>
-          <a:xfrm>
-            <a:off x="548640" y="502920"/>
-            <a:ext cx="256032" cy="256032"/>
-          </a:xfrm>
-          <a:prstGeom prst="rect">
             <a:avLst/>
           </a:prstGeom>
           <a:solidFill>
@@ -15624,14 +16464,49 @@
       </p:sp>
       <p:sp>
         <p:nvSpPr>
+          <p:cNvPr id="3" name="TextBox 2"/>
+          <p:cNvSpPr txBox="1"/>
+          <p:nvPr/>
+        </p:nvSpPr>
+        <p:spPr>
+          <a:xfrm>
+            <a:off x="8503920" y="3108960"/>
+            <a:ext cx="3383280" cy="2743200"/>
+          </a:xfrm>
+          <a:prstGeom prst="rect">
+            <a:avLst/>
+          </a:prstGeom>
+          <a:noFill/>
+        </p:spPr>
+        <p:txBody>
+          <a:bodyPr wrap="square" anchor="t" lIns="0" rIns="0" tIns="0" bIns="0">
+            <a:spAutoFit/>
+          </a:bodyPr>
+          <a:lstStyle/>
+          <a:p>
+            <a:pPr algn="r"/>
+            <a:r>
+              <a:rPr sz="20000" b="1" i="0">
+                <a:solidFill>
+                  <a:srgbClr val="263149"/>
+                </a:solidFill>
+                <a:latin typeface="Calibri"/>
+              </a:rPr>
+              <a:t>2</a:t>
+            </a:r>
+          </a:p>
+        </p:txBody>
+      </p:sp>
+      <p:sp>
+        <p:nvSpPr>
           <p:cNvPr id="4" name="TextBox 3"/>
           <p:cNvSpPr txBox="1"/>
           <p:nvPr/>
         </p:nvSpPr>
         <p:spPr>
           <a:xfrm>
-            <a:off x="914400" y="457200"/>
-            <a:ext cx="9509760" cy="320040"/>
+            <a:off x="777240" y="2148840"/>
+            <a:ext cx="6949440" cy="457200"/>
           </a:xfrm>
           <a:prstGeom prst="rect">
             <a:avLst/>
@@ -15646,13 +16521,13 @@
           <a:p>
             <a:pPr algn="l"/>
             <a:r>
-              <a:rPr sz="1300" b="1" i="0">
-                <a:solidFill>
-                  <a:srgbClr val="6A4C93"/>
+              <a:rPr sz="1600" b="1" i="0">
+                <a:solidFill>
+                  <a:srgbClr val="FFC300"/>
                 </a:solidFill>
                 <a:latin typeface="Arial"/>
               </a:rPr>
-              <a:t>ULTRASOUND</a:t>
+              <a:t>PART 2</a:t>
             </a:r>
           </a:p>
         </p:txBody>
@@ -15665,8 +16540,8 @@
         </p:nvSpPr>
         <p:spPr>
           <a:xfrm>
-            <a:off x="548640" y="777240"/>
-            <a:ext cx="9966960" cy="822960"/>
+            <a:off x="777240" y="2697480"/>
+            <a:ext cx="7498079" cy="1097280"/>
           </a:xfrm>
           <a:prstGeom prst="rect">
             <a:avLst/>
@@ -15681,79 +16556,27 @@
           <a:p>
             <a:pPr algn="l"/>
             <a:r>
-              <a:rPr sz="3000" b="1" i="0">
-                <a:solidFill>
-                  <a:srgbClr val="1D2433"/>
-                </a:solidFill>
-                <a:latin typeface="Calibri"/>
-              </a:rPr>
-              <a:t>Uses of Ultrasound</a:t>
-            </a:r>
-          </a:p>
-        </p:txBody>
-      </p:sp>
-      <p:sp>
-        <p:nvSpPr>
-          <p:cNvPr id="6" name="Rounded Rectangle 5"/>
-          <p:cNvSpPr/>
-          <p:nvPr/>
-        </p:nvSpPr>
-        <p:spPr>
-          <a:xfrm>
-            <a:off x="640080" y="1828800"/>
-            <a:ext cx="10881360" cy="4114800"/>
-          </a:xfrm>
-          <a:prstGeom prst="roundRect">
-            <a:avLst>
-              <a:gd name="adj" fmla="val 3000"/>
-            </a:avLst>
-          </a:prstGeom>
-          <a:solidFill>
-            <a:srgbClr val="FFFFFF"/>
-          </a:solidFill>
-          <a:ln>
-            <a:noFill/>
-          </a:ln>
-          <a:effectLst>
-            <a:outerShdw blurRad="88900" dist="38100" dir="5400000" rotWithShape="0" algn="bl">
-              <a:srgbClr val="000000">
-                <a:alpha val="16000"/>
-              </a:srgbClr>
-            </a:outerShdw>
-          </a:effectLst>
-        </p:spPr>
-        <p:style>
-          <a:lnRef idx="1">
-            <a:schemeClr val="accent1"/>
-          </a:lnRef>
-          <a:fillRef idx="3">
-            <a:schemeClr val="accent1"/>
-          </a:fillRef>
-          <a:effectRef idx="2">
-            <a:schemeClr val="accent1"/>
-          </a:effectRef>
-          <a:fontRef idx="minor">
-            <a:schemeClr val="lt1"/>
-          </a:fontRef>
-        </p:style>
-        <p:txBody>
-          <a:bodyPr rtlCol="0" anchor="ctr"/>
-          <a:lstStyle/>
-          <a:p>
-            <a:pPr algn="ctr"/>
-          </a:p>
-        </p:txBody>
-      </p:sp>
-      <p:sp>
-        <p:nvSpPr>
-          <p:cNvPr id="7" name="TextBox 6"/>
-          <p:cNvSpPr txBox="1"/>
-          <p:nvPr/>
-        </p:nvSpPr>
-        <p:spPr>
-          <a:xfrm>
-            <a:off x="1005840" y="2103120"/>
-            <a:ext cx="10058400" cy="411480"/>
+              <a:rPr sz="4200" b="1" i="0">
+                <a:solidFill>
+                  <a:srgbClr val="FFFFFF"/>
+                </a:solidFill>
+                <a:latin typeface="Calibri"/>
+              </a:rPr>
+              <a:t>Infrasound, Ultrasound &amp; Uses</a:t>
+            </a:r>
+          </a:p>
+        </p:txBody>
+      </p:sp>
+      <p:sp>
+        <p:nvSpPr>
+          <p:cNvPr id="6" name="TextBox 5"/>
+          <p:cNvSpPr txBox="1"/>
+          <p:nvPr/>
+        </p:nvSpPr>
+        <p:spPr>
+          <a:xfrm>
+            <a:off x="777240" y="4114800"/>
+            <a:ext cx="7315200" cy="822960"/>
           </a:xfrm>
           <a:prstGeom prst="rect">
             <a:avLst/>
@@ -15768,184 +16591,13 @@
           <a:p>
             <a:pPr algn="l"/>
             <a:r>
-              <a:rPr sz="1800" b="1" i="0">
-                <a:solidFill>
-                  <a:srgbClr val="6A4C93"/>
-                </a:solidFill>
-                <a:latin typeface="Calibri"/>
-              </a:rPr>
-              <a:t>High-frequency sound at work</a:t>
-            </a:r>
-          </a:p>
-        </p:txBody>
-      </p:sp>
-      <p:sp>
-        <p:nvSpPr>
-          <p:cNvPr id="8" name="TextBox 7"/>
-          <p:cNvSpPr txBox="1"/>
-          <p:nvPr/>
-        </p:nvSpPr>
-        <p:spPr>
-          <a:xfrm>
-            <a:off x="1005840" y="2697480"/>
-            <a:ext cx="10058400" cy="3063239"/>
-          </a:xfrm>
-          <a:prstGeom prst="rect">
-            <a:avLst/>
-          </a:prstGeom>
-          <a:noFill/>
-        </p:spPr>
-        <p:txBody>
-          <a:bodyPr wrap="square" anchor="t" lIns="0" rIns="0" tIns="0" bIns="0">
-            <a:spAutoFit/>
-          </a:bodyPr>
-          <a:lstStyle/>
-          <a:p>
-            <a:pPr algn="l">
-              <a:lnSpc>
-                <a:spcPct val="105000"/>
-              </a:lnSpc>
-              <a:spcAft>
-                <a:spcPts val="1100"/>
-              </a:spcAft>
-            </a:pPr>
-            <a:r>
-              <a:rPr sz="1600" b="1" i="0">
-                <a:solidFill>
-                  <a:srgbClr val="6A4C93"/>
-                </a:solidFill>
-                <a:latin typeface="Calibri"/>
-              </a:rPr>
-              <a:t>•  </a:t>
-            </a:r>
-            <a:r>
-              <a:rPr sz="1600" b="1" i="0">
-                <a:solidFill>
-                  <a:srgbClr val="1D2433"/>
-                </a:solidFill>
-                <a:latin typeface="Calibri"/>
-              </a:rPr>
-              <a:t>Medical scans  </a:t>
-            </a:r>
-            <a:r>
-              <a:rPr sz="1500" b="0" i="0">
-                <a:solidFill>
-                  <a:srgbClr val="6B7280"/>
-                </a:solidFill>
-                <a:latin typeface="Calibri"/>
-              </a:rPr>
-              <a:t>Ultrasound builds images of a baby or internal organs safely.</a:t>
-            </a:r>
-          </a:p>
-          <a:p>
-            <a:pPr algn="l">
-              <a:lnSpc>
-                <a:spcPct val="105000"/>
-              </a:lnSpc>
-              <a:spcAft>
-                <a:spcPts val="1100"/>
-              </a:spcAft>
-            </a:pPr>
-            <a:r>
-              <a:rPr sz="1600" b="1" i="0">
-                <a:solidFill>
-                  <a:srgbClr val="6A4C93"/>
-                </a:solidFill>
-                <a:latin typeface="Calibri"/>
-              </a:rPr>
-              <a:t>•  </a:t>
-            </a:r>
-            <a:r>
-              <a:rPr sz="1600" b="1" i="0">
-                <a:solidFill>
-                  <a:srgbClr val="1D2433"/>
-                </a:solidFill>
-                <a:latin typeface="Calibri"/>
-              </a:rPr>
-              <a:t>SONAR  </a:t>
-            </a:r>
-            <a:r>
-              <a:rPr sz="1500" b="0" i="0">
-                <a:solidFill>
-                  <a:srgbClr val="6B7280"/>
-                </a:solidFill>
-                <a:latin typeface="Calibri"/>
-              </a:rPr>
-              <a:t>Ships find the depth of the sea and locate shoals or wrecks.</a:t>
-            </a:r>
-          </a:p>
-          <a:p>
-            <a:pPr algn="l">
-              <a:lnSpc>
-                <a:spcPct val="105000"/>
-              </a:lnSpc>
-              <a:spcAft>
-                <a:spcPts val="1100"/>
-              </a:spcAft>
-            </a:pPr>
-            <a:r>
-              <a:rPr sz="1600" b="1" i="0">
-                <a:solidFill>
-                  <a:srgbClr val="6A4C93"/>
-                </a:solidFill>
-                <a:latin typeface="Calibri"/>
-              </a:rPr>
-              <a:t>•  </a:t>
-            </a:r>
-            <a:r>
-              <a:rPr sz="1600" b="1" i="0">
-                <a:solidFill>
-                  <a:srgbClr val="1D2433"/>
-                </a:solidFill>
-                <a:latin typeface="Calibri"/>
-              </a:rPr>
-              <a:t>Cleaning  </a:t>
-            </a:r>
-            <a:r>
-              <a:rPr sz="1500" b="0" i="0">
-                <a:solidFill>
-                  <a:srgbClr val="6B7280"/>
-                </a:solidFill>
-                <a:latin typeface="Calibri"/>
-              </a:rPr>
-              <a:t>Ultrasonic vibrations clean delicate items like jewellery and instruments.</a:t>
-            </a:r>
-          </a:p>
-          <a:p>
-            <a:pPr algn="l">
-              <a:lnSpc>
-                <a:spcPct val="105000"/>
-              </a:lnSpc>
-              <a:spcAft>
-                <a:spcPts val="1100"/>
-              </a:spcAft>
-            </a:pPr>
-            <a:r>
-              <a:rPr sz="1600" b="1" i="0">
-                <a:solidFill>
-                  <a:srgbClr val="6A4C93"/>
-                </a:solidFill>
-                <a:latin typeface="Calibri"/>
-              </a:rPr>
-              <a:t>•  </a:t>
-            </a:r>
-            <a:r>
-              <a:rPr sz="1600" b="1" i="0">
-                <a:solidFill>
-                  <a:srgbClr val="1D2433"/>
-                </a:solidFill>
-                <a:latin typeface="Calibri"/>
-              </a:rPr>
-              <a:t>Flaw detection  </a:t>
-            </a:r>
-            <a:r>
-              <a:rPr sz="1500" b="0" i="0">
-                <a:solidFill>
-                  <a:srgbClr val="6B7280"/>
-                </a:solidFill>
-                <a:latin typeface="Calibri"/>
-              </a:rPr>
-              <a:t>Reveals hidden cracks inside metal castings and welds.</a:t>
+              <a:rPr sz="1800" b="0" i="0">
+                <a:solidFill>
+                  <a:srgbClr val="CADCFC"/>
+                </a:solidFill>
+                <a:latin typeface="Calibri"/>
+              </a:rPr>
+              <a:t>Sounds beyond our hearing</a:t>
             </a:r>
           </a:p>
         </p:txBody>
@@ -16094,7 +16746,7 @@
                 </a:solidFill>
                 <a:latin typeface="Arial"/>
               </a:rPr>
-              <a:t>WHY ULTRASOUND</a:t>
+              <a:t>RANGE</a:t>
             </a:r>
           </a:p>
         </p:txBody>
@@ -16129,7 +16781,7 @@
                 </a:solidFill>
                 <a:latin typeface="Calibri"/>
               </a:rPr>
-              <a:t>Why Ultrasound Is So Useful</a:t>
+              <a:t>Infrasonic, Sonic and Ultrasonic</a:t>
             </a:r>
           </a:p>
         </p:txBody>
@@ -16234,7 +16886,7 @@
       </p:sp>
       <p:pic>
         <p:nvPicPr>
-          <p:cNvPr id="8" name="Picture 7" descr="ray_FFFFFF.png"/>
+          <p:cNvPr id="8" name="Picture 7" descr="sound_FFFFFF.png"/>
           <p:cNvPicPr>
             <a:picLocks noChangeAspect="1"/>
           </p:cNvPicPr>
@@ -16286,7 +16938,7 @@
                 </a:solidFill>
                 <a:latin typeface="Calibri"/>
               </a:rPr>
-              <a:t>Narrow beam</a:t>
+              <a:t>Audible (sonic)</a:t>
             </a:r>
           </a:p>
         </p:txBody>
@@ -16321,7 +16973,7 @@
                 </a:solidFill>
                 <a:latin typeface="Calibri"/>
               </a:rPr>
-              <a:t>Its short wavelength can be sent as a focused, directed beam.</a:t>
+              <a:t>Frequencies we can hear: about 20 Hz to 20,000 Hz.</a:t>
             </a:r>
           </a:p>
         </p:txBody>
@@ -16478,7 +17130,7 @@
                 </a:solidFill>
                 <a:latin typeface="Calibri"/>
               </a:rPr>
-              <a:t>Fine detail</a:t>
+              <a:t>Infrasonic</a:t>
             </a:r>
           </a:p>
         </p:txBody>
@@ -16513,7 +17165,7 @@
                 </a:solidFill>
                 <a:latin typeface="Calibri"/>
               </a:rPr>
-              <a:t>Short wavelengths resolve small features in scans and tests.</a:t>
+              <a:t>Below 20 Hz — too low to hear; from earthquakes and large animals like elephants.</a:t>
             </a:r>
           </a:p>
         </p:txBody>
@@ -16670,7 +17322,7 @@
                 </a:solidFill>
                 <a:latin typeface="Calibri"/>
               </a:rPr>
-              <a:t>Harmless</a:t>
+              <a:t>Ultrasonic</a:t>
             </a:r>
           </a:p>
         </p:txBody>
@@ -16705,7 +17357,7 @@
                 </a:solidFill>
                 <a:latin typeface="Calibri"/>
               </a:rPr>
-              <a:t>At the levels used, it does not damage living tissue like X-rays can.</a:t>
+              <a:t>Above 20,000 Hz — too high to hear; produced and heard by bats and dolphins.</a:t>
             </a:r>
           </a:p>
         </p:txBody>
@@ -16810,14 +17462,14 @@
       </p:sp>
       <p:pic>
         <p:nvPicPr>
-          <p:cNvPr id="23" name="Picture 22" descr="sound_FFFFFF.png"/>
+          <p:cNvPr id="23" name="Picture 22" descr="spark_FFFFFF.png"/>
           <p:cNvPicPr>
             <a:picLocks noChangeAspect="1"/>
           </p:cNvPicPr>
           <p:nvPr/>
         </p:nvPicPr>
         <p:blipFill>
-          <a:blip r:embed="rId4"/>
+          <a:blip r:embed="rId3"/>
           <a:stretch>
             <a:fillRect/>
           </a:stretch>
@@ -16862,7 +17514,7 @@
                 </a:solidFill>
                 <a:latin typeface="Calibri"/>
               </a:rPr>
-              <a:t>Echoes</a:t>
+              <a:t>With age</a:t>
             </a:r>
           </a:p>
         </p:txBody>
@@ -16897,7 +17549,7 @@
                 </a:solidFill>
                 <a:latin typeface="Calibri"/>
               </a:rPr>
-              <a:t>It reflects clearly off boundaries, so echoes can be timed and imaged.</a:t>
+              <a:t>The upper limit of human hearing drops as we grow older.</a:t>
             </a:r>
           </a:p>
         </p:txBody>
@@ -17046,7 +17698,7 @@
                 </a:solidFill>
                 <a:latin typeface="Arial"/>
               </a:rPr>
-              <a:t>WRAP UP</a:t>
+              <a:t>ULTRASOUND</a:t>
             </a:r>
           </a:p>
         </p:txBody>
@@ -17081,7 +17733,7 @@
                 </a:solidFill>
                 <a:latin typeface="Calibri"/>
               </a:rPr>
-              <a:t>Quick Recap</a:t>
+              <a:t>Uses of Ultrasound</a:t>
             </a:r>
           </a:p>
         </p:txBody>
@@ -17146,8 +17798,43 @@
         </p:nvSpPr>
         <p:spPr>
           <a:xfrm>
-            <a:off x="1005840" y="2148840"/>
-            <a:ext cx="10058400" cy="3657600"/>
+            <a:off x="1005840" y="2103120"/>
+            <a:ext cx="10058400" cy="411480"/>
+          </a:xfrm>
+          <a:prstGeom prst="rect">
+            <a:avLst/>
+          </a:prstGeom>
+          <a:noFill/>
+        </p:spPr>
+        <p:txBody>
+          <a:bodyPr wrap="square" anchor="t" lIns="0" rIns="0" tIns="0" bIns="0">
+            <a:spAutoFit/>
+          </a:bodyPr>
+          <a:lstStyle/>
+          <a:p>
+            <a:pPr algn="l"/>
+            <a:r>
+              <a:rPr sz="1800" b="1" i="0">
+                <a:solidFill>
+                  <a:srgbClr val="6A4C93"/>
+                </a:solidFill>
+                <a:latin typeface="Calibri"/>
+              </a:rPr>
+              <a:t>High-frequency sound at work</a:t>
+            </a:r>
+          </a:p>
+        </p:txBody>
+      </p:sp>
+      <p:sp>
+        <p:nvSpPr>
+          <p:cNvPr id="8" name="TextBox 7"/>
+          <p:cNvSpPr txBox="1"/>
+          <p:nvPr/>
+        </p:nvSpPr>
+        <p:spPr>
+          <a:xfrm>
+            <a:off x="1005840" y="2697480"/>
+            <a:ext cx="10058400" cy="3063239"/>
           </a:xfrm>
           <a:prstGeom prst="rect">
             <a:avLst/>
@@ -17165,17 +17852,17 @@
                 <a:spcPct val="105000"/>
               </a:lnSpc>
               <a:spcAft>
-                <a:spcPts val="1200"/>
+                <a:spcPts val="1100"/>
               </a:spcAft>
             </a:pPr>
             <a:r>
               <a:rPr sz="1600" b="1" i="0">
                 <a:solidFill>
-                  <a:srgbClr val="2A9D8F"/>
-                </a:solidFill>
-                <a:latin typeface="Calibri"/>
-              </a:rPr>
-              <a:t>✓  </a:t>
+                  <a:srgbClr val="6A4C93"/>
+                </a:solidFill>
+                <a:latin typeface="Calibri"/>
+              </a:rPr>
+              <a:t>•  </a:t>
             </a:r>
             <a:r>
               <a:rPr sz="1600" b="1" i="0">
@@ -17184,7 +17871,7 @@
                 </a:solidFill>
                 <a:latin typeface="Calibri"/>
               </a:rPr>
-              <a:t>Affects speed  —  </a:t>
+              <a:t>Medical scans  </a:t>
             </a:r>
             <a:r>
               <a:rPr sz="1500" b="0" i="0">
@@ -17193,7 +17880,7 @@
                 </a:solidFill>
                 <a:latin typeface="Calibri"/>
               </a:rPr>
-              <a:t>temperature, humidity, the gas itself, wind</a:t>
+              <a:t>Ultrasound builds images of a baby or internal organs safely.</a:t>
             </a:r>
           </a:p>
           <a:p>
@@ -17202,17 +17889,17 @@
                 <a:spcPct val="105000"/>
               </a:lnSpc>
               <a:spcAft>
-                <a:spcPts val="1200"/>
+                <a:spcPts val="1100"/>
               </a:spcAft>
             </a:pPr>
             <a:r>
               <a:rPr sz="1600" b="1" i="0">
                 <a:solidFill>
-                  <a:srgbClr val="2A9D8F"/>
-                </a:solidFill>
-                <a:latin typeface="Calibri"/>
-              </a:rPr>
-              <a:t>✓  </a:t>
+                  <a:srgbClr val="6A4C93"/>
+                </a:solidFill>
+                <a:latin typeface="Calibri"/>
+              </a:rPr>
+              <a:t>•  </a:t>
             </a:r>
             <a:r>
               <a:rPr sz="1600" b="1" i="0">
@@ -17221,7 +17908,7 @@
                 </a:solidFill>
                 <a:latin typeface="Calibri"/>
               </a:rPr>
-              <a:t>No effect  —  </a:t>
+              <a:t>SONAR  </a:t>
             </a:r>
             <a:r>
               <a:rPr sz="1500" b="0" i="0">
@@ -17230,7 +17917,7 @@
                 </a:solidFill>
                 <a:latin typeface="Calibri"/>
               </a:rPr>
-              <a:t>pressure, loudness, frequency, wavelength</a:t>
+              <a:t>Ships find the depth of the sea and locate shoals or wrecks.</a:t>
             </a:r>
           </a:p>
           <a:p>
@@ -17239,17 +17926,17 @@
                 <a:spcPct val="105000"/>
               </a:lnSpc>
               <a:spcAft>
-                <a:spcPts val="1200"/>
+                <a:spcPts val="1100"/>
               </a:spcAft>
             </a:pPr>
             <a:r>
               <a:rPr sz="1600" b="1" i="0">
                 <a:solidFill>
-                  <a:srgbClr val="2A9D8F"/>
-                </a:solidFill>
-                <a:latin typeface="Calibri"/>
-              </a:rPr>
-              <a:t>✓  </a:t>
+                  <a:srgbClr val="6A4C93"/>
+                </a:solidFill>
+                <a:latin typeface="Calibri"/>
+              </a:rPr>
+              <a:t>•  </a:t>
             </a:r>
             <a:r>
               <a:rPr sz="1600" b="1" i="0">
@@ -17258,7 +17945,7 @@
                 </a:solidFill>
                 <a:latin typeface="Calibri"/>
               </a:rPr>
-              <a:t>Sound vs light  —  </a:t>
+              <a:t>Cleaning  </a:t>
             </a:r>
             <a:r>
               <a:rPr sz="1500" b="0" i="0">
@@ -17267,7 +17954,7 @@
                 </a:solidFill>
                 <a:latin typeface="Calibri"/>
               </a:rPr>
-              <a:t>light ≈ 3 × 10⁸ m/s ≫ sound ≈ 340 m/s</a:t>
+              <a:t>Ultrasonic vibrations clean delicate items like jewellery and instruments.</a:t>
             </a:r>
           </a:p>
           <a:p>
@@ -17276,17 +17963,17 @@
                 <a:spcPct val="105000"/>
               </a:lnSpc>
               <a:spcAft>
-                <a:spcPts val="1200"/>
+                <a:spcPts val="1100"/>
               </a:spcAft>
             </a:pPr>
             <a:r>
               <a:rPr sz="1600" b="1" i="0">
                 <a:solidFill>
-                  <a:srgbClr val="2A9D8F"/>
-                </a:solidFill>
-                <a:latin typeface="Calibri"/>
-              </a:rPr>
-              <a:t>✓  </a:t>
+                  <a:srgbClr val="6A4C93"/>
+                </a:solidFill>
+                <a:latin typeface="Calibri"/>
+              </a:rPr>
+              <a:t>•  </a:t>
             </a:r>
             <a:r>
               <a:rPr sz="1600" b="1" i="0">
@@ -17295,7 +17982,7 @@
                 </a:solidFill>
                 <a:latin typeface="Calibri"/>
               </a:rPr>
-              <a:t>Measuring speed  —  </a:t>
+              <a:t>Flaw detection  </a:t>
             </a:r>
             <a:r>
               <a:rPr sz="1500" b="0" i="0">
@@ -17304,81 +17991,7 @@
                 </a:solidFill>
                 <a:latin typeface="Calibri"/>
               </a:rPr>
-              <a:t>echo method, v = 2d / t</a:t>
-            </a:r>
-          </a:p>
-          <a:p>
-            <a:pPr algn="l">
-              <a:lnSpc>
-                <a:spcPct val="105000"/>
-              </a:lnSpc>
-              <a:spcAft>
-                <a:spcPts val="1200"/>
-              </a:spcAft>
-            </a:pPr>
-            <a:r>
-              <a:rPr sz="1600" b="1" i="0">
-                <a:solidFill>
-                  <a:srgbClr val="2A9D8F"/>
-                </a:solidFill>
-                <a:latin typeface="Calibri"/>
-              </a:rPr>
-              <a:t>✓  </a:t>
-            </a:r>
-            <a:r>
-              <a:rPr sz="1600" b="1" i="0">
-                <a:solidFill>
-                  <a:srgbClr val="1D2433"/>
-                </a:solidFill>
-                <a:latin typeface="Calibri"/>
-              </a:rPr>
-              <a:t>Ranges  —  </a:t>
-            </a:r>
-            <a:r>
-              <a:rPr sz="1500" b="0" i="0">
-                <a:solidFill>
-                  <a:srgbClr val="6B7280"/>
-                </a:solidFill>
-                <a:latin typeface="Calibri"/>
-              </a:rPr>
-              <a:t>infrasonic &lt; 20 Hz &lt; audible &lt; 20 kHz &lt; ultrasonic</a:t>
-            </a:r>
-          </a:p>
-          <a:p>
-            <a:pPr algn="l">
-              <a:lnSpc>
-                <a:spcPct val="105000"/>
-              </a:lnSpc>
-              <a:spcAft>
-                <a:spcPts val="1200"/>
-              </a:spcAft>
-            </a:pPr>
-            <a:r>
-              <a:rPr sz="1600" b="1" i="0">
-                <a:solidFill>
-                  <a:srgbClr val="2A9D8F"/>
-                </a:solidFill>
-                <a:latin typeface="Calibri"/>
-              </a:rPr>
-              <a:t>✓  </a:t>
-            </a:r>
-            <a:r>
-              <a:rPr sz="1600" b="1" i="0">
-                <a:solidFill>
-                  <a:srgbClr val="1D2433"/>
-                </a:solidFill>
-                <a:latin typeface="Calibri"/>
-              </a:rPr>
-              <a:t>Ultrasound uses  —  </a:t>
-            </a:r>
-            <a:r>
-              <a:rPr sz="1500" b="0" i="0">
-                <a:solidFill>
-                  <a:srgbClr val="6B7280"/>
-                </a:solidFill>
-                <a:latin typeface="Calibri"/>
-              </a:rPr>
-              <a:t>scans, SONAR, cleaning, flaw detection</a:t>
+              <a:t>Reveals hidden cracks inside metal castings and welds.</a:t>
             </a:r>
           </a:p>
         </p:txBody>
@@ -17397,7 +18010,7 @@
     <p:bg>
       <p:bgPr>
         <a:solidFill>
-          <a:srgbClr val="1D2433"/>
+          <a:srgbClr val="F4F6F8"/>
         </a:solidFill>
         <a:effectLst/>
       </p:bgPr>
@@ -17417,10 +18030,54 @@
         </p:nvSpPr>
         <p:spPr>
           <a:xfrm>
-            <a:off x="8778240" y="-1371600"/>
-            <a:ext cx="4754880" cy="4754880"/>
+            <a:off x="10927080" y="365760"/>
+            <a:ext cx="868680" cy="868680"/>
           </a:xfrm>
           <a:prstGeom prst="ellipse">
+            <a:avLst/>
+          </a:prstGeom>
+          <a:noFill/>
+          <a:ln w="15875">
+            <a:solidFill>
+              <a:srgbClr val="DDE2E8"/>
+            </a:solidFill>
+          </a:ln>
+          <a:effectLst/>
+        </p:spPr>
+        <p:style>
+          <a:lnRef idx="1">
+            <a:schemeClr val="accent1"/>
+          </a:lnRef>
+          <a:fillRef idx="3">
+            <a:schemeClr val="accent1"/>
+          </a:fillRef>
+          <a:effectRef idx="2">
+            <a:schemeClr val="accent1"/>
+          </a:effectRef>
+          <a:fontRef idx="minor">
+            <a:schemeClr val="lt1"/>
+          </a:fontRef>
+        </p:style>
+        <p:txBody>
+          <a:bodyPr rtlCol="0" anchor="ctr"/>
+          <a:lstStyle/>
+          <a:p>
+            <a:pPr algn="ctr"/>
+          </a:p>
+        </p:txBody>
+      </p:sp>
+      <p:sp>
+        <p:nvSpPr>
+          <p:cNvPr id="3" name="Rectangle 2"/>
+          <p:cNvSpPr/>
+          <p:nvPr/>
+        </p:nvSpPr>
+        <p:spPr>
+          <a:xfrm>
+            <a:off x="548640" y="502920"/>
+            <a:ext cx="256032" cy="256032"/>
+          </a:xfrm>
+          <a:prstGeom prst="rect">
             <a:avLst/>
           </a:prstGeom>
           <a:solidFill>
@@ -17455,14 +18112,14 @@
       </p:sp>
       <p:sp>
         <p:nvSpPr>
-          <p:cNvPr id="3" name="TextBox 2"/>
-          <p:cNvSpPr txBox="1"/>
-          <p:nvPr/>
-        </p:nvSpPr>
-        <p:spPr>
-          <a:xfrm>
-            <a:off x="777240" y="2011680"/>
-            <a:ext cx="8229600" cy="457200"/>
+          <p:cNvPr id="4" name="TextBox 3"/>
+          <p:cNvSpPr txBox="1"/>
+          <p:nvPr/>
+        </p:nvSpPr>
+        <p:spPr>
+          <a:xfrm>
+            <a:off x="914400" y="457200"/>
+            <a:ext cx="9509760" cy="320040"/>
           </a:xfrm>
           <a:prstGeom prst="rect">
             <a:avLst/>
@@ -17477,27 +18134,27 @@
           <a:p>
             <a:pPr algn="l"/>
             <a:r>
-              <a:rPr sz="1600" b="1" i="0">
-                <a:solidFill>
-                  <a:srgbClr val="FFC300"/>
+              <a:rPr sz="1300" b="1" i="0">
+                <a:solidFill>
+                  <a:srgbClr val="6A4C93"/>
                 </a:solidFill>
                 <a:latin typeface="Arial"/>
               </a:rPr>
-              <a:t>QUIZ 2</a:t>
-            </a:r>
-          </a:p>
-        </p:txBody>
-      </p:sp>
-      <p:sp>
-        <p:nvSpPr>
-          <p:cNvPr id="4" name="TextBox 3"/>
-          <p:cNvSpPr txBox="1"/>
-          <p:nvPr/>
-        </p:nvSpPr>
-        <p:spPr>
-          <a:xfrm>
-            <a:off x="777240" y="2560320"/>
-            <a:ext cx="9601200" cy="1005840"/>
+              <a:t>WHY ULTRASOUND</a:t>
+            </a:r>
+          </a:p>
+        </p:txBody>
+      </p:sp>
+      <p:sp>
+        <p:nvSpPr>
+          <p:cNvPr id="5" name="TextBox 4"/>
+          <p:cNvSpPr txBox="1"/>
+          <p:nvPr/>
+        </p:nvSpPr>
+        <p:spPr>
+          <a:xfrm>
+            <a:off x="548640" y="777240"/>
+            <a:ext cx="9966960" cy="822960"/>
           </a:xfrm>
           <a:prstGeom prst="rect">
             <a:avLst/>
@@ -17512,27 +18169,149 @@
           <a:p>
             <a:pPr algn="l"/>
             <a:r>
-              <a:rPr sz="4400" b="1" i="0">
-                <a:solidFill>
-                  <a:srgbClr val="FFFFFF"/>
-                </a:solidFill>
-                <a:latin typeface="Calibri"/>
-              </a:rPr>
-              <a:t>Final Check — Speed &amp; Ultrasound</a:t>
-            </a:r>
-          </a:p>
-        </p:txBody>
-      </p:sp>
-      <p:sp>
-        <p:nvSpPr>
-          <p:cNvPr id="5" name="TextBox 4"/>
-          <p:cNvSpPr txBox="1"/>
-          <p:nvPr/>
-        </p:nvSpPr>
-        <p:spPr>
-          <a:xfrm>
-            <a:off x="777240" y="3749039"/>
-            <a:ext cx="9601200" cy="548640"/>
+              <a:rPr sz="3000" b="1" i="0">
+                <a:solidFill>
+                  <a:srgbClr val="1D2433"/>
+                </a:solidFill>
+                <a:latin typeface="Calibri"/>
+              </a:rPr>
+              <a:t>Why Ultrasound Is So Useful</a:t>
+            </a:r>
+          </a:p>
+        </p:txBody>
+      </p:sp>
+      <p:sp>
+        <p:nvSpPr>
+          <p:cNvPr id="6" name="Rounded Rectangle 5"/>
+          <p:cNvSpPr/>
+          <p:nvPr/>
+        </p:nvSpPr>
+        <p:spPr>
+          <a:xfrm>
+            <a:off x="640080" y="1920240"/>
+            <a:ext cx="5212080" cy="1600200"/>
+          </a:xfrm>
+          <a:prstGeom prst="roundRect">
+            <a:avLst>
+              <a:gd name="adj" fmla="val 5000"/>
+            </a:avLst>
+          </a:prstGeom>
+          <a:solidFill>
+            <a:srgbClr val="FFFFFF"/>
+          </a:solidFill>
+          <a:ln>
+            <a:noFill/>
+          </a:ln>
+          <a:effectLst>
+            <a:outerShdw blurRad="88900" dist="38100" dir="5400000" rotWithShape="0" algn="bl">
+              <a:srgbClr val="000000">
+                <a:alpha val="16000"/>
+              </a:srgbClr>
+            </a:outerShdw>
+          </a:effectLst>
+        </p:spPr>
+        <p:style>
+          <a:lnRef idx="1">
+            <a:schemeClr val="accent1"/>
+          </a:lnRef>
+          <a:fillRef idx="3">
+            <a:schemeClr val="accent1"/>
+          </a:fillRef>
+          <a:effectRef idx="2">
+            <a:schemeClr val="accent1"/>
+          </a:effectRef>
+          <a:fontRef idx="minor">
+            <a:schemeClr val="lt1"/>
+          </a:fontRef>
+        </p:style>
+        <p:txBody>
+          <a:bodyPr rtlCol="0" anchor="ctr"/>
+          <a:lstStyle/>
+          <a:p>
+            <a:pPr algn="ctr"/>
+          </a:p>
+        </p:txBody>
+      </p:sp>
+      <p:sp>
+        <p:nvSpPr>
+          <p:cNvPr id="7" name="Rounded Rectangle 6"/>
+          <p:cNvSpPr/>
+          <p:nvPr/>
+        </p:nvSpPr>
+        <p:spPr>
+          <a:xfrm>
+            <a:off x="960119" y="2212848"/>
+            <a:ext cx="502920" cy="502920"/>
+          </a:xfrm>
+          <a:prstGeom prst="roundRect">
+            <a:avLst>
+              <a:gd name="adj" fmla="val 30000"/>
+            </a:avLst>
+          </a:prstGeom>
+          <a:solidFill>
+            <a:srgbClr val="0A9396"/>
+          </a:solidFill>
+          <a:ln>
+            <a:noFill/>
+          </a:ln>
+          <a:effectLst/>
+        </p:spPr>
+        <p:style>
+          <a:lnRef idx="1">
+            <a:schemeClr val="accent1"/>
+          </a:lnRef>
+          <a:fillRef idx="3">
+            <a:schemeClr val="accent1"/>
+          </a:fillRef>
+          <a:effectRef idx="2">
+            <a:schemeClr val="accent1"/>
+          </a:effectRef>
+          <a:fontRef idx="minor">
+            <a:schemeClr val="lt1"/>
+          </a:fontRef>
+        </p:style>
+        <p:txBody>
+          <a:bodyPr rtlCol="0" anchor="ctr"/>
+          <a:lstStyle/>
+          <a:p>
+            <a:pPr algn="ctr"/>
+          </a:p>
+        </p:txBody>
+      </p:sp>
+      <p:pic>
+        <p:nvPicPr>
+          <p:cNvPr id="8" name="Picture 7" descr="ray_FFFFFF.png"/>
+          <p:cNvPicPr>
+            <a:picLocks noChangeAspect="1"/>
+          </p:cNvPicPr>
+          <p:nvPr/>
+        </p:nvPicPr>
+        <p:blipFill>
+          <a:blip r:embed="rId2"/>
+          <a:stretch>
+            <a:fillRect/>
+          </a:stretch>
+        </p:blipFill>
+        <p:spPr>
+          <a:xfrm>
+            <a:off x="1070762" y="2323490"/>
+            <a:ext cx="281635" cy="281635"/>
+          </a:xfrm>
+          <a:prstGeom prst="rect">
+            <a:avLst/>
+          </a:prstGeom>
+        </p:spPr>
+      </p:pic>
+      <p:sp>
+        <p:nvSpPr>
+          <p:cNvPr id="9" name="TextBox 8"/>
+          <p:cNvSpPr txBox="1"/>
+          <p:nvPr/>
+        </p:nvSpPr>
+        <p:spPr>
+          <a:xfrm>
+            <a:off x="1645920" y="2176272"/>
+            <a:ext cx="3931920" cy="457200"/>
           </a:xfrm>
           <a:prstGeom prst="rect">
             <a:avLst/>
@@ -17547,13 +18326,624 @@
           <a:p>
             <a:pPr algn="l"/>
             <a:r>
-              <a:rPr sz="1800" b="0" i="0">
-                <a:solidFill>
-                  <a:srgbClr val="CADCFC"/>
-                </a:solidFill>
-                <a:latin typeface="Calibri"/>
-              </a:rPr>
-              <a:t>5 questions  •  think before the answer reveals on the next slide</a:t>
+              <a:rPr sz="1700" b="1" i="0">
+                <a:solidFill>
+                  <a:srgbClr val="1D2433"/>
+                </a:solidFill>
+                <a:latin typeface="Calibri"/>
+              </a:rPr>
+              <a:t>Narrow beam</a:t>
+            </a:r>
+          </a:p>
+        </p:txBody>
+      </p:sp>
+      <p:sp>
+        <p:nvSpPr>
+          <p:cNvPr id="10" name="TextBox 9"/>
+          <p:cNvSpPr txBox="1"/>
+          <p:nvPr/>
+        </p:nvSpPr>
+        <p:spPr>
+          <a:xfrm>
+            <a:off x="1645920" y="2670048"/>
+            <a:ext cx="3931920" cy="685800"/>
+          </a:xfrm>
+          <a:prstGeom prst="rect">
+            <a:avLst/>
+          </a:prstGeom>
+          <a:noFill/>
+        </p:spPr>
+        <p:txBody>
+          <a:bodyPr wrap="square" anchor="t" lIns="0" rIns="0" tIns="0" bIns="0">
+            <a:spAutoFit/>
+          </a:bodyPr>
+          <a:lstStyle/>
+          <a:p>
+            <a:pPr algn="l"/>
+            <a:r>
+              <a:rPr sz="1350" b="0" i="0">
+                <a:solidFill>
+                  <a:srgbClr val="6B7280"/>
+                </a:solidFill>
+                <a:latin typeface="Calibri"/>
+              </a:rPr>
+              <a:t>Its short wavelength can be sent as a focused, directed beam.</a:t>
+            </a:r>
+          </a:p>
+        </p:txBody>
+      </p:sp>
+      <p:sp>
+        <p:nvSpPr>
+          <p:cNvPr id="11" name="Rounded Rectangle 10"/>
+          <p:cNvSpPr/>
+          <p:nvPr/>
+        </p:nvSpPr>
+        <p:spPr>
+          <a:xfrm>
+            <a:off x="6217920" y="1920240"/>
+            <a:ext cx="5212080" cy="1600200"/>
+          </a:xfrm>
+          <a:prstGeom prst="roundRect">
+            <a:avLst>
+              <a:gd name="adj" fmla="val 5000"/>
+            </a:avLst>
+          </a:prstGeom>
+          <a:solidFill>
+            <a:srgbClr val="FFFFFF"/>
+          </a:solidFill>
+          <a:ln>
+            <a:noFill/>
+          </a:ln>
+          <a:effectLst>
+            <a:outerShdw blurRad="88900" dist="38100" dir="5400000" rotWithShape="0" algn="bl">
+              <a:srgbClr val="000000">
+                <a:alpha val="16000"/>
+              </a:srgbClr>
+            </a:outerShdw>
+          </a:effectLst>
+        </p:spPr>
+        <p:style>
+          <a:lnRef idx="1">
+            <a:schemeClr val="accent1"/>
+          </a:lnRef>
+          <a:fillRef idx="3">
+            <a:schemeClr val="accent1"/>
+          </a:fillRef>
+          <a:effectRef idx="2">
+            <a:schemeClr val="accent1"/>
+          </a:effectRef>
+          <a:fontRef idx="minor">
+            <a:schemeClr val="lt1"/>
+          </a:fontRef>
+        </p:style>
+        <p:txBody>
+          <a:bodyPr rtlCol="0" anchor="ctr"/>
+          <a:lstStyle/>
+          <a:p>
+            <a:pPr algn="ctr"/>
+          </a:p>
+        </p:txBody>
+      </p:sp>
+      <p:sp>
+        <p:nvSpPr>
+          <p:cNvPr id="12" name="Rounded Rectangle 11"/>
+          <p:cNvSpPr/>
+          <p:nvPr/>
+        </p:nvSpPr>
+        <p:spPr>
+          <a:xfrm>
+            <a:off x="6537960" y="2212848"/>
+            <a:ext cx="502920" cy="502920"/>
+          </a:xfrm>
+          <a:prstGeom prst="roundRect">
+            <a:avLst>
+              <a:gd name="adj" fmla="val 30000"/>
+            </a:avLst>
+          </a:prstGeom>
+          <a:solidFill>
+            <a:srgbClr val="F4801A"/>
+          </a:solidFill>
+          <a:ln>
+            <a:noFill/>
+          </a:ln>
+          <a:effectLst/>
+        </p:spPr>
+        <p:style>
+          <a:lnRef idx="1">
+            <a:schemeClr val="accent1"/>
+          </a:lnRef>
+          <a:fillRef idx="3">
+            <a:schemeClr val="accent1"/>
+          </a:fillRef>
+          <a:effectRef idx="2">
+            <a:schemeClr val="accent1"/>
+          </a:effectRef>
+          <a:fontRef idx="minor">
+            <a:schemeClr val="lt1"/>
+          </a:fontRef>
+        </p:style>
+        <p:txBody>
+          <a:bodyPr rtlCol="0" anchor="ctr"/>
+          <a:lstStyle/>
+          <a:p>
+            <a:pPr algn="ctr"/>
+          </a:p>
+        </p:txBody>
+      </p:sp>
+      <p:pic>
+        <p:nvPicPr>
+          <p:cNvPr id="13" name="Picture 12" descr="spark_FFFFFF.png"/>
+          <p:cNvPicPr>
+            <a:picLocks noChangeAspect="1"/>
+          </p:cNvPicPr>
+          <p:nvPr/>
+        </p:nvPicPr>
+        <p:blipFill>
+          <a:blip r:embed="rId3"/>
+          <a:stretch>
+            <a:fillRect/>
+          </a:stretch>
+        </p:blipFill>
+        <p:spPr>
+          <a:xfrm>
+            <a:off x="6648602" y="2323490"/>
+            <a:ext cx="281635" cy="281635"/>
+          </a:xfrm>
+          <a:prstGeom prst="rect">
+            <a:avLst/>
+          </a:prstGeom>
+        </p:spPr>
+      </p:pic>
+      <p:sp>
+        <p:nvSpPr>
+          <p:cNvPr id="14" name="TextBox 13"/>
+          <p:cNvSpPr txBox="1"/>
+          <p:nvPr/>
+        </p:nvSpPr>
+        <p:spPr>
+          <a:xfrm>
+            <a:off x="7223760" y="2176272"/>
+            <a:ext cx="3931920" cy="457200"/>
+          </a:xfrm>
+          <a:prstGeom prst="rect">
+            <a:avLst/>
+          </a:prstGeom>
+          <a:noFill/>
+        </p:spPr>
+        <p:txBody>
+          <a:bodyPr wrap="square" anchor="t" lIns="0" rIns="0" tIns="0" bIns="0">
+            <a:spAutoFit/>
+          </a:bodyPr>
+          <a:lstStyle/>
+          <a:p>
+            <a:pPr algn="l"/>
+            <a:r>
+              <a:rPr sz="1700" b="1" i="0">
+                <a:solidFill>
+                  <a:srgbClr val="1D2433"/>
+                </a:solidFill>
+                <a:latin typeface="Calibri"/>
+              </a:rPr>
+              <a:t>Fine detail</a:t>
+            </a:r>
+          </a:p>
+        </p:txBody>
+      </p:sp>
+      <p:sp>
+        <p:nvSpPr>
+          <p:cNvPr id="15" name="TextBox 14"/>
+          <p:cNvSpPr txBox="1"/>
+          <p:nvPr/>
+        </p:nvSpPr>
+        <p:spPr>
+          <a:xfrm>
+            <a:off x="7223760" y="2670048"/>
+            <a:ext cx="3931920" cy="685800"/>
+          </a:xfrm>
+          <a:prstGeom prst="rect">
+            <a:avLst/>
+          </a:prstGeom>
+          <a:noFill/>
+        </p:spPr>
+        <p:txBody>
+          <a:bodyPr wrap="square" anchor="t" lIns="0" rIns="0" tIns="0" bIns="0">
+            <a:spAutoFit/>
+          </a:bodyPr>
+          <a:lstStyle/>
+          <a:p>
+            <a:pPr algn="l"/>
+            <a:r>
+              <a:rPr sz="1350" b="0" i="0">
+                <a:solidFill>
+                  <a:srgbClr val="6B7280"/>
+                </a:solidFill>
+                <a:latin typeface="Calibri"/>
+              </a:rPr>
+              <a:t>Short wavelengths resolve small features in scans and tests.</a:t>
+            </a:r>
+          </a:p>
+        </p:txBody>
+      </p:sp>
+      <p:sp>
+        <p:nvSpPr>
+          <p:cNvPr id="16" name="Rounded Rectangle 15"/>
+          <p:cNvSpPr/>
+          <p:nvPr/>
+        </p:nvSpPr>
+        <p:spPr>
+          <a:xfrm>
+            <a:off x="640080" y="3749039"/>
+            <a:ext cx="5212080" cy="1600200"/>
+          </a:xfrm>
+          <a:prstGeom prst="roundRect">
+            <a:avLst>
+              <a:gd name="adj" fmla="val 5000"/>
+            </a:avLst>
+          </a:prstGeom>
+          <a:solidFill>
+            <a:srgbClr val="FFFFFF"/>
+          </a:solidFill>
+          <a:ln>
+            <a:noFill/>
+          </a:ln>
+          <a:effectLst>
+            <a:outerShdw blurRad="88900" dist="38100" dir="5400000" rotWithShape="0" algn="bl">
+              <a:srgbClr val="000000">
+                <a:alpha val="16000"/>
+              </a:srgbClr>
+            </a:outerShdw>
+          </a:effectLst>
+        </p:spPr>
+        <p:style>
+          <a:lnRef idx="1">
+            <a:schemeClr val="accent1"/>
+          </a:lnRef>
+          <a:fillRef idx="3">
+            <a:schemeClr val="accent1"/>
+          </a:fillRef>
+          <a:effectRef idx="2">
+            <a:schemeClr val="accent1"/>
+          </a:effectRef>
+          <a:fontRef idx="minor">
+            <a:schemeClr val="lt1"/>
+          </a:fontRef>
+        </p:style>
+        <p:txBody>
+          <a:bodyPr rtlCol="0" anchor="ctr"/>
+          <a:lstStyle/>
+          <a:p>
+            <a:pPr algn="ctr"/>
+          </a:p>
+        </p:txBody>
+      </p:sp>
+      <p:sp>
+        <p:nvSpPr>
+          <p:cNvPr id="17" name="Rounded Rectangle 16"/>
+          <p:cNvSpPr/>
+          <p:nvPr/>
+        </p:nvSpPr>
+        <p:spPr>
+          <a:xfrm>
+            <a:off x="960119" y="4041648"/>
+            <a:ext cx="502920" cy="502920"/>
+          </a:xfrm>
+          <a:prstGeom prst="roundRect">
+            <a:avLst>
+              <a:gd name="adj" fmla="val 30000"/>
+            </a:avLst>
+          </a:prstGeom>
+          <a:solidFill>
+            <a:srgbClr val="6A4C93"/>
+          </a:solidFill>
+          <a:ln>
+            <a:noFill/>
+          </a:ln>
+          <a:effectLst/>
+        </p:spPr>
+        <p:style>
+          <a:lnRef idx="1">
+            <a:schemeClr val="accent1"/>
+          </a:lnRef>
+          <a:fillRef idx="3">
+            <a:schemeClr val="accent1"/>
+          </a:fillRef>
+          <a:effectRef idx="2">
+            <a:schemeClr val="accent1"/>
+          </a:effectRef>
+          <a:fontRef idx="minor">
+            <a:schemeClr val="lt1"/>
+          </a:fontRef>
+        </p:style>
+        <p:txBody>
+          <a:bodyPr rtlCol="0" anchor="ctr"/>
+          <a:lstStyle/>
+          <a:p>
+            <a:pPr algn="ctr"/>
+          </a:p>
+        </p:txBody>
+      </p:sp>
+      <p:pic>
+        <p:nvPicPr>
+          <p:cNvPr id="18" name="Picture 17" descr="spark_FFFFFF.png"/>
+          <p:cNvPicPr>
+            <a:picLocks noChangeAspect="1"/>
+          </p:cNvPicPr>
+          <p:nvPr/>
+        </p:nvPicPr>
+        <p:blipFill>
+          <a:blip r:embed="rId3"/>
+          <a:stretch>
+            <a:fillRect/>
+          </a:stretch>
+        </p:blipFill>
+        <p:spPr>
+          <a:xfrm>
+            <a:off x="1070762" y="4152290"/>
+            <a:ext cx="281635" cy="281635"/>
+          </a:xfrm>
+          <a:prstGeom prst="rect">
+            <a:avLst/>
+          </a:prstGeom>
+        </p:spPr>
+      </p:pic>
+      <p:sp>
+        <p:nvSpPr>
+          <p:cNvPr id="19" name="TextBox 18"/>
+          <p:cNvSpPr txBox="1"/>
+          <p:nvPr/>
+        </p:nvSpPr>
+        <p:spPr>
+          <a:xfrm>
+            <a:off x="1645920" y="4005072"/>
+            <a:ext cx="3931920" cy="457200"/>
+          </a:xfrm>
+          <a:prstGeom prst="rect">
+            <a:avLst/>
+          </a:prstGeom>
+          <a:noFill/>
+        </p:spPr>
+        <p:txBody>
+          <a:bodyPr wrap="square" anchor="t" lIns="0" rIns="0" tIns="0" bIns="0">
+            <a:spAutoFit/>
+          </a:bodyPr>
+          <a:lstStyle/>
+          <a:p>
+            <a:pPr algn="l"/>
+            <a:r>
+              <a:rPr sz="1700" b="1" i="0">
+                <a:solidFill>
+                  <a:srgbClr val="1D2433"/>
+                </a:solidFill>
+                <a:latin typeface="Calibri"/>
+              </a:rPr>
+              <a:t>Harmless</a:t>
+            </a:r>
+          </a:p>
+        </p:txBody>
+      </p:sp>
+      <p:sp>
+        <p:nvSpPr>
+          <p:cNvPr id="20" name="TextBox 19"/>
+          <p:cNvSpPr txBox="1"/>
+          <p:nvPr/>
+        </p:nvSpPr>
+        <p:spPr>
+          <a:xfrm>
+            <a:off x="1645920" y="4498848"/>
+            <a:ext cx="3931920" cy="685800"/>
+          </a:xfrm>
+          <a:prstGeom prst="rect">
+            <a:avLst/>
+          </a:prstGeom>
+          <a:noFill/>
+        </p:spPr>
+        <p:txBody>
+          <a:bodyPr wrap="square" anchor="t" lIns="0" rIns="0" tIns="0" bIns="0">
+            <a:spAutoFit/>
+          </a:bodyPr>
+          <a:lstStyle/>
+          <a:p>
+            <a:pPr algn="l"/>
+            <a:r>
+              <a:rPr sz="1350" b="0" i="0">
+                <a:solidFill>
+                  <a:srgbClr val="6B7280"/>
+                </a:solidFill>
+                <a:latin typeface="Calibri"/>
+              </a:rPr>
+              <a:t>At the levels used, it does not damage living tissue like X-rays can.</a:t>
+            </a:r>
+          </a:p>
+        </p:txBody>
+      </p:sp>
+      <p:sp>
+        <p:nvSpPr>
+          <p:cNvPr id="21" name="Rounded Rectangle 20"/>
+          <p:cNvSpPr/>
+          <p:nvPr/>
+        </p:nvSpPr>
+        <p:spPr>
+          <a:xfrm>
+            <a:off x="6217920" y="3749039"/>
+            <a:ext cx="5212080" cy="1600200"/>
+          </a:xfrm>
+          <a:prstGeom prst="roundRect">
+            <a:avLst>
+              <a:gd name="adj" fmla="val 5000"/>
+            </a:avLst>
+          </a:prstGeom>
+          <a:solidFill>
+            <a:srgbClr val="FFFFFF"/>
+          </a:solidFill>
+          <a:ln>
+            <a:noFill/>
+          </a:ln>
+          <a:effectLst>
+            <a:outerShdw blurRad="88900" dist="38100" dir="5400000" rotWithShape="0" algn="bl">
+              <a:srgbClr val="000000">
+                <a:alpha val="16000"/>
+              </a:srgbClr>
+            </a:outerShdw>
+          </a:effectLst>
+        </p:spPr>
+        <p:style>
+          <a:lnRef idx="1">
+            <a:schemeClr val="accent1"/>
+          </a:lnRef>
+          <a:fillRef idx="3">
+            <a:schemeClr val="accent1"/>
+          </a:fillRef>
+          <a:effectRef idx="2">
+            <a:schemeClr val="accent1"/>
+          </a:effectRef>
+          <a:fontRef idx="minor">
+            <a:schemeClr val="lt1"/>
+          </a:fontRef>
+        </p:style>
+        <p:txBody>
+          <a:bodyPr rtlCol="0" anchor="ctr"/>
+          <a:lstStyle/>
+          <a:p>
+            <a:pPr algn="ctr"/>
+          </a:p>
+        </p:txBody>
+      </p:sp>
+      <p:sp>
+        <p:nvSpPr>
+          <p:cNvPr id="22" name="Rounded Rectangle 21"/>
+          <p:cNvSpPr/>
+          <p:nvPr/>
+        </p:nvSpPr>
+        <p:spPr>
+          <a:xfrm>
+            <a:off x="6537960" y="4041648"/>
+            <a:ext cx="502920" cy="502920"/>
+          </a:xfrm>
+          <a:prstGeom prst="roundRect">
+            <a:avLst>
+              <a:gd name="adj" fmla="val 30000"/>
+            </a:avLst>
+          </a:prstGeom>
+          <a:solidFill>
+            <a:srgbClr val="E63946"/>
+          </a:solidFill>
+          <a:ln>
+            <a:noFill/>
+          </a:ln>
+          <a:effectLst/>
+        </p:spPr>
+        <p:style>
+          <a:lnRef idx="1">
+            <a:schemeClr val="accent1"/>
+          </a:lnRef>
+          <a:fillRef idx="3">
+            <a:schemeClr val="accent1"/>
+          </a:fillRef>
+          <a:effectRef idx="2">
+            <a:schemeClr val="accent1"/>
+          </a:effectRef>
+          <a:fontRef idx="minor">
+            <a:schemeClr val="lt1"/>
+          </a:fontRef>
+        </p:style>
+        <p:txBody>
+          <a:bodyPr rtlCol="0" anchor="ctr"/>
+          <a:lstStyle/>
+          <a:p>
+            <a:pPr algn="ctr"/>
+          </a:p>
+        </p:txBody>
+      </p:sp>
+      <p:pic>
+        <p:nvPicPr>
+          <p:cNvPr id="23" name="Picture 22" descr="sound_FFFFFF.png"/>
+          <p:cNvPicPr>
+            <a:picLocks noChangeAspect="1"/>
+          </p:cNvPicPr>
+          <p:nvPr/>
+        </p:nvPicPr>
+        <p:blipFill>
+          <a:blip r:embed="rId4"/>
+          <a:stretch>
+            <a:fillRect/>
+          </a:stretch>
+        </p:blipFill>
+        <p:spPr>
+          <a:xfrm>
+            <a:off x="6648602" y="4152290"/>
+            <a:ext cx="281635" cy="281635"/>
+          </a:xfrm>
+          <a:prstGeom prst="rect">
+            <a:avLst/>
+          </a:prstGeom>
+        </p:spPr>
+      </p:pic>
+      <p:sp>
+        <p:nvSpPr>
+          <p:cNvPr id="24" name="TextBox 23"/>
+          <p:cNvSpPr txBox="1"/>
+          <p:nvPr/>
+        </p:nvSpPr>
+        <p:spPr>
+          <a:xfrm>
+            <a:off x="7223760" y="4005072"/>
+            <a:ext cx="3931920" cy="457200"/>
+          </a:xfrm>
+          <a:prstGeom prst="rect">
+            <a:avLst/>
+          </a:prstGeom>
+          <a:noFill/>
+        </p:spPr>
+        <p:txBody>
+          <a:bodyPr wrap="square" anchor="t" lIns="0" rIns="0" tIns="0" bIns="0">
+            <a:spAutoFit/>
+          </a:bodyPr>
+          <a:lstStyle/>
+          <a:p>
+            <a:pPr algn="l"/>
+            <a:r>
+              <a:rPr sz="1700" b="1" i="0">
+                <a:solidFill>
+                  <a:srgbClr val="1D2433"/>
+                </a:solidFill>
+                <a:latin typeface="Calibri"/>
+              </a:rPr>
+              <a:t>Echoes</a:t>
+            </a:r>
+          </a:p>
+        </p:txBody>
+      </p:sp>
+      <p:sp>
+        <p:nvSpPr>
+          <p:cNvPr id="25" name="TextBox 24"/>
+          <p:cNvSpPr txBox="1"/>
+          <p:nvPr/>
+        </p:nvSpPr>
+        <p:spPr>
+          <a:xfrm>
+            <a:off x="7223760" y="4498848"/>
+            <a:ext cx="3931920" cy="685800"/>
+          </a:xfrm>
+          <a:prstGeom prst="rect">
+            <a:avLst/>
+          </a:prstGeom>
+          <a:noFill/>
+        </p:spPr>
+        <p:txBody>
+          <a:bodyPr wrap="square" anchor="t" lIns="0" rIns="0" tIns="0" bIns="0">
+            <a:spAutoFit/>
+          </a:bodyPr>
+          <a:lstStyle/>
+          <a:p>
+            <a:pPr algn="l"/>
+            <a:r>
+              <a:rPr sz="1350" b="0" i="0">
+                <a:solidFill>
+                  <a:srgbClr val="6B7280"/>
+                </a:solidFill>
+                <a:latin typeface="Calibri"/>
+              </a:rPr>
+              <a:t>It reflects clearly off boundaries, so echoes can be timed and imaged.</a:t>
             </a:r>
           </a:p>
         </p:txBody>
@@ -17702,7 +19092,7 @@
                 </a:solidFill>
                 <a:latin typeface="Arial"/>
               </a:rPr>
-              <a:t>QUIZ QUESTION</a:t>
+              <a:t>WRAP UP</a:t>
             </a:r>
           </a:p>
         </p:txBody>
@@ -17737,7 +19127,7 @@
                 </a:solidFill>
                 <a:latin typeface="Calibri"/>
               </a:rPr>
-              <a:t>Q1 — Bat Navigation</a:t>
+              <a:t>Quick Recap</a:t>
             </a:r>
           </a:p>
         </p:txBody>
@@ -17750,12 +19140,12 @@
         </p:nvSpPr>
         <p:spPr>
           <a:xfrm>
-            <a:off x="640080" y="1783080"/>
-            <a:ext cx="10881360" cy="1325880"/>
+            <a:off x="640080" y="1828800"/>
+            <a:ext cx="10881360" cy="4114800"/>
           </a:xfrm>
           <a:prstGeom prst="roundRect">
             <a:avLst>
-              <a:gd name="adj" fmla="val 4000"/>
+              <a:gd name="adj" fmla="val 3000"/>
             </a:avLst>
           </a:prstGeom>
           <a:solidFill>
@@ -17802,669 +19192,239 @@
         </p:nvSpPr>
         <p:spPr>
           <a:xfrm>
-            <a:off x="1005840" y="1783080"/>
-            <a:ext cx="10149840" cy="1325880"/>
-          </a:xfrm>
-          <a:prstGeom prst="rect">
-            <a:avLst/>
-          </a:prstGeom>
-          <a:noFill/>
-        </p:spPr>
-        <p:txBody>
-          <a:bodyPr wrap="square" anchor="ctr" lIns="0" rIns="0" tIns="0" bIns="0">
-            <a:spAutoFit/>
-          </a:bodyPr>
-          <a:lstStyle/>
-          <a:p>
-            <a:pPr algn="l"/>
-            <a:r>
-              <a:rPr sz="1800" b="1" i="0">
+            <a:off x="1005840" y="2148840"/>
+            <a:ext cx="10058400" cy="3657600"/>
+          </a:xfrm>
+          <a:prstGeom prst="rect">
+            <a:avLst/>
+          </a:prstGeom>
+          <a:noFill/>
+        </p:spPr>
+        <p:txBody>
+          <a:bodyPr wrap="square" anchor="t" lIns="0" rIns="0" tIns="0" bIns="0">
+            <a:spAutoFit/>
+          </a:bodyPr>
+          <a:lstStyle/>
+          <a:p>
+            <a:pPr algn="l">
+              <a:lnSpc>
+                <a:spcPct val="105000"/>
+              </a:lnSpc>
+              <a:spcAft>
+                <a:spcPts val="1200"/>
+              </a:spcAft>
+            </a:pPr>
+            <a:r>
+              <a:rPr sz="1600" b="1" i="0">
+                <a:solidFill>
+                  <a:srgbClr val="2A9D8F"/>
+                </a:solidFill>
+                <a:latin typeface="Calibri"/>
+              </a:rPr>
+              <a:t>✓  </a:t>
+            </a:r>
+            <a:r>
+              <a:rPr sz="1600" b="1" i="0">
                 <a:solidFill>
                   <a:srgbClr val="1D2433"/>
                 </a:solidFill>
                 <a:latin typeface="Calibri"/>
               </a:rPr>
-              <a:t>A bat finds insects in the dark by emitting and listening for:</a:t>
-            </a:r>
-          </a:p>
-        </p:txBody>
-      </p:sp>
-      <p:sp>
-        <p:nvSpPr>
-          <p:cNvPr id="8" name="Rounded Rectangle 7"/>
-          <p:cNvSpPr/>
-          <p:nvPr/>
-        </p:nvSpPr>
-        <p:spPr>
-          <a:xfrm>
-            <a:off x="640080" y="3337560"/>
-            <a:ext cx="5349240" cy="868680"/>
-          </a:xfrm>
-          <a:prstGeom prst="roundRect">
-            <a:avLst>
-              <a:gd name="adj" fmla="val 12000"/>
-            </a:avLst>
-          </a:prstGeom>
-          <a:solidFill>
-            <a:srgbClr val="EAF1F4"/>
-          </a:solidFill>
-          <a:ln>
-            <a:noFill/>
-          </a:ln>
-          <a:effectLst/>
-        </p:spPr>
-        <p:style>
-          <a:lnRef idx="1">
-            <a:schemeClr val="accent1"/>
-          </a:lnRef>
-          <a:fillRef idx="3">
-            <a:schemeClr val="accent1"/>
-          </a:fillRef>
-          <a:effectRef idx="2">
-            <a:schemeClr val="accent1"/>
-          </a:effectRef>
-          <a:fontRef idx="minor">
-            <a:schemeClr val="lt1"/>
-          </a:fontRef>
-        </p:style>
-        <p:txBody>
-          <a:bodyPr rtlCol="0" anchor="ctr"/>
-          <a:lstStyle/>
-          <a:p>
-            <a:pPr algn="ctr"/>
-          </a:p>
-        </p:txBody>
-      </p:sp>
-      <p:sp>
-        <p:nvSpPr>
-          <p:cNvPr id="9" name="Oval 8"/>
-          <p:cNvSpPr/>
-          <p:nvPr/>
-        </p:nvSpPr>
-        <p:spPr>
-          <a:xfrm>
-            <a:off x="914400" y="3566160"/>
-            <a:ext cx="411480" cy="411480"/>
-          </a:xfrm>
-          <a:prstGeom prst="ellipse">
-            <a:avLst/>
-          </a:prstGeom>
-          <a:solidFill>
-            <a:srgbClr val="6A4C93"/>
-          </a:solidFill>
-          <a:ln>
-            <a:noFill/>
-          </a:ln>
-          <a:effectLst/>
-        </p:spPr>
-        <p:style>
-          <a:lnRef idx="1">
-            <a:schemeClr val="accent1"/>
-          </a:lnRef>
-          <a:fillRef idx="3">
-            <a:schemeClr val="accent1"/>
-          </a:fillRef>
-          <a:effectRef idx="2">
-            <a:schemeClr val="accent1"/>
-          </a:effectRef>
-          <a:fontRef idx="minor">
-            <a:schemeClr val="lt1"/>
-          </a:fontRef>
-        </p:style>
-        <p:txBody>
-          <a:bodyPr rtlCol="0" anchor="ctr"/>
-          <a:lstStyle/>
-          <a:p>
-            <a:pPr algn="ctr"/>
-          </a:p>
-        </p:txBody>
-      </p:sp>
-      <p:sp>
-        <p:nvSpPr>
-          <p:cNvPr id="10" name="TextBox 9"/>
-          <p:cNvSpPr txBox="1"/>
-          <p:nvPr/>
-        </p:nvSpPr>
-        <p:spPr>
-          <a:xfrm>
-            <a:off x="914400" y="3566160"/>
-            <a:ext cx="411480" cy="411480"/>
-          </a:xfrm>
-          <a:prstGeom prst="rect">
-            <a:avLst/>
-          </a:prstGeom>
-          <a:noFill/>
-        </p:spPr>
-        <p:txBody>
-          <a:bodyPr wrap="square" anchor="ctr" lIns="0" rIns="0" tIns="0" bIns="0">
-            <a:spAutoFit/>
-          </a:bodyPr>
-          <a:lstStyle/>
-          <a:p>
-            <a:pPr algn="ctr"/>
-            <a:r>
-              <a:rPr sz="1400" b="1" i="0">
-                <a:solidFill>
-                  <a:srgbClr val="FFFFFF"/>
-                </a:solidFill>
-                <a:latin typeface="Calibri"/>
-              </a:rPr>
-              <a:t>A</a:t>
-            </a:r>
-          </a:p>
-        </p:txBody>
-      </p:sp>
-      <p:sp>
-        <p:nvSpPr>
-          <p:cNvPr id="11" name="TextBox 10"/>
-          <p:cNvSpPr txBox="1"/>
-          <p:nvPr/>
-        </p:nvSpPr>
-        <p:spPr>
-          <a:xfrm>
-            <a:off x="1508760" y="3337560"/>
-            <a:ext cx="4297680" cy="868680"/>
-          </a:xfrm>
-          <a:prstGeom prst="rect">
-            <a:avLst/>
-          </a:prstGeom>
-          <a:noFill/>
-        </p:spPr>
-        <p:txBody>
-          <a:bodyPr wrap="square" anchor="ctr" lIns="0" rIns="0" tIns="0" bIns="0">
-            <a:spAutoFit/>
-          </a:bodyPr>
-          <a:lstStyle/>
-          <a:p>
-            <a:pPr algn="l"/>
-            <a:r>
-              <a:rPr sz="1450" b="0" i="0">
+              <a:t>Affects speed  —  </a:t>
+            </a:r>
+            <a:r>
+              <a:rPr sz="1500" b="0" i="0">
+                <a:solidFill>
+                  <a:srgbClr val="6B7280"/>
+                </a:solidFill>
+                <a:latin typeface="Calibri"/>
+              </a:rPr>
+              <a:t>temperature, humidity, the gas itself, wind</a:t>
+            </a:r>
+          </a:p>
+          <a:p>
+            <a:pPr algn="l">
+              <a:lnSpc>
+                <a:spcPct val="105000"/>
+              </a:lnSpc>
+              <a:spcAft>
+                <a:spcPts val="1200"/>
+              </a:spcAft>
+            </a:pPr>
+            <a:r>
+              <a:rPr sz="1600" b="1" i="0">
+                <a:solidFill>
+                  <a:srgbClr val="2A9D8F"/>
+                </a:solidFill>
+                <a:latin typeface="Calibri"/>
+              </a:rPr>
+              <a:t>✓  </a:t>
+            </a:r>
+            <a:r>
+              <a:rPr sz="1600" b="1" i="0">
                 <a:solidFill>
                   <a:srgbClr val="1D2433"/>
                 </a:solidFill>
                 <a:latin typeface="Calibri"/>
               </a:rPr>
-              <a:t>Infrasound</a:t>
-            </a:r>
-          </a:p>
-        </p:txBody>
-      </p:sp>
-      <p:sp>
-        <p:nvSpPr>
-          <p:cNvPr id="12" name="Rounded Rectangle 11"/>
-          <p:cNvSpPr/>
-          <p:nvPr/>
-        </p:nvSpPr>
-        <p:spPr>
-          <a:xfrm>
-            <a:off x="6172200" y="3337560"/>
-            <a:ext cx="5349240" cy="868680"/>
-          </a:xfrm>
-          <a:prstGeom prst="roundRect">
-            <a:avLst>
-              <a:gd name="adj" fmla="val 12000"/>
-            </a:avLst>
-          </a:prstGeom>
-          <a:solidFill>
-            <a:srgbClr val="EAF1F4"/>
-          </a:solidFill>
-          <a:ln>
-            <a:noFill/>
-          </a:ln>
-          <a:effectLst/>
-        </p:spPr>
-        <p:style>
-          <a:lnRef idx="1">
-            <a:schemeClr val="accent1"/>
-          </a:lnRef>
-          <a:fillRef idx="3">
-            <a:schemeClr val="accent1"/>
-          </a:fillRef>
-          <a:effectRef idx="2">
-            <a:schemeClr val="accent1"/>
-          </a:effectRef>
-          <a:fontRef idx="minor">
-            <a:schemeClr val="lt1"/>
-          </a:fontRef>
-        </p:style>
-        <p:txBody>
-          <a:bodyPr rtlCol="0" anchor="ctr"/>
-          <a:lstStyle/>
-          <a:p>
-            <a:pPr algn="ctr"/>
-          </a:p>
-        </p:txBody>
-      </p:sp>
-      <p:sp>
-        <p:nvSpPr>
-          <p:cNvPr id="13" name="Oval 12"/>
-          <p:cNvSpPr/>
-          <p:nvPr/>
-        </p:nvSpPr>
-        <p:spPr>
-          <a:xfrm>
-            <a:off x="6446520" y="3566160"/>
-            <a:ext cx="411480" cy="411480"/>
-          </a:xfrm>
-          <a:prstGeom prst="ellipse">
-            <a:avLst/>
-          </a:prstGeom>
-          <a:solidFill>
-            <a:srgbClr val="6A4C93"/>
-          </a:solidFill>
-          <a:ln>
-            <a:noFill/>
-          </a:ln>
-          <a:effectLst/>
-        </p:spPr>
-        <p:style>
-          <a:lnRef idx="1">
-            <a:schemeClr val="accent1"/>
-          </a:lnRef>
-          <a:fillRef idx="3">
-            <a:schemeClr val="accent1"/>
-          </a:fillRef>
-          <a:effectRef idx="2">
-            <a:schemeClr val="accent1"/>
-          </a:effectRef>
-          <a:fontRef idx="minor">
-            <a:schemeClr val="lt1"/>
-          </a:fontRef>
-        </p:style>
-        <p:txBody>
-          <a:bodyPr rtlCol="0" anchor="ctr"/>
-          <a:lstStyle/>
-          <a:p>
-            <a:pPr algn="ctr"/>
-          </a:p>
-        </p:txBody>
-      </p:sp>
-      <p:sp>
-        <p:nvSpPr>
-          <p:cNvPr id="14" name="TextBox 13"/>
-          <p:cNvSpPr txBox="1"/>
-          <p:nvPr/>
-        </p:nvSpPr>
-        <p:spPr>
-          <a:xfrm>
-            <a:off x="6446520" y="3566160"/>
-            <a:ext cx="411480" cy="411480"/>
-          </a:xfrm>
-          <a:prstGeom prst="rect">
-            <a:avLst/>
-          </a:prstGeom>
-          <a:noFill/>
-        </p:spPr>
-        <p:txBody>
-          <a:bodyPr wrap="square" anchor="ctr" lIns="0" rIns="0" tIns="0" bIns="0">
-            <a:spAutoFit/>
-          </a:bodyPr>
-          <a:lstStyle/>
-          <a:p>
-            <a:pPr algn="ctr"/>
-            <a:r>
-              <a:rPr sz="1400" b="1" i="0">
-                <a:solidFill>
-                  <a:srgbClr val="FFFFFF"/>
-                </a:solidFill>
-                <a:latin typeface="Calibri"/>
-              </a:rPr>
-              <a:t>B</a:t>
-            </a:r>
-          </a:p>
-        </p:txBody>
-      </p:sp>
-      <p:sp>
-        <p:nvSpPr>
-          <p:cNvPr id="15" name="TextBox 14"/>
-          <p:cNvSpPr txBox="1"/>
-          <p:nvPr/>
-        </p:nvSpPr>
-        <p:spPr>
-          <a:xfrm>
-            <a:off x="7040880" y="3337560"/>
-            <a:ext cx="4297680" cy="868680"/>
-          </a:xfrm>
-          <a:prstGeom prst="rect">
-            <a:avLst/>
-          </a:prstGeom>
-          <a:noFill/>
-        </p:spPr>
-        <p:txBody>
-          <a:bodyPr wrap="square" anchor="ctr" lIns="0" rIns="0" tIns="0" bIns="0">
-            <a:spAutoFit/>
-          </a:bodyPr>
-          <a:lstStyle/>
-          <a:p>
-            <a:pPr algn="l"/>
-            <a:r>
-              <a:rPr sz="1450" b="0" i="0">
+              <a:t>No effect  —  </a:t>
+            </a:r>
+            <a:r>
+              <a:rPr sz="1500" b="0" i="0">
+                <a:solidFill>
+                  <a:srgbClr val="6B7280"/>
+                </a:solidFill>
+                <a:latin typeface="Calibri"/>
+              </a:rPr>
+              <a:t>pressure, loudness, frequency, wavelength</a:t>
+            </a:r>
+          </a:p>
+          <a:p>
+            <a:pPr algn="l">
+              <a:lnSpc>
+                <a:spcPct val="105000"/>
+              </a:lnSpc>
+              <a:spcAft>
+                <a:spcPts val="1200"/>
+              </a:spcAft>
+            </a:pPr>
+            <a:r>
+              <a:rPr sz="1600" b="1" i="0">
+                <a:solidFill>
+                  <a:srgbClr val="2A9D8F"/>
+                </a:solidFill>
+                <a:latin typeface="Calibri"/>
+              </a:rPr>
+              <a:t>✓  </a:t>
+            </a:r>
+            <a:r>
+              <a:rPr sz="1600" b="1" i="0">
                 <a:solidFill>
                   <a:srgbClr val="1D2433"/>
                 </a:solidFill>
                 <a:latin typeface="Calibri"/>
               </a:rPr>
-              <a:t>Ultrasound</a:t>
-            </a:r>
-          </a:p>
-        </p:txBody>
-      </p:sp>
-      <p:sp>
-        <p:nvSpPr>
-          <p:cNvPr id="16" name="Rounded Rectangle 15"/>
-          <p:cNvSpPr/>
-          <p:nvPr/>
-        </p:nvSpPr>
-        <p:spPr>
-          <a:xfrm>
-            <a:off x="640080" y="4370831"/>
-            <a:ext cx="5349240" cy="868680"/>
-          </a:xfrm>
-          <a:prstGeom prst="roundRect">
-            <a:avLst>
-              <a:gd name="adj" fmla="val 12000"/>
-            </a:avLst>
-          </a:prstGeom>
-          <a:solidFill>
-            <a:srgbClr val="EAF1F4"/>
-          </a:solidFill>
-          <a:ln>
-            <a:noFill/>
-          </a:ln>
-          <a:effectLst/>
-        </p:spPr>
-        <p:style>
-          <a:lnRef idx="1">
-            <a:schemeClr val="accent1"/>
-          </a:lnRef>
-          <a:fillRef idx="3">
-            <a:schemeClr val="accent1"/>
-          </a:fillRef>
-          <a:effectRef idx="2">
-            <a:schemeClr val="accent1"/>
-          </a:effectRef>
-          <a:fontRef idx="minor">
-            <a:schemeClr val="lt1"/>
-          </a:fontRef>
-        </p:style>
-        <p:txBody>
-          <a:bodyPr rtlCol="0" anchor="ctr"/>
-          <a:lstStyle/>
-          <a:p>
-            <a:pPr algn="ctr"/>
-          </a:p>
-        </p:txBody>
-      </p:sp>
-      <p:sp>
-        <p:nvSpPr>
-          <p:cNvPr id="17" name="Oval 16"/>
-          <p:cNvSpPr/>
-          <p:nvPr/>
-        </p:nvSpPr>
-        <p:spPr>
-          <a:xfrm>
-            <a:off x="914400" y="4599431"/>
-            <a:ext cx="411480" cy="411480"/>
-          </a:xfrm>
-          <a:prstGeom prst="ellipse">
-            <a:avLst/>
-          </a:prstGeom>
-          <a:solidFill>
-            <a:srgbClr val="6A4C93"/>
-          </a:solidFill>
-          <a:ln>
-            <a:noFill/>
-          </a:ln>
-          <a:effectLst/>
-        </p:spPr>
-        <p:style>
-          <a:lnRef idx="1">
-            <a:schemeClr val="accent1"/>
-          </a:lnRef>
-          <a:fillRef idx="3">
-            <a:schemeClr val="accent1"/>
-          </a:fillRef>
-          <a:effectRef idx="2">
-            <a:schemeClr val="accent1"/>
-          </a:effectRef>
-          <a:fontRef idx="minor">
-            <a:schemeClr val="lt1"/>
-          </a:fontRef>
-        </p:style>
-        <p:txBody>
-          <a:bodyPr rtlCol="0" anchor="ctr"/>
-          <a:lstStyle/>
-          <a:p>
-            <a:pPr algn="ctr"/>
-          </a:p>
-        </p:txBody>
-      </p:sp>
-      <p:sp>
-        <p:nvSpPr>
-          <p:cNvPr id="18" name="TextBox 17"/>
-          <p:cNvSpPr txBox="1"/>
-          <p:nvPr/>
-        </p:nvSpPr>
-        <p:spPr>
-          <a:xfrm>
-            <a:off x="914400" y="4599431"/>
-            <a:ext cx="411480" cy="411480"/>
-          </a:xfrm>
-          <a:prstGeom prst="rect">
-            <a:avLst/>
-          </a:prstGeom>
-          <a:noFill/>
-        </p:spPr>
-        <p:txBody>
-          <a:bodyPr wrap="square" anchor="ctr" lIns="0" rIns="0" tIns="0" bIns="0">
-            <a:spAutoFit/>
-          </a:bodyPr>
-          <a:lstStyle/>
-          <a:p>
-            <a:pPr algn="ctr"/>
-            <a:r>
-              <a:rPr sz="1400" b="1" i="0">
-                <a:solidFill>
-                  <a:srgbClr val="FFFFFF"/>
-                </a:solidFill>
-                <a:latin typeface="Calibri"/>
-              </a:rPr>
-              <a:t>C</a:t>
-            </a:r>
-          </a:p>
-        </p:txBody>
-      </p:sp>
-      <p:sp>
-        <p:nvSpPr>
-          <p:cNvPr id="19" name="TextBox 18"/>
-          <p:cNvSpPr txBox="1"/>
-          <p:nvPr/>
-        </p:nvSpPr>
-        <p:spPr>
-          <a:xfrm>
-            <a:off x="1508760" y="4370831"/>
-            <a:ext cx="4297680" cy="868680"/>
-          </a:xfrm>
-          <a:prstGeom prst="rect">
-            <a:avLst/>
-          </a:prstGeom>
-          <a:noFill/>
-        </p:spPr>
-        <p:txBody>
-          <a:bodyPr wrap="square" anchor="ctr" lIns="0" rIns="0" tIns="0" bIns="0">
-            <a:spAutoFit/>
-          </a:bodyPr>
-          <a:lstStyle/>
-          <a:p>
-            <a:pPr algn="l"/>
-            <a:r>
-              <a:rPr sz="1450" b="0" i="0">
+              <a:t>Sound vs light  —  </a:t>
+            </a:r>
+            <a:r>
+              <a:rPr sz="1500" b="0" i="0">
+                <a:solidFill>
+                  <a:srgbClr val="6B7280"/>
+                </a:solidFill>
+                <a:latin typeface="Calibri"/>
+              </a:rPr>
+              <a:t>light ≈ 3 × 10⁸ m/s ≫ sound ≈ 340 m/s</a:t>
+            </a:r>
+          </a:p>
+          <a:p>
+            <a:pPr algn="l">
+              <a:lnSpc>
+                <a:spcPct val="105000"/>
+              </a:lnSpc>
+              <a:spcAft>
+                <a:spcPts val="1200"/>
+              </a:spcAft>
+            </a:pPr>
+            <a:r>
+              <a:rPr sz="1600" b="1" i="0">
+                <a:solidFill>
+                  <a:srgbClr val="2A9D8F"/>
+                </a:solidFill>
+                <a:latin typeface="Calibri"/>
+              </a:rPr>
+              <a:t>✓  </a:t>
+            </a:r>
+            <a:r>
+              <a:rPr sz="1600" b="1" i="0">
                 <a:solidFill>
                   <a:srgbClr val="1D2433"/>
                 </a:solidFill>
                 <a:latin typeface="Calibri"/>
               </a:rPr>
-              <a:t>Visible light</a:t>
-            </a:r>
-          </a:p>
-        </p:txBody>
-      </p:sp>
-      <p:sp>
-        <p:nvSpPr>
-          <p:cNvPr id="20" name="Rounded Rectangle 19"/>
-          <p:cNvSpPr/>
-          <p:nvPr/>
-        </p:nvSpPr>
-        <p:spPr>
-          <a:xfrm>
-            <a:off x="6172200" y="4370831"/>
-            <a:ext cx="5349240" cy="868680"/>
-          </a:xfrm>
-          <a:prstGeom prst="roundRect">
-            <a:avLst>
-              <a:gd name="adj" fmla="val 12000"/>
-            </a:avLst>
-          </a:prstGeom>
-          <a:solidFill>
-            <a:srgbClr val="EAF1F4"/>
-          </a:solidFill>
-          <a:ln>
-            <a:noFill/>
-          </a:ln>
-          <a:effectLst/>
-        </p:spPr>
-        <p:style>
-          <a:lnRef idx="1">
-            <a:schemeClr val="accent1"/>
-          </a:lnRef>
-          <a:fillRef idx="3">
-            <a:schemeClr val="accent1"/>
-          </a:fillRef>
-          <a:effectRef idx="2">
-            <a:schemeClr val="accent1"/>
-          </a:effectRef>
-          <a:fontRef idx="minor">
-            <a:schemeClr val="lt1"/>
-          </a:fontRef>
-        </p:style>
-        <p:txBody>
-          <a:bodyPr rtlCol="0" anchor="ctr"/>
-          <a:lstStyle/>
-          <a:p>
-            <a:pPr algn="ctr"/>
-          </a:p>
-        </p:txBody>
-      </p:sp>
-      <p:sp>
-        <p:nvSpPr>
-          <p:cNvPr id="21" name="Oval 20"/>
-          <p:cNvSpPr/>
-          <p:nvPr/>
-        </p:nvSpPr>
-        <p:spPr>
-          <a:xfrm>
-            <a:off x="6446520" y="4599431"/>
-            <a:ext cx="411480" cy="411480"/>
-          </a:xfrm>
-          <a:prstGeom prst="ellipse">
-            <a:avLst/>
-          </a:prstGeom>
-          <a:solidFill>
-            <a:srgbClr val="6A4C93"/>
-          </a:solidFill>
-          <a:ln>
-            <a:noFill/>
-          </a:ln>
-          <a:effectLst/>
-        </p:spPr>
-        <p:style>
-          <a:lnRef idx="1">
-            <a:schemeClr val="accent1"/>
-          </a:lnRef>
-          <a:fillRef idx="3">
-            <a:schemeClr val="accent1"/>
-          </a:fillRef>
-          <a:effectRef idx="2">
-            <a:schemeClr val="accent1"/>
-          </a:effectRef>
-          <a:fontRef idx="minor">
-            <a:schemeClr val="lt1"/>
-          </a:fontRef>
-        </p:style>
-        <p:txBody>
-          <a:bodyPr rtlCol="0" anchor="ctr"/>
-          <a:lstStyle/>
-          <a:p>
-            <a:pPr algn="ctr"/>
-          </a:p>
-        </p:txBody>
-      </p:sp>
-      <p:sp>
-        <p:nvSpPr>
-          <p:cNvPr id="22" name="TextBox 21"/>
-          <p:cNvSpPr txBox="1"/>
-          <p:nvPr/>
-        </p:nvSpPr>
-        <p:spPr>
-          <a:xfrm>
-            <a:off x="6446520" y="4599431"/>
-            <a:ext cx="411480" cy="411480"/>
-          </a:xfrm>
-          <a:prstGeom prst="rect">
-            <a:avLst/>
-          </a:prstGeom>
-          <a:noFill/>
-        </p:spPr>
-        <p:txBody>
-          <a:bodyPr wrap="square" anchor="ctr" lIns="0" rIns="0" tIns="0" bIns="0">
-            <a:spAutoFit/>
-          </a:bodyPr>
-          <a:lstStyle/>
-          <a:p>
-            <a:pPr algn="ctr"/>
-            <a:r>
-              <a:rPr sz="1400" b="1" i="0">
-                <a:solidFill>
-                  <a:srgbClr val="FFFFFF"/>
-                </a:solidFill>
-                <a:latin typeface="Calibri"/>
-              </a:rPr>
-              <a:t>D</a:t>
-            </a:r>
-          </a:p>
-        </p:txBody>
-      </p:sp>
-      <p:sp>
-        <p:nvSpPr>
-          <p:cNvPr id="23" name="TextBox 22"/>
-          <p:cNvSpPr txBox="1"/>
-          <p:nvPr/>
-        </p:nvSpPr>
-        <p:spPr>
-          <a:xfrm>
-            <a:off x="7040880" y="4370831"/>
-            <a:ext cx="4297680" cy="868680"/>
-          </a:xfrm>
-          <a:prstGeom prst="rect">
-            <a:avLst/>
-          </a:prstGeom>
-          <a:noFill/>
-        </p:spPr>
-        <p:txBody>
-          <a:bodyPr wrap="square" anchor="ctr" lIns="0" rIns="0" tIns="0" bIns="0">
-            <a:spAutoFit/>
-          </a:bodyPr>
-          <a:lstStyle/>
-          <a:p>
-            <a:pPr algn="l"/>
-            <a:r>
-              <a:rPr sz="1450" b="0" i="0">
+              <a:t>Measuring speed  —  </a:t>
+            </a:r>
+            <a:r>
+              <a:rPr sz="1500" b="0" i="0">
+                <a:solidFill>
+                  <a:srgbClr val="6B7280"/>
+                </a:solidFill>
+                <a:latin typeface="Calibri"/>
+              </a:rPr>
+              <a:t>echo method, v = 2d / t</a:t>
+            </a:r>
+          </a:p>
+          <a:p>
+            <a:pPr algn="l">
+              <a:lnSpc>
+                <a:spcPct val="105000"/>
+              </a:lnSpc>
+              <a:spcAft>
+                <a:spcPts val="1200"/>
+              </a:spcAft>
+            </a:pPr>
+            <a:r>
+              <a:rPr sz="1600" b="1" i="0">
+                <a:solidFill>
+                  <a:srgbClr val="2A9D8F"/>
+                </a:solidFill>
+                <a:latin typeface="Calibri"/>
+              </a:rPr>
+              <a:t>✓  </a:t>
+            </a:r>
+            <a:r>
+              <a:rPr sz="1600" b="1" i="0">
                 <a:solidFill>
                   <a:srgbClr val="1D2433"/>
                 </a:solidFill>
                 <a:latin typeface="Calibri"/>
               </a:rPr>
-              <a:t>Radio waves</a:t>
+              <a:t>Ranges  —  </a:t>
+            </a:r>
+            <a:r>
+              <a:rPr sz="1500" b="0" i="0">
+                <a:solidFill>
+                  <a:srgbClr val="6B7280"/>
+                </a:solidFill>
+                <a:latin typeface="Calibri"/>
+              </a:rPr>
+              <a:t>infrasonic &lt; 20 Hz &lt; audible &lt; 20 kHz &lt; ultrasonic</a:t>
+            </a:r>
+          </a:p>
+          <a:p>
+            <a:pPr algn="l">
+              <a:lnSpc>
+                <a:spcPct val="105000"/>
+              </a:lnSpc>
+              <a:spcAft>
+                <a:spcPts val="1200"/>
+              </a:spcAft>
+            </a:pPr>
+            <a:r>
+              <a:rPr sz="1600" b="1" i="0">
+                <a:solidFill>
+                  <a:srgbClr val="2A9D8F"/>
+                </a:solidFill>
+                <a:latin typeface="Calibri"/>
+              </a:rPr>
+              <a:t>✓  </a:t>
+            </a:r>
+            <a:r>
+              <a:rPr sz="1600" b="1" i="0">
+                <a:solidFill>
+                  <a:srgbClr val="1D2433"/>
+                </a:solidFill>
+                <a:latin typeface="Calibri"/>
+              </a:rPr>
+              <a:t>Ultrasound uses  —  </a:t>
+            </a:r>
+            <a:r>
+              <a:rPr sz="1500" b="0" i="0">
+                <a:solidFill>
+                  <a:srgbClr val="6B7280"/>
+                </a:solidFill>
+                <a:latin typeface="Calibri"/>
+              </a:rPr>
+              <a:t>scans, SONAR, cleaning, flaw detection</a:t>
             </a:r>
           </a:p>
         </p:txBody>
@@ -18483,7 +19443,7 @@
     <p:bg>
       <p:bgPr>
         <a:solidFill>
-          <a:srgbClr val="F4F6F8"/>
+          <a:srgbClr val="1D2433"/>
         </a:solidFill>
         <a:effectLst/>
       </p:bgPr>
@@ -18503,17 +19463,17 @@
         </p:nvSpPr>
         <p:spPr>
           <a:xfrm>
-            <a:off x="10927080" y="365760"/>
-            <a:ext cx="868680" cy="868680"/>
+            <a:off x="8778240" y="-1371600"/>
+            <a:ext cx="4754880" cy="4754880"/>
           </a:xfrm>
           <a:prstGeom prst="ellipse">
             <a:avLst/>
           </a:prstGeom>
-          <a:noFill/>
-          <a:ln w="15875">
-            <a:solidFill>
-              <a:srgbClr val="DDE2E8"/>
-            </a:solidFill>
+          <a:solidFill>
+            <a:srgbClr val="6A4C93"/>
+          </a:solidFill>
+          <a:ln>
+            <a:noFill/>
           </a:ln>
           <a:effectLst/>
         </p:spPr>
@@ -18541,45 +19501,36 @@
       </p:sp>
       <p:sp>
         <p:nvSpPr>
-          <p:cNvPr id="3" name="Rectangle 2"/>
-          <p:cNvSpPr/>
-          <p:nvPr/>
-        </p:nvSpPr>
-        <p:spPr>
-          <a:xfrm>
-            <a:off x="548640" y="502920"/>
-            <a:ext cx="256032" cy="256032"/>
-          </a:xfrm>
-          <a:prstGeom prst="rect">
-            <a:avLst/>
-          </a:prstGeom>
-          <a:solidFill>
-            <a:srgbClr val="2A9D8F"/>
-          </a:solidFill>
-          <a:ln>
-            <a:noFill/>
-          </a:ln>
-          <a:effectLst/>
-        </p:spPr>
-        <p:style>
-          <a:lnRef idx="1">
-            <a:schemeClr val="accent1"/>
-          </a:lnRef>
-          <a:fillRef idx="3">
-            <a:schemeClr val="accent1"/>
-          </a:fillRef>
-          <a:effectRef idx="2">
-            <a:schemeClr val="accent1"/>
-          </a:effectRef>
-          <a:fontRef idx="minor">
-            <a:schemeClr val="lt1"/>
-          </a:fontRef>
-        </p:style>
-        <p:txBody>
-          <a:bodyPr rtlCol="0" anchor="ctr"/>
-          <a:lstStyle/>
-          <a:p>
-            <a:pPr algn="ctr"/>
+          <p:cNvPr id="3" name="TextBox 2"/>
+          <p:cNvSpPr txBox="1"/>
+          <p:nvPr/>
+        </p:nvSpPr>
+        <p:spPr>
+          <a:xfrm>
+            <a:off x="777240" y="2011680"/>
+            <a:ext cx="8229600" cy="457200"/>
+          </a:xfrm>
+          <a:prstGeom prst="rect">
+            <a:avLst/>
+          </a:prstGeom>
+          <a:noFill/>
+        </p:spPr>
+        <p:txBody>
+          <a:bodyPr wrap="square" anchor="t" lIns="0" rIns="0" tIns="0" bIns="0">
+            <a:spAutoFit/>
+          </a:bodyPr>
+          <a:lstStyle/>
+          <a:p>
+            <a:pPr algn="l"/>
+            <a:r>
+              <a:rPr sz="1600" b="1" i="0">
+                <a:solidFill>
+                  <a:srgbClr val="FFC300"/>
+                </a:solidFill>
+                <a:latin typeface="Arial"/>
+              </a:rPr>
+              <a:t>QUIZ 2</a:t>
+            </a:r>
           </a:p>
         </p:txBody>
       </p:sp>
@@ -18591,8 +19542,8 @@
         </p:nvSpPr>
         <p:spPr>
           <a:xfrm>
-            <a:off x="914400" y="457200"/>
-            <a:ext cx="9509760" cy="320040"/>
+            <a:off x="777240" y="2560320"/>
+            <a:ext cx="9601200" cy="1005840"/>
           </a:xfrm>
           <a:prstGeom prst="rect">
             <a:avLst/>
@@ -18607,13 +19558,13 @@
           <a:p>
             <a:pPr algn="l"/>
             <a:r>
-              <a:rPr sz="1300" b="1" i="0">
-                <a:solidFill>
-                  <a:srgbClr val="2A9D8F"/>
-                </a:solidFill>
-                <a:latin typeface="Arial"/>
-              </a:rPr>
-              <a:t>ANSWER REVEALED</a:t>
+              <a:rPr sz="4400" b="1" i="0">
+                <a:solidFill>
+                  <a:srgbClr val="FFFFFF"/>
+                </a:solidFill>
+                <a:latin typeface="Calibri"/>
+              </a:rPr>
+              <a:t>Final Check — Speed &amp; Ultrasound</a:t>
             </a:r>
           </a:p>
         </p:txBody>
@@ -18626,8 +19577,8 @@
         </p:nvSpPr>
         <p:spPr>
           <a:xfrm>
-            <a:off x="548640" y="777240"/>
-            <a:ext cx="9966960" cy="822960"/>
+            <a:off x="777240" y="3749039"/>
+            <a:ext cx="9601200" cy="548640"/>
           </a:xfrm>
           <a:prstGeom prst="rect">
             <a:avLst/>
@@ -18642,868 +19593,13 @@
           <a:p>
             <a:pPr algn="l"/>
             <a:r>
-              <a:rPr sz="3000" b="1" i="0">
-                <a:solidFill>
-                  <a:srgbClr val="1D2433"/>
-                </a:solidFill>
-                <a:latin typeface="Calibri"/>
-              </a:rPr>
-              <a:t>Q1 — Bat Navigation</a:t>
-            </a:r>
-          </a:p>
-        </p:txBody>
-      </p:sp>
-      <p:sp>
-        <p:nvSpPr>
-          <p:cNvPr id="6" name="Rounded Rectangle 5"/>
-          <p:cNvSpPr/>
-          <p:nvPr/>
-        </p:nvSpPr>
-        <p:spPr>
-          <a:xfrm>
-            <a:off x="640080" y="1783080"/>
-            <a:ext cx="10881360" cy="1325880"/>
-          </a:xfrm>
-          <a:prstGeom prst="roundRect">
-            <a:avLst>
-              <a:gd name="adj" fmla="val 4000"/>
-            </a:avLst>
-          </a:prstGeom>
-          <a:solidFill>
-            <a:srgbClr val="FFFFFF"/>
-          </a:solidFill>
-          <a:ln>
-            <a:noFill/>
-          </a:ln>
-          <a:effectLst>
-            <a:outerShdw blurRad="88900" dist="38100" dir="5400000" rotWithShape="0" algn="bl">
-              <a:srgbClr val="000000">
-                <a:alpha val="16000"/>
-              </a:srgbClr>
-            </a:outerShdw>
-          </a:effectLst>
-        </p:spPr>
-        <p:style>
-          <a:lnRef idx="1">
-            <a:schemeClr val="accent1"/>
-          </a:lnRef>
-          <a:fillRef idx="3">
-            <a:schemeClr val="accent1"/>
-          </a:fillRef>
-          <a:effectRef idx="2">
-            <a:schemeClr val="accent1"/>
-          </a:effectRef>
-          <a:fontRef idx="minor">
-            <a:schemeClr val="lt1"/>
-          </a:fontRef>
-        </p:style>
-        <p:txBody>
-          <a:bodyPr rtlCol="0" anchor="ctr"/>
-          <a:lstStyle/>
-          <a:p>
-            <a:pPr algn="ctr"/>
-          </a:p>
-        </p:txBody>
-      </p:sp>
-      <p:sp>
-        <p:nvSpPr>
-          <p:cNvPr id="7" name="TextBox 6"/>
-          <p:cNvSpPr txBox="1"/>
-          <p:nvPr/>
-        </p:nvSpPr>
-        <p:spPr>
-          <a:xfrm>
-            <a:off x="1005840" y="1783080"/>
-            <a:ext cx="10149840" cy="1325880"/>
-          </a:xfrm>
-          <a:prstGeom prst="rect">
-            <a:avLst/>
-          </a:prstGeom>
-          <a:noFill/>
-        </p:spPr>
-        <p:txBody>
-          <a:bodyPr wrap="square" anchor="ctr" lIns="0" rIns="0" tIns="0" bIns="0">
-            <a:spAutoFit/>
-          </a:bodyPr>
-          <a:lstStyle/>
-          <a:p>
-            <a:pPr algn="l"/>
-            <a:r>
-              <a:rPr sz="1800" b="1" i="0">
-                <a:solidFill>
-                  <a:srgbClr val="1D2433"/>
-                </a:solidFill>
-                <a:latin typeface="Calibri"/>
-              </a:rPr>
-              <a:t>A bat finds insects in the dark by emitting and listening for:</a:t>
-            </a:r>
-          </a:p>
-        </p:txBody>
-      </p:sp>
-      <p:sp>
-        <p:nvSpPr>
-          <p:cNvPr id="8" name="Rounded Rectangle 7"/>
-          <p:cNvSpPr/>
-          <p:nvPr/>
-        </p:nvSpPr>
-        <p:spPr>
-          <a:xfrm>
-            <a:off x="640080" y="3337560"/>
-            <a:ext cx="5349240" cy="868680"/>
-          </a:xfrm>
-          <a:prstGeom prst="roundRect">
-            <a:avLst>
-              <a:gd name="adj" fmla="val 12000"/>
-            </a:avLst>
-          </a:prstGeom>
-          <a:solidFill>
-            <a:srgbClr val="EAF1F4"/>
-          </a:solidFill>
-          <a:ln>
-            <a:noFill/>
-          </a:ln>
-          <a:effectLst/>
-        </p:spPr>
-        <p:style>
-          <a:lnRef idx="1">
-            <a:schemeClr val="accent1"/>
-          </a:lnRef>
-          <a:fillRef idx="3">
-            <a:schemeClr val="accent1"/>
-          </a:fillRef>
-          <a:effectRef idx="2">
-            <a:schemeClr val="accent1"/>
-          </a:effectRef>
-          <a:fontRef idx="minor">
-            <a:schemeClr val="lt1"/>
-          </a:fontRef>
-        </p:style>
-        <p:txBody>
-          <a:bodyPr rtlCol="0" anchor="ctr"/>
-          <a:lstStyle/>
-          <a:p>
-            <a:pPr algn="ctr"/>
-          </a:p>
-        </p:txBody>
-      </p:sp>
-      <p:sp>
-        <p:nvSpPr>
-          <p:cNvPr id="9" name="Oval 8"/>
-          <p:cNvSpPr/>
-          <p:nvPr/>
-        </p:nvSpPr>
-        <p:spPr>
-          <a:xfrm>
-            <a:off x="914400" y="3566160"/>
-            <a:ext cx="411480" cy="411480"/>
-          </a:xfrm>
-          <a:prstGeom prst="ellipse">
-            <a:avLst/>
-          </a:prstGeom>
-          <a:solidFill>
-            <a:srgbClr val="B7C2CC"/>
-          </a:solidFill>
-          <a:ln>
-            <a:noFill/>
-          </a:ln>
-          <a:effectLst/>
-        </p:spPr>
-        <p:style>
-          <a:lnRef idx="1">
-            <a:schemeClr val="accent1"/>
-          </a:lnRef>
-          <a:fillRef idx="3">
-            <a:schemeClr val="accent1"/>
-          </a:fillRef>
-          <a:effectRef idx="2">
-            <a:schemeClr val="accent1"/>
-          </a:effectRef>
-          <a:fontRef idx="minor">
-            <a:schemeClr val="lt1"/>
-          </a:fontRef>
-        </p:style>
-        <p:txBody>
-          <a:bodyPr rtlCol="0" anchor="ctr"/>
-          <a:lstStyle/>
-          <a:p>
-            <a:pPr algn="ctr"/>
-          </a:p>
-        </p:txBody>
-      </p:sp>
-      <p:sp>
-        <p:nvSpPr>
-          <p:cNvPr id="10" name="TextBox 9"/>
-          <p:cNvSpPr txBox="1"/>
-          <p:nvPr/>
-        </p:nvSpPr>
-        <p:spPr>
-          <a:xfrm>
-            <a:off x="914400" y="3566160"/>
-            <a:ext cx="411480" cy="411480"/>
-          </a:xfrm>
-          <a:prstGeom prst="rect">
-            <a:avLst/>
-          </a:prstGeom>
-          <a:noFill/>
-        </p:spPr>
-        <p:txBody>
-          <a:bodyPr wrap="square" anchor="ctr" lIns="0" rIns="0" tIns="0" bIns="0">
-            <a:spAutoFit/>
-          </a:bodyPr>
-          <a:lstStyle/>
-          <a:p>
-            <a:pPr algn="ctr"/>
-            <a:r>
-              <a:rPr sz="1400" b="1" i="0">
-                <a:solidFill>
-                  <a:srgbClr val="FFFFFF"/>
-                </a:solidFill>
-                <a:latin typeface="Calibri"/>
-              </a:rPr>
-              <a:t>A</a:t>
-            </a:r>
-          </a:p>
-        </p:txBody>
-      </p:sp>
-      <p:sp>
-        <p:nvSpPr>
-          <p:cNvPr id="11" name="TextBox 10"/>
-          <p:cNvSpPr txBox="1"/>
-          <p:nvPr/>
-        </p:nvSpPr>
-        <p:spPr>
-          <a:xfrm>
-            <a:off x="1508760" y="3337560"/>
-            <a:ext cx="4297680" cy="868680"/>
-          </a:xfrm>
-          <a:prstGeom prst="rect">
-            <a:avLst/>
-          </a:prstGeom>
-          <a:noFill/>
-        </p:spPr>
-        <p:txBody>
-          <a:bodyPr wrap="square" anchor="ctr" lIns="0" rIns="0" tIns="0" bIns="0">
-            <a:spAutoFit/>
-          </a:bodyPr>
-          <a:lstStyle/>
-          <a:p>
-            <a:pPr algn="l"/>
-            <a:r>
-              <a:rPr sz="1450" b="0" i="0">
-                <a:solidFill>
-                  <a:srgbClr val="6B7280"/>
-                </a:solidFill>
-                <a:latin typeface="Calibri"/>
-              </a:rPr>
-              <a:t>Infrasound</a:t>
-            </a:r>
-          </a:p>
-        </p:txBody>
-      </p:sp>
-      <p:sp>
-        <p:nvSpPr>
-          <p:cNvPr id="12" name="Rounded Rectangle 11"/>
-          <p:cNvSpPr/>
-          <p:nvPr/>
-        </p:nvSpPr>
-        <p:spPr>
-          <a:xfrm>
-            <a:off x="6172200" y="3337560"/>
-            <a:ext cx="5349240" cy="868680"/>
-          </a:xfrm>
-          <a:prstGeom prst="roundRect">
-            <a:avLst>
-              <a:gd name="adj" fmla="val 12000"/>
-            </a:avLst>
-          </a:prstGeom>
-          <a:solidFill>
-            <a:srgbClr val="E9F5F0"/>
-          </a:solidFill>
-          <a:ln w="25400">
-            <a:solidFill>
-              <a:srgbClr val="2A9D8F"/>
-            </a:solidFill>
-          </a:ln>
-          <a:effectLst/>
-        </p:spPr>
-        <p:style>
-          <a:lnRef idx="1">
-            <a:schemeClr val="accent1"/>
-          </a:lnRef>
-          <a:fillRef idx="3">
-            <a:schemeClr val="accent1"/>
-          </a:fillRef>
-          <a:effectRef idx="2">
-            <a:schemeClr val="accent1"/>
-          </a:effectRef>
-          <a:fontRef idx="minor">
-            <a:schemeClr val="lt1"/>
-          </a:fontRef>
-        </p:style>
-        <p:txBody>
-          <a:bodyPr rtlCol="0" anchor="ctr"/>
-          <a:lstStyle/>
-          <a:p>
-            <a:pPr algn="ctr"/>
-          </a:p>
-        </p:txBody>
-      </p:sp>
-      <p:sp>
-        <p:nvSpPr>
-          <p:cNvPr id="13" name="Oval 12"/>
-          <p:cNvSpPr/>
-          <p:nvPr/>
-        </p:nvSpPr>
-        <p:spPr>
-          <a:xfrm>
-            <a:off x="6446520" y="3566160"/>
-            <a:ext cx="411480" cy="411480"/>
-          </a:xfrm>
-          <a:prstGeom prst="ellipse">
-            <a:avLst/>
-          </a:prstGeom>
-          <a:solidFill>
-            <a:srgbClr val="2A9D8F"/>
-          </a:solidFill>
-          <a:ln>
-            <a:noFill/>
-          </a:ln>
-          <a:effectLst/>
-        </p:spPr>
-        <p:style>
-          <a:lnRef idx="1">
-            <a:schemeClr val="accent1"/>
-          </a:lnRef>
-          <a:fillRef idx="3">
-            <a:schemeClr val="accent1"/>
-          </a:fillRef>
-          <a:effectRef idx="2">
-            <a:schemeClr val="accent1"/>
-          </a:effectRef>
-          <a:fontRef idx="minor">
-            <a:schemeClr val="lt1"/>
-          </a:fontRef>
-        </p:style>
-        <p:txBody>
-          <a:bodyPr rtlCol="0" anchor="ctr"/>
-          <a:lstStyle/>
-          <a:p>
-            <a:pPr algn="ctr"/>
-          </a:p>
-        </p:txBody>
-      </p:sp>
-      <p:sp>
-        <p:nvSpPr>
-          <p:cNvPr id="14" name="TextBox 13"/>
-          <p:cNvSpPr txBox="1"/>
-          <p:nvPr/>
-        </p:nvSpPr>
-        <p:spPr>
-          <a:xfrm>
-            <a:off x="6446520" y="3566160"/>
-            <a:ext cx="411480" cy="411480"/>
-          </a:xfrm>
-          <a:prstGeom prst="rect">
-            <a:avLst/>
-          </a:prstGeom>
-          <a:noFill/>
-        </p:spPr>
-        <p:txBody>
-          <a:bodyPr wrap="square" anchor="ctr" lIns="0" rIns="0" tIns="0" bIns="0">
-            <a:spAutoFit/>
-          </a:bodyPr>
-          <a:lstStyle/>
-          <a:p>
-            <a:pPr algn="ctr"/>
-            <a:r>
-              <a:rPr sz="1400" b="1" i="0">
-                <a:solidFill>
-                  <a:srgbClr val="FFFFFF"/>
-                </a:solidFill>
-                <a:latin typeface="Calibri"/>
-              </a:rPr>
-              <a:t>✓</a:t>
-            </a:r>
-          </a:p>
-        </p:txBody>
-      </p:sp>
-      <p:sp>
-        <p:nvSpPr>
-          <p:cNvPr id="15" name="TextBox 14"/>
-          <p:cNvSpPr txBox="1"/>
-          <p:nvPr/>
-        </p:nvSpPr>
-        <p:spPr>
-          <a:xfrm>
-            <a:off x="7040880" y="3337560"/>
-            <a:ext cx="4297680" cy="868680"/>
-          </a:xfrm>
-          <a:prstGeom prst="rect">
-            <a:avLst/>
-          </a:prstGeom>
-          <a:noFill/>
-        </p:spPr>
-        <p:txBody>
-          <a:bodyPr wrap="square" anchor="ctr" lIns="0" rIns="0" tIns="0" bIns="0">
-            <a:spAutoFit/>
-          </a:bodyPr>
-          <a:lstStyle/>
-          <a:p>
-            <a:pPr algn="l"/>
-            <a:r>
-              <a:rPr sz="1450" b="1" i="0">
-                <a:solidFill>
-                  <a:srgbClr val="1D2433"/>
-                </a:solidFill>
-                <a:latin typeface="Calibri"/>
-              </a:rPr>
-              <a:t>Ultrasound</a:t>
-            </a:r>
-          </a:p>
-        </p:txBody>
-      </p:sp>
-      <p:sp>
-        <p:nvSpPr>
-          <p:cNvPr id="16" name="Rounded Rectangle 15"/>
-          <p:cNvSpPr/>
-          <p:nvPr/>
-        </p:nvSpPr>
-        <p:spPr>
-          <a:xfrm>
-            <a:off x="640080" y="4370831"/>
-            <a:ext cx="5349240" cy="868680"/>
-          </a:xfrm>
-          <a:prstGeom prst="roundRect">
-            <a:avLst>
-              <a:gd name="adj" fmla="val 12000"/>
-            </a:avLst>
-          </a:prstGeom>
-          <a:solidFill>
-            <a:srgbClr val="EAF1F4"/>
-          </a:solidFill>
-          <a:ln>
-            <a:noFill/>
-          </a:ln>
-          <a:effectLst/>
-        </p:spPr>
-        <p:style>
-          <a:lnRef idx="1">
-            <a:schemeClr val="accent1"/>
-          </a:lnRef>
-          <a:fillRef idx="3">
-            <a:schemeClr val="accent1"/>
-          </a:fillRef>
-          <a:effectRef idx="2">
-            <a:schemeClr val="accent1"/>
-          </a:effectRef>
-          <a:fontRef idx="minor">
-            <a:schemeClr val="lt1"/>
-          </a:fontRef>
-        </p:style>
-        <p:txBody>
-          <a:bodyPr rtlCol="0" anchor="ctr"/>
-          <a:lstStyle/>
-          <a:p>
-            <a:pPr algn="ctr"/>
-          </a:p>
-        </p:txBody>
-      </p:sp>
-      <p:sp>
-        <p:nvSpPr>
-          <p:cNvPr id="17" name="Oval 16"/>
-          <p:cNvSpPr/>
-          <p:nvPr/>
-        </p:nvSpPr>
-        <p:spPr>
-          <a:xfrm>
-            <a:off x="914400" y="4599431"/>
-            <a:ext cx="411480" cy="411480"/>
-          </a:xfrm>
-          <a:prstGeom prst="ellipse">
-            <a:avLst/>
-          </a:prstGeom>
-          <a:solidFill>
-            <a:srgbClr val="B7C2CC"/>
-          </a:solidFill>
-          <a:ln>
-            <a:noFill/>
-          </a:ln>
-          <a:effectLst/>
-        </p:spPr>
-        <p:style>
-          <a:lnRef idx="1">
-            <a:schemeClr val="accent1"/>
-          </a:lnRef>
-          <a:fillRef idx="3">
-            <a:schemeClr val="accent1"/>
-          </a:fillRef>
-          <a:effectRef idx="2">
-            <a:schemeClr val="accent1"/>
-          </a:effectRef>
-          <a:fontRef idx="minor">
-            <a:schemeClr val="lt1"/>
-          </a:fontRef>
-        </p:style>
-        <p:txBody>
-          <a:bodyPr rtlCol="0" anchor="ctr"/>
-          <a:lstStyle/>
-          <a:p>
-            <a:pPr algn="ctr"/>
-          </a:p>
-        </p:txBody>
-      </p:sp>
-      <p:sp>
-        <p:nvSpPr>
-          <p:cNvPr id="18" name="TextBox 17"/>
-          <p:cNvSpPr txBox="1"/>
-          <p:nvPr/>
-        </p:nvSpPr>
-        <p:spPr>
-          <a:xfrm>
-            <a:off x="914400" y="4599431"/>
-            <a:ext cx="411480" cy="411480"/>
-          </a:xfrm>
-          <a:prstGeom prst="rect">
-            <a:avLst/>
-          </a:prstGeom>
-          <a:noFill/>
-        </p:spPr>
-        <p:txBody>
-          <a:bodyPr wrap="square" anchor="ctr" lIns="0" rIns="0" tIns="0" bIns="0">
-            <a:spAutoFit/>
-          </a:bodyPr>
-          <a:lstStyle/>
-          <a:p>
-            <a:pPr algn="ctr"/>
-            <a:r>
-              <a:rPr sz="1400" b="1" i="0">
-                <a:solidFill>
-                  <a:srgbClr val="FFFFFF"/>
-                </a:solidFill>
-                <a:latin typeface="Calibri"/>
-              </a:rPr>
-              <a:t>C</a:t>
-            </a:r>
-          </a:p>
-        </p:txBody>
-      </p:sp>
-      <p:sp>
-        <p:nvSpPr>
-          <p:cNvPr id="19" name="TextBox 18"/>
-          <p:cNvSpPr txBox="1"/>
-          <p:nvPr/>
-        </p:nvSpPr>
-        <p:spPr>
-          <a:xfrm>
-            <a:off x="1508760" y="4370831"/>
-            <a:ext cx="4297680" cy="868680"/>
-          </a:xfrm>
-          <a:prstGeom prst="rect">
-            <a:avLst/>
-          </a:prstGeom>
-          <a:noFill/>
-        </p:spPr>
-        <p:txBody>
-          <a:bodyPr wrap="square" anchor="ctr" lIns="0" rIns="0" tIns="0" bIns="0">
-            <a:spAutoFit/>
-          </a:bodyPr>
-          <a:lstStyle/>
-          <a:p>
-            <a:pPr algn="l"/>
-            <a:r>
-              <a:rPr sz="1450" b="0" i="0">
-                <a:solidFill>
-                  <a:srgbClr val="6B7280"/>
-                </a:solidFill>
-                <a:latin typeface="Calibri"/>
-              </a:rPr>
-              <a:t>Visible light</a:t>
-            </a:r>
-          </a:p>
-        </p:txBody>
-      </p:sp>
-      <p:sp>
-        <p:nvSpPr>
-          <p:cNvPr id="20" name="Rounded Rectangle 19"/>
-          <p:cNvSpPr/>
-          <p:nvPr/>
-        </p:nvSpPr>
-        <p:spPr>
-          <a:xfrm>
-            <a:off x="6172200" y="4370831"/>
-            <a:ext cx="5349240" cy="868680"/>
-          </a:xfrm>
-          <a:prstGeom prst="roundRect">
-            <a:avLst>
-              <a:gd name="adj" fmla="val 12000"/>
-            </a:avLst>
-          </a:prstGeom>
-          <a:solidFill>
-            <a:srgbClr val="EAF1F4"/>
-          </a:solidFill>
-          <a:ln>
-            <a:noFill/>
-          </a:ln>
-          <a:effectLst/>
-        </p:spPr>
-        <p:style>
-          <a:lnRef idx="1">
-            <a:schemeClr val="accent1"/>
-          </a:lnRef>
-          <a:fillRef idx="3">
-            <a:schemeClr val="accent1"/>
-          </a:fillRef>
-          <a:effectRef idx="2">
-            <a:schemeClr val="accent1"/>
-          </a:effectRef>
-          <a:fontRef idx="minor">
-            <a:schemeClr val="lt1"/>
-          </a:fontRef>
-        </p:style>
-        <p:txBody>
-          <a:bodyPr rtlCol="0" anchor="ctr"/>
-          <a:lstStyle/>
-          <a:p>
-            <a:pPr algn="ctr"/>
-          </a:p>
-        </p:txBody>
-      </p:sp>
-      <p:sp>
-        <p:nvSpPr>
-          <p:cNvPr id="21" name="Oval 20"/>
-          <p:cNvSpPr/>
-          <p:nvPr/>
-        </p:nvSpPr>
-        <p:spPr>
-          <a:xfrm>
-            <a:off x="6446520" y="4599431"/>
-            <a:ext cx="411480" cy="411480"/>
-          </a:xfrm>
-          <a:prstGeom prst="ellipse">
-            <a:avLst/>
-          </a:prstGeom>
-          <a:solidFill>
-            <a:srgbClr val="B7C2CC"/>
-          </a:solidFill>
-          <a:ln>
-            <a:noFill/>
-          </a:ln>
-          <a:effectLst/>
-        </p:spPr>
-        <p:style>
-          <a:lnRef idx="1">
-            <a:schemeClr val="accent1"/>
-          </a:lnRef>
-          <a:fillRef idx="3">
-            <a:schemeClr val="accent1"/>
-          </a:fillRef>
-          <a:effectRef idx="2">
-            <a:schemeClr val="accent1"/>
-          </a:effectRef>
-          <a:fontRef idx="minor">
-            <a:schemeClr val="lt1"/>
-          </a:fontRef>
-        </p:style>
-        <p:txBody>
-          <a:bodyPr rtlCol="0" anchor="ctr"/>
-          <a:lstStyle/>
-          <a:p>
-            <a:pPr algn="ctr"/>
-          </a:p>
-        </p:txBody>
-      </p:sp>
-      <p:sp>
-        <p:nvSpPr>
-          <p:cNvPr id="22" name="TextBox 21"/>
-          <p:cNvSpPr txBox="1"/>
-          <p:nvPr/>
-        </p:nvSpPr>
-        <p:spPr>
-          <a:xfrm>
-            <a:off x="6446520" y="4599431"/>
-            <a:ext cx="411480" cy="411480"/>
-          </a:xfrm>
-          <a:prstGeom prst="rect">
-            <a:avLst/>
-          </a:prstGeom>
-          <a:noFill/>
-        </p:spPr>
-        <p:txBody>
-          <a:bodyPr wrap="square" anchor="ctr" lIns="0" rIns="0" tIns="0" bIns="0">
-            <a:spAutoFit/>
-          </a:bodyPr>
-          <a:lstStyle/>
-          <a:p>
-            <a:pPr algn="ctr"/>
-            <a:r>
-              <a:rPr sz="1400" b="1" i="0">
-                <a:solidFill>
-                  <a:srgbClr val="FFFFFF"/>
-                </a:solidFill>
-                <a:latin typeface="Calibri"/>
-              </a:rPr>
-              <a:t>D</a:t>
-            </a:r>
-          </a:p>
-        </p:txBody>
-      </p:sp>
-      <p:sp>
-        <p:nvSpPr>
-          <p:cNvPr id="23" name="TextBox 22"/>
-          <p:cNvSpPr txBox="1"/>
-          <p:nvPr/>
-        </p:nvSpPr>
-        <p:spPr>
-          <a:xfrm>
-            <a:off x="7040880" y="4370831"/>
-            <a:ext cx="4297680" cy="868680"/>
-          </a:xfrm>
-          <a:prstGeom prst="rect">
-            <a:avLst/>
-          </a:prstGeom>
-          <a:noFill/>
-        </p:spPr>
-        <p:txBody>
-          <a:bodyPr wrap="square" anchor="ctr" lIns="0" rIns="0" tIns="0" bIns="0">
-            <a:spAutoFit/>
-          </a:bodyPr>
-          <a:lstStyle/>
-          <a:p>
-            <a:pPr algn="l"/>
-            <a:r>
-              <a:rPr sz="1450" b="0" i="0">
-                <a:solidFill>
-                  <a:srgbClr val="6B7280"/>
-                </a:solidFill>
-                <a:latin typeface="Calibri"/>
-              </a:rPr>
-              <a:t>Radio waves</a:t>
-            </a:r>
-          </a:p>
-        </p:txBody>
-      </p:sp>
-      <p:sp>
-        <p:nvSpPr>
-          <p:cNvPr id="24" name="Rounded Rectangle 23"/>
-          <p:cNvSpPr/>
-          <p:nvPr/>
-        </p:nvSpPr>
-        <p:spPr>
-          <a:xfrm>
-            <a:off x="640080" y="5440680"/>
-            <a:ext cx="10881360" cy="1097280"/>
-          </a:xfrm>
-          <a:prstGeom prst="roundRect">
-            <a:avLst>
-              <a:gd name="adj" fmla="val 5000"/>
-            </a:avLst>
-          </a:prstGeom>
-          <a:solidFill>
-            <a:srgbClr val="FFFFFF"/>
-          </a:solidFill>
-          <a:ln>
-            <a:noFill/>
-          </a:ln>
-          <a:effectLst>
-            <a:outerShdw blurRad="88900" dist="38100" dir="5400000" rotWithShape="0" algn="bl">
-              <a:srgbClr val="000000">
-                <a:alpha val="16000"/>
-              </a:srgbClr>
-            </a:outerShdw>
-          </a:effectLst>
-        </p:spPr>
-        <p:style>
-          <a:lnRef idx="1">
-            <a:schemeClr val="accent1"/>
-          </a:lnRef>
-          <a:fillRef idx="3">
-            <a:schemeClr val="accent1"/>
-          </a:fillRef>
-          <a:effectRef idx="2">
-            <a:schemeClr val="accent1"/>
-          </a:effectRef>
-          <a:fontRef idx="minor">
-            <a:schemeClr val="lt1"/>
-          </a:fontRef>
-        </p:style>
-        <p:txBody>
-          <a:bodyPr rtlCol="0" anchor="ctr"/>
-          <a:lstStyle/>
-          <a:p>
-            <a:pPr algn="ctr"/>
-          </a:p>
-        </p:txBody>
-      </p:sp>
-      <p:sp>
-        <p:nvSpPr>
-          <p:cNvPr id="25" name="TextBox 24"/>
-          <p:cNvSpPr txBox="1"/>
-          <p:nvPr/>
-        </p:nvSpPr>
-        <p:spPr>
-          <a:xfrm>
-            <a:off x="1005840" y="5596128"/>
-            <a:ext cx="4572000" cy="320040"/>
-          </a:xfrm>
-          <a:prstGeom prst="rect">
-            <a:avLst/>
-          </a:prstGeom>
-          <a:noFill/>
-        </p:spPr>
-        <p:txBody>
-          <a:bodyPr wrap="square" anchor="t" lIns="0" rIns="0" tIns="0" bIns="0">
-            <a:spAutoFit/>
-          </a:bodyPr>
-          <a:lstStyle/>
-          <a:p>
-            <a:pPr algn="l"/>
-            <a:r>
-              <a:rPr sz="1300" b="1" i="0">
-                <a:solidFill>
-                  <a:srgbClr val="2A9D8F"/>
-                </a:solidFill>
-                <a:latin typeface="Arial"/>
-              </a:rPr>
-              <a:t>WHY</a:t>
-            </a:r>
-          </a:p>
-        </p:txBody>
-      </p:sp>
-      <p:sp>
-        <p:nvSpPr>
-          <p:cNvPr id="26" name="TextBox 25"/>
-          <p:cNvSpPr txBox="1"/>
-          <p:nvPr/>
-        </p:nvSpPr>
-        <p:spPr>
-          <a:xfrm>
-            <a:off x="1005840" y="5943600"/>
-            <a:ext cx="10149840" cy="548640"/>
-          </a:xfrm>
-          <a:prstGeom prst="rect">
-            <a:avLst/>
-          </a:prstGeom>
-          <a:noFill/>
-        </p:spPr>
-        <p:txBody>
-          <a:bodyPr wrap="square" anchor="t" lIns="0" rIns="0" tIns="0" bIns="0">
-            <a:spAutoFit/>
-          </a:bodyPr>
-          <a:lstStyle/>
-          <a:p>
-            <a:pPr algn="l">
-              <a:lnSpc>
-                <a:spcPct val="105000"/>
-              </a:lnSpc>
-            </a:pPr>
-            <a:r>
-              <a:rPr sz="1450" b="0" i="0">
-                <a:solidFill>
-                  <a:srgbClr val="1D2433"/>
-                </a:solidFill>
-                <a:latin typeface="Calibri"/>
-              </a:rPr>
-              <a:t>Bats emit ultrasonic squeaks (above 20,000 Hz) and listen for the echoes to locate insects and obstacles — echolocation using ultrasound.</a:t>
+              <a:rPr sz="1800" b="0" i="0">
+                <a:solidFill>
+                  <a:srgbClr val="CADCFC"/>
+                </a:solidFill>
+                <a:latin typeface="Calibri"/>
+              </a:rPr>
+              <a:t>5 questions  •  think before the answer reveals on the next slide</a:t>
             </a:r>
           </a:p>
         </p:txBody>
@@ -19687,7 +19783,7 @@
                 </a:solidFill>
                 <a:latin typeface="Calibri"/>
               </a:rPr>
-              <a:t>Q2 — Why Not X-rays?</a:t>
+              <a:t>Q1 — Bat Navigation</a:t>
             </a:r>
           </a:p>
         </p:txBody>
@@ -19774,7 +19870,7 @@
                 </a:solidFill>
                 <a:latin typeface="Calibri"/>
               </a:rPr>
-              <a:t>Ultrasound is preferred over X-rays for scanning an unborn baby because ultrasound:</a:t>
+              <a:t>A bat finds insects in the dark by emitting and listening for:</a:t>
             </a:r>
           </a:p>
         </p:txBody>
@@ -19934,7 +20030,7 @@
                 </a:solidFill>
                 <a:latin typeface="Calibri"/>
               </a:rPr>
-              <a:t>Is cheaper only</a:t>
+              <a:t>Infrasound</a:t>
             </a:r>
           </a:p>
         </p:txBody>
@@ -20094,7 +20190,7 @@
                 </a:solidFill>
                 <a:latin typeface="Calibri"/>
               </a:rPr>
-              <a:t>Does not harm living tissue at the levels used</a:t>
+              <a:t>Ultrasound</a:t>
             </a:r>
           </a:p>
         </p:txBody>
@@ -20254,7 +20350,7 @@
                 </a:solidFill>
                 <a:latin typeface="Calibri"/>
               </a:rPr>
-              <a:t>Travels faster</a:t>
+              <a:t>Visible light</a:t>
             </a:r>
           </a:p>
         </p:txBody>
@@ -20414,7 +20510,7 @@
                 </a:solidFill>
                 <a:latin typeface="Calibri"/>
               </a:rPr>
-              <a:t>Is visible</a:t>
+              <a:t>Radio waves</a:t>
             </a:r>
           </a:p>
         </p:txBody>
@@ -20598,7 +20694,7 @@
                 </a:solidFill>
                 <a:latin typeface="Calibri"/>
               </a:rPr>
-              <a:t>Q2 — Why Not X-rays?</a:t>
+              <a:t>Q1 — Bat Navigation</a:t>
             </a:r>
           </a:p>
         </p:txBody>
@@ -20685,7 +20781,7 @@
                 </a:solidFill>
                 <a:latin typeface="Calibri"/>
               </a:rPr>
-              <a:t>Ultrasound is preferred over X-rays for scanning an unborn baby because ultrasound:</a:t>
+              <a:t>A bat finds insects in the dark by emitting and listening for:</a:t>
             </a:r>
           </a:p>
         </p:txBody>
@@ -20845,7 +20941,7 @@
                 </a:solidFill>
                 <a:latin typeface="Calibri"/>
               </a:rPr>
-              <a:t>Is cheaper only</a:t>
+              <a:t>Infrasound</a:t>
             </a:r>
           </a:p>
         </p:txBody>
@@ -21007,7 +21103,7 @@
                 </a:solidFill>
                 <a:latin typeface="Calibri"/>
               </a:rPr>
-              <a:t>Does not harm living tissue at the levels used</a:t>
+              <a:t>Ultrasound</a:t>
             </a:r>
           </a:p>
         </p:txBody>
@@ -21167,7 +21263,7 @@
                 </a:solidFill>
                 <a:latin typeface="Calibri"/>
               </a:rPr>
-              <a:t>Travels faster</a:t>
+              <a:t>Visible light</a:t>
             </a:r>
           </a:p>
         </p:txBody>
@@ -21327,7 +21423,7 @@
                 </a:solidFill>
                 <a:latin typeface="Calibri"/>
               </a:rPr>
-              <a:t>Is visible</a:t>
+              <a:t>Radio waves</a:t>
             </a:r>
           </a:p>
         </p:txBody>
@@ -21453,7 +21549,7 @@
                 </a:solidFill>
                 <a:latin typeface="Calibri"/>
               </a:rPr>
-              <a:t>Ultrasound is non-ionising, so at scanning levels it is safe for the baby and mother — unlike X-rays, which can damage living cells.</a:t>
+              <a:t>Bats emit ultrasonic squeaks (above 20,000 Hz) and listen for the echoes to locate insects and obstacles — echolocation using ultrasound.</a:t>
             </a:r>
           </a:p>
         </p:txBody>
@@ -21637,7 +21733,7 @@
                 </a:solidFill>
                 <a:latin typeface="Calibri"/>
               </a:rPr>
-              <a:t>Q3 — Music Arrives Together</a:t>
+              <a:t>Q2 — Why Not X-rays?</a:t>
             </a:r>
           </a:p>
         </p:txBody>
@@ -21724,7 +21820,7 @@
                 </a:solidFill>
                 <a:latin typeface="Calibri"/>
               </a:rPr>
-              <a:t>We know that all frequencies of sound travel at the same speed in air because, otherwise, a distant band's music would:</a:t>
+              <a:t>Ultrasound is preferred over X-rays for scanning an unborn baby because ultrasound:</a:t>
             </a:r>
           </a:p>
         </p:txBody>
@@ -21884,7 +21980,7 @@
                 </a:solidFill>
                 <a:latin typeface="Calibri"/>
               </a:rPr>
-              <a:t>Be louder</a:t>
+              <a:t>Is cheaper only</a:t>
             </a:r>
           </a:p>
         </p:txBody>
@@ -22044,7 +22140,7 @@
                 </a:solidFill>
                 <a:latin typeface="Calibri"/>
               </a:rPr>
-              <a:t>Arrive jumbled, with high and low notes out of step</a:t>
+              <a:t>Does not harm living tissue at the levels used</a:t>
             </a:r>
           </a:p>
         </p:txBody>
@@ -22204,7 +22300,7 @@
                 </a:solidFill>
                 <a:latin typeface="Calibri"/>
               </a:rPr>
-              <a:t>Travel faster</a:t>
+              <a:t>Travels faster</a:t>
             </a:r>
           </a:p>
         </p:txBody>
@@ -22364,7 +22460,7 @@
                 </a:solidFill>
                 <a:latin typeface="Calibri"/>
               </a:rPr>
-              <a:t>Not be heard at all</a:t>
+              <a:t>Is visible</a:t>
             </a:r>
           </a:p>
         </p:txBody>
@@ -22758,7 +22854,7 @@
                 </a:solidFill>
                 <a:latin typeface="Calibri"/>
               </a:rPr>
-              <a:t>Q3 — Music Arrives Together</a:t>
+              <a:t>Q2 — Why Not X-rays?</a:t>
             </a:r>
           </a:p>
         </p:txBody>
@@ -22845,7 +22941,7 @@
                 </a:solidFill>
                 <a:latin typeface="Calibri"/>
               </a:rPr>
-              <a:t>We know that all frequencies of sound travel at the same speed in air because, otherwise, a distant band's music would:</a:t>
+              <a:t>Ultrasound is preferred over X-rays for scanning an unborn baby because ultrasound:</a:t>
             </a:r>
           </a:p>
         </p:txBody>
@@ -23005,7 +23101,7 @@
                 </a:solidFill>
                 <a:latin typeface="Calibri"/>
               </a:rPr>
-              <a:t>Be louder</a:t>
+              <a:t>Is cheaper only</a:t>
             </a:r>
           </a:p>
         </p:txBody>
@@ -23167,7 +23263,7 @@
                 </a:solidFill>
                 <a:latin typeface="Calibri"/>
               </a:rPr>
-              <a:t>Arrive jumbled, with high and low notes out of step</a:t>
+              <a:t>Does not harm living tissue at the levels used</a:t>
             </a:r>
           </a:p>
         </p:txBody>
@@ -23327,7 +23423,7 @@
                 </a:solidFill>
                 <a:latin typeface="Calibri"/>
               </a:rPr>
-              <a:t>Travel faster</a:t>
+              <a:t>Travels faster</a:t>
             </a:r>
           </a:p>
         </p:txBody>
@@ -23487,7 +23583,7 @@
                 </a:solidFill>
                 <a:latin typeface="Calibri"/>
               </a:rPr>
-              <a:t>Not be heard at all</a:t>
+              <a:t>Is visible</a:t>
             </a:r>
           </a:p>
         </p:txBody>
@@ -23613,7 +23709,7 @@
                 </a:solidFill>
                 <a:latin typeface="Calibri"/>
               </a:rPr>
-              <a:t>If high and low notes travelled at different speeds, they would reach a distant listener at different times and the tune would be scrambled. Since music stays in tune, all frequencies share one speed.</a:t>
+              <a:t>Ultrasound is non-ionising, so at scanning levels it is safe for the baby and mother — unlike X-rays, which can damage living cells.</a:t>
             </a:r>
           </a:p>
         </p:txBody>
@@ -23797,7 +23893,7 @@
                 </a:solidFill>
                 <a:latin typeface="Calibri"/>
               </a:rPr>
-              <a:t>Q4 — Infrasonic</a:t>
+              <a:t>Q3 — Music Arrives Together</a:t>
             </a:r>
           </a:p>
         </p:txBody>
@@ -23884,7 +23980,7 @@
                 </a:solidFill>
                 <a:latin typeface="Calibri"/>
               </a:rPr>
-              <a:t>A sound of frequency 10 Hz is:</a:t>
+              <a:t>We know that all frequencies of sound travel at the same speed in air because, otherwise, a distant band's music would:</a:t>
             </a:r>
           </a:p>
         </p:txBody>
@@ -24044,7 +24140,7 @@
                 </a:solidFill>
                 <a:latin typeface="Calibri"/>
               </a:rPr>
-              <a:t>Audible</a:t>
+              <a:t>Be louder</a:t>
             </a:r>
           </a:p>
         </p:txBody>
@@ -24204,7 +24300,7 @@
                 </a:solidFill>
                 <a:latin typeface="Calibri"/>
               </a:rPr>
-              <a:t>Infrasonic (below hearing)</a:t>
+              <a:t>Arrive jumbled, with high and low notes out of step</a:t>
             </a:r>
           </a:p>
         </p:txBody>
@@ -24364,7 +24460,7 @@
                 </a:solidFill>
                 <a:latin typeface="Calibri"/>
               </a:rPr>
-              <a:t>Ultrasonic (above hearing)</a:t>
+              <a:t>Travel faster</a:t>
             </a:r>
           </a:p>
         </p:txBody>
@@ -24524,7 +24620,7 @@
                 </a:solidFill>
                 <a:latin typeface="Calibri"/>
               </a:rPr>
-              <a:t>The loudest possible</a:t>
+              <a:t>Not be heard at all</a:t>
             </a:r>
           </a:p>
         </p:txBody>
@@ -24708,7 +24804,7 @@
                 </a:solidFill>
                 <a:latin typeface="Calibri"/>
               </a:rPr>
-              <a:t>Q4 — Infrasonic</a:t>
+              <a:t>Q3 — Music Arrives Together</a:t>
             </a:r>
           </a:p>
         </p:txBody>
@@ -24795,7 +24891,7 @@
                 </a:solidFill>
                 <a:latin typeface="Calibri"/>
               </a:rPr>
-              <a:t>A sound of frequency 10 Hz is:</a:t>
+              <a:t>We know that all frequencies of sound travel at the same speed in air because, otherwise, a distant band's music would:</a:t>
             </a:r>
           </a:p>
         </p:txBody>
@@ -24955,7 +25051,7 @@
                 </a:solidFill>
                 <a:latin typeface="Calibri"/>
               </a:rPr>
-              <a:t>Audible</a:t>
+              <a:t>Be louder</a:t>
             </a:r>
           </a:p>
         </p:txBody>
@@ -25117,7 +25213,7 @@
                 </a:solidFill>
                 <a:latin typeface="Calibri"/>
               </a:rPr>
-              <a:t>Infrasonic (below hearing)</a:t>
+              <a:t>Arrive jumbled, with high and low notes out of step</a:t>
             </a:r>
           </a:p>
         </p:txBody>
@@ -25277,7 +25373,7 @@
                 </a:solidFill>
                 <a:latin typeface="Calibri"/>
               </a:rPr>
-              <a:t>Ultrasonic (above hearing)</a:t>
+              <a:t>Travel faster</a:t>
             </a:r>
           </a:p>
         </p:txBody>
@@ -25437,7 +25533,7 @@
                 </a:solidFill>
                 <a:latin typeface="Calibri"/>
               </a:rPr>
-              <a:t>The loudest possible</a:t>
+              <a:t>Not be heard at all</a:t>
             </a:r>
           </a:p>
         </p:txBody>
@@ -25563,7 +25659,7 @@
                 </a:solidFill>
                 <a:latin typeface="Calibri"/>
               </a:rPr>
-              <a:t>10 Hz is below the 20 Hz lower limit of human hearing, so it is infrasonic — the kind of low rumble produced by earthquakes.</a:t>
+              <a:t>If high and low notes travelled at different speeds, they would reach a distant listener at different times and the tune would be scrambled. Since music stays in tune, all frequencies share one speed.</a:t>
             </a:r>
           </a:p>
         </p:txBody>
@@ -25747,7 +25843,7 @@
                 </a:solidFill>
                 <a:latin typeface="Calibri"/>
               </a:rPr>
-              <a:t>Q5 — SONAR Depth</a:t>
+              <a:t>Q4 — Infrasonic</a:t>
             </a:r>
           </a:p>
         </p:txBody>
@@ -25834,7 +25930,7 @@
                 </a:solidFill>
                 <a:latin typeface="Calibri"/>
               </a:rPr>
-              <a:t>A ship's SONAR pulse returns from the seabed in 0.5 s. If sound travels at 1500 m/s in water, the depth is:</a:t>
+              <a:t>A sound of frequency 10 Hz is:</a:t>
             </a:r>
           </a:p>
         </p:txBody>
@@ -25994,7 +26090,7 @@
                 </a:solidFill>
                 <a:latin typeface="Calibri"/>
               </a:rPr>
-              <a:t>750 m</a:t>
+              <a:t>Audible</a:t>
             </a:r>
           </a:p>
         </p:txBody>
@@ -26154,7 +26250,7 @@
                 </a:solidFill>
                 <a:latin typeface="Calibri"/>
               </a:rPr>
-              <a:t>375 m</a:t>
+              <a:t>Infrasonic (below hearing)</a:t>
             </a:r>
           </a:p>
         </p:txBody>
@@ -26314,7 +26410,7 @@
                 </a:solidFill>
                 <a:latin typeface="Calibri"/>
               </a:rPr>
-              <a:t>3000 m</a:t>
+              <a:t>Ultrasonic (above hearing)</a:t>
             </a:r>
           </a:p>
         </p:txBody>
@@ -26474,7 +26570,7 @@
                 </a:solidFill>
                 <a:latin typeface="Calibri"/>
               </a:rPr>
-              <a:t>1500 m</a:t>
+              <a:t>The loudest possible</a:t>
             </a:r>
           </a:p>
         </p:txBody>
@@ -26658,7 +26754,7 @@
                 </a:solidFill>
                 <a:latin typeface="Calibri"/>
               </a:rPr>
-              <a:t>Q5 — SONAR Depth</a:t>
+              <a:t>Q4 — Infrasonic</a:t>
             </a:r>
           </a:p>
         </p:txBody>
@@ -26745,7 +26841,7 @@
                 </a:solidFill>
                 <a:latin typeface="Calibri"/>
               </a:rPr>
-              <a:t>A ship's SONAR pulse returns from the seabed in 0.5 s. If sound travels at 1500 m/s in water, the depth is:</a:t>
+              <a:t>A sound of frequency 10 Hz is:</a:t>
             </a:r>
           </a:p>
         </p:txBody>
@@ -26905,7 +27001,7 @@
                 </a:solidFill>
                 <a:latin typeface="Calibri"/>
               </a:rPr>
-              <a:t>750 m</a:t>
+              <a:t>Audible</a:t>
             </a:r>
           </a:p>
         </p:txBody>
@@ -27067,7 +27163,7 @@
                 </a:solidFill>
                 <a:latin typeface="Calibri"/>
               </a:rPr>
-              <a:t>375 m</a:t>
+              <a:t>Infrasonic (below hearing)</a:t>
             </a:r>
           </a:p>
         </p:txBody>
@@ -27227,7 +27323,7 @@
                 </a:solidFill>
                 <a:latin typeface="Calibri"/>
               </a:rPr>
-              <a:t>3000 m</a:t>
+              <a:t>Ultrasonic (above hearing)</a:t>
             </a:r>
           </a:p>
         </p:txBody>
@@ -27387,7 +27483,7 @@
                 </a:solidFill>
                 <a:latin typeface="Calibri"/>
               </a:rPr>
-              <a:t>1500 m</a:t>
+              <a:t>The loudest possible</a:t>
             </a:r>
           </a:p>
         </p:txBody>
@@ -27513,7 +27609,7 @@
                 </a:solidFill>
                 <a:latin typeface="Calibri"/>
               </a:rPr>
-              <a:t>Total path = 1500 × 0.5 = 750 m for the round trip, so the depth is 750 / 2 = 375 m. Always halve the echo distance.</a:t>
+              <a:t>10 Hz is below the 20 Hz lower limit of human hearing, so it is infrasonic — the kind of low rumble produced by earthquakes.</a:t>
             </a:r>
           </a:p>
         </p:txBody>
@@ -27527,6 +27623,1956 @@
 </file>
 
 <file path=ppt/slides/slide35.xml><?xml version="1.0" encoding="utf-8"?>
+<p:sld xmlns:a="http://schemas.openxmlformats.org/drawingml/2006/main" xmlns:p="http://schemas.openxmlformats.org/presentationml/2006/main" xmlns:r="http://schemas.openxmlformats.org/officeDocument/2006/relationships">
+  <p:cSld>
+    <p:bg>
+      <p:bgPr>
+        <a:solidFill>
+          <a:srgbClr val="F4F6F8"/>
+        </a:solidFill>
+        <a:effectLst/>
+      </p:bgPr>
+    </p:bg>
+    <p:spTree>
+      <p:nvGrpSpPr>
+        <p:cNvPr id="1" name=""/>
+        <p:cNvGrpSpPr/>
+        <p:nvPr/>
+      </p:nvGrpSpPr>
+      <p:grpSpPr/>
+      <p:sp>
+        <p:nvSpPr>
+          <p:cNvPr id="2" name="Oval 1"/>
+          <p:cNvSpPr/>
+          <p:nvPr/>
+        </p:nvSpPr>
+        <p:spPr>
+          <a:xfrm>
+            <a:off x="10927080" y="365760"/>
+            <a:ext cx="868680" cy="868680"/>
+          </a:xfrm>
+          <a:prstGeom prst="ellipse">
+            <a:avLst/>
+          </a:prstGeom>
+          <a:noFill/>
+          <a:ln w="15875">
+            <a:solidFill>
+              <a:srgbClr val="DDE2E8"/>
+            </a:solidFill>
+          </a:ln>
+          <a:effectLst/>
+        </p:spPr>
+        <p:style>
+          <a:lnRef idx="1">
+            <a:schemeClr val="accent1"/>
+          </a:lnRef>
+          <a:fillRef idx="3">
+            <a:schemeClr val="accent1"/>
+          </a:fillRef>
+          <a:effectRef idx="2">
+            <a:schemeClr val="accent1"/>
+          </a:effectRef>
+          <a:fontRef idx="minor">
+            <a:schemeClr val="lt1"/>
+          </a:fontRef>
+        </p:style>
+        <p:txBody>
+          <a:bodyPr rtlCol="0" anchor="ctr"/>
+          <a:lstStyle/>
+          <a:p>
+            <a:pPr algn="ctr"/>
+          </a:p>
+        </p:txBody>
+      </p:sp>
+      <p:sp>
+        <p:nvSpPr>
+          <p:cNvPr id="3" name="Rectangle 2"/>
+          <p:cNvSpPr/>
+          <p:nvPr/>
+        </p:nvSpPr>
+        <p:spPr>
+          <a:xfrm>
+            <a:off x="548640" y="502920"/>
+            <a:ext cx="256032" cy="256032"/>
+          </a:xfrm>
+          <a:prstGeom prst="rect">
+            <a:avLst/>
+          </a:prstGeom>
+          <a:solidFill>
+            <a:srgbClr val="6A4C93"/>
+          </a:solidFill>
+          <a:ln>
+            <a:noFill/>
+          </a:ln>
+          <a:effectLst/>
+        </p:spPr>
+        <p:style>
+          <a:lnRef idx="1">
+            <a:schemeClr val="accent1"/>
+          </a:lnRef>
+          <a:fillRef idx="3">
+            <a:schemeClr val="accent1"/>
+          </a:fillRef>
+          <a:effectRef idx="2">
+            <a:schemeClr val="accent1"/>
+          </a:effectRef>
+          <a:fontRef idx="minor">
+            <a:schemeClr val="lt1"/>
+          </a:fontRef>
+        </p:style>
+        <p:txBody>
+          <a:bodyPr rtlCol="0" anchor="ctr"/>
+          <a:lstStyle/>
+          <a:p>
+            <a:pPr algn="ctr"/>
+          </a:p>
+        </p:txBody>
+      </p:sp>
+      <p:sp>
+        <p:nvSpPr>
+          <p:cNvPr id="4" name="TextBox 3"/>
+          <p:cNvSpPr txBox="1"/>
+          <p:nvPr/>
+        </p:nvSpPr>
+        <p:spPr>
+          <a:xfrm>
+            <a:off x="914400" y="457200"/>
+            <a:ext cx="9509760" cy="320040"/>
+          </a:xfrm>
+          <a:prstGeom prst="rect">
+            <a:avLst/>
+          </a:prstGeom>
+          <a:noFill/>
+        </p:spPr>
+        <p:txBody>
+          <a:bodyPr wrap="square" anchor="t" lIns="0" rIns="0" tIns="0" bIns="0">
+            <a:spAutoFit/>
+          </a:bodyPr>
+          <a:lstStyle/>
+          <a:p>
+            <a:pPr algn="l"/>
+            <a:r>
+              <a:rPr sz="1300" b="1" i="0">
+                <a:solidFill>
+                  <a:srgbClr val="6A4C93"/>
+                </a:solidFill>
+                <a:latin typeface="Arial"/>
+              </a:rPr>
+              <a:t>QUIZ QUESTION</a:t>
+            </a:r>
+          </a:p>
+        </p:txBody>
+      </p:sp>
+      <p:sp>
+        <p:nvSpPr>
+          <p:cNvPr id="5" name="TextBox 4"/>
+          <p:cNvSpPr txBox="1"/>
+          <p:nvPr/>
+        </p:nvSpPr>
+        <p:spPr>
+          <a:xfrm>
+            <a:off x="548640" y="777240"/>
+            <a:ext cx="9966960" cy="822960"/>
+          </a:xfrm>
+          <a:prstGeom prst="rect">
+            <a:avLst/>
+          </a:prstGeom>
+          <a:noFill/>
+        </p:spPr>
+        <p:txBody>
+          <a:bodyPr wrap="square" anchor="t" lIns="0" rIns="0" tIns="0" bIns="0">
+            <a:spAutoFit/>
+          </a:bodyPr>
+          <a:lstStyle/>
+          <a:p>
+            <a:pPr algn="l"/>
+            <a:r>
+              <a:rPr sz="3000" b="1" i="0">
+                <a:solidFill>
+                  <a:srgbClr val="1D2433"/>
+                </a:solidFill>
+                <a:latin typeface="Calibri"/>
+              </a:rPr>
+              <a:t>Q5 — SONAR Depth</a:t>
+            </a:r>
+          </a:p>
+        </p:txBody>
+      </p:sp>
+      <p:sp>
+        <p:nvSpPr>
+          <p:cNvPr id="6" name="Rounded Rectangle 5"/>
+          <p:cNvSpPr/>
+          <p:nvPr/>
+        </p:nvSpPr>
+        <p:spPr>
+          <a:xfrm>
+            <a:off x="640080" y="1783080"/>
+            <a:ext cx="10881360" cy="1325880"/>
+          </a:xfrm>
+          <a:prstGeom prst="roundRect">
+            <a:avLst>
+              <a:gd name="adj" fmla="val 4000"/>
+            </a:avLst>
+          </a:prstGeom>
+          <a:solidFill>
+            <a:srgbClr val="FFFFFF"/>
+          </a:solidFill>
+          <a:ln>
+            <a:noFill/>
+          </a:ln>
+          <a:effectLst>
+            <a:outerShdw blurRad="88900" dist="38100" dir="5400000" rotWithShape="0" algn="bl">
+              <a:srgbClr val="000000">
+                <a:alpha val="16000"/>
+              </a:srgbClr>
+            </a:outerShdw>
+          </a:effectLst>
+        </p:spPr>
+        <p:style>
+          <a:lnRef idx="1">
+            <a:schemeClr val="accent1"/>
+          </a:lnRef>
+          <a:fillRef idx="3">
+            <a:schemeClr val="accent1"/>
+          </a:fillRef>
+          <a:effectRef idx="2">
+            <a:schemeClr val="accent1"/>
+          </a:effectRef>
+          <a:fontRef idx="minor">
+            <a:schemeClr val="lt1"/>
+          </a:fontRef>
+        </p:style>
+        <p:txBody>
+          <a:bodyPr rtlCol="0" anchor="ctr"/>
+          <a:lstStyle/>
+          <a:p>
+            <a:pPr algn="ctr"/>
+          </a:p>
+        </p:txBody>
+      </p:sp>
+      <p:sp>
+        <p:nvSpPr>
+          <p:cNvPr id="7" name="TextBox 6"/>
+          <p:cNvSpPr txBox="1"/>
+          <p:nvPr/>
+        </p:nvSpPr>
+        <p:spPr>
+          <a:xfrm>
+            <a:off x="1005840" y="1783080"/>
+            <a:ext cx="10149840" cy="1325880"/>
+          </a:xfrm>
+          <a:prstGeom prst="rect">
+            <a:avLst/>
+          </a:prstGeom>
+          <a:noFill/>
+        </p:spPr>
+        <p:txBody>
+          <a:bodyPr wrap="square" anchor="ctr" lIns="0" rIns="0" tIns="0" bIns="0">
+            <a:spAutoFit/>
+          </a:bodyPr>
+          <a:lstStyle/>
+          <a:p>
+            <a:pPr algn="l"/>
+            <a:r>
+              <a:rPr sz="1800" b="1" i="0">
+                <a:solidFill>
+                  <a:srgbClr val="1D2433"/>
+                </a:solidFill>
+                <a:latin typeface="Calibri"/>
+              </a:rPr>
+              <a:t>A ship's SONAR pulse returns from the seabed in 0.5 s. If sound travels at 1500 m/s in water, the depth is:</a:t>
+            </a:r>
+          </a:p>
+        </p:txBody>
+      </p:sp>
+      <p:sp>
+        <p:nvSpPr>
+          <p:cNvPr id="8" name="Rounded Rectangle 7"/>
+          <p:cNvSpPr/>
+          <p:nvPr/>
+        </p:nvSpPr>
+        <p:spPr>
+          <a:xfrm>
+            <a:off x="640080" y="3337560"/>
+            <a:ext cx="5349240" cy="868680"/>
+          </a:xfrm>
+          <a:prstGeom prst="roundRect">
+            <a:avLst>
+              <a:gd name="adj" fmla="val 12000"/>
+            </a:avLst>
+          </a:prstGeom>
+          <a:solidFill>
+            <a:srgbClr val="EAF1F4"/>
+          </a:solidFill>
+          <a:ln>
+            <a:noFill/>
+          </a:ln>
+          <a:effectLst/>
+        </p:spPr>
+        <p:style>
+          <a:lnRef idx="1">
+            <a:schemeClr val="accent1"/>
+          </a:lnRef>
+          <a:fillRef idx="3">
+            <a:schemeClr val="accent1"/>
+          </a:fillRef>
+          <a:effectRef idx="2">
+            <a:schemeClr val="accent1"/>
+          </a:effectRef>
+          <a:fontRef idx="minor">
+            <a:schemeClr val="lt1"/>
+          </a:fontRef>
+        </p:style>
+        <p:txBody>
+          <a:bodyPr rtlCol="0" anchor="ctr"/>
+          <a:lstStyle/>
+          <a:p>
+            <a:pPr algn="ctr"/>
+          </a:p>
+        </p:txBody>
+      </p:sp>
+      <p:sp>
+        <p:nvSpPr>
+          <p:cNvPr id="9" name="Oval 8"/>
+          <p:cNvSpPr/>
+          <p:nvPr/>
+        </p:nvSpPr>
+        <p:spPr>
+          <a:xfrm>
+            <a:off x="914400" y="3566160"/>
+            <a:ext cx="411480" cy="411480"/>
+          </a:xfrm>
+          <a:prstGeom prst="ellipse">
+            <a:avLst/>
+          </a:prstGeom>
+          <a:solidFill>
+            <a:srgbClr val="6A4C93"/>
+          </a:solidFill>
+          <a:ln>
+            <a:noFill/>
+          </a:ln>
+          <a:effectLst/>
+        </p:spPr>
+        <p:style>
+          <a:lnRef idx="1">
+            <a:schemeClr val="accent1"/>
+          </a:lnRef>
+          <a:fillRef idx="3">
+            <a:schemeClr val="accent1"/>
+          </a:fillRef>
+          <a:effectRef idx="2">
+            <a:schemeClr val="accent1"/>
+          </a:effectRef>
+          <a:fontRef idx="minor">
+            <a:schemeClr val="lt1"/>
+          </a:fontRef>
+        </p:style>
+        <p:txBody>
+          <a:bodyPr rtlCol="0" anchor="ctr"/>
+          <a:lstStyle/>
+          <a:p>
+            <a:pPr algn="ctr"/>
+          </a:p>
+        </p:txBody>
+      </p:sp>
+      <p:sp>
+        <p:nvSpPr>
+          <p:cNvPr id="10" name="TextBox 9"/>
+          <p:cNvSpPr txBox="1"/>
+          <p:nvPr/>
+        </p:nvSpPr>
+        <p:spPr>
+          <a:xfrm>
+            <a:off x="914400" y="3566160"/>
+            <a:ext cx="411480" cy="411480"/>
+          </a:xfrm>
+          <a:prstGeom prst="rect">
+            <a:avLst/>
+          </a:prstGeom>
+          <a:noFill/>
+        </p:spPr>
+        <p:txBody>
+          <a:bodyPr wrap="square" anchor="ctr" lIns="0" rIns="0" tIns="0" bIns="0">
+            <a:spAutoFit/>
+          </a:bodyPr>
+          <a:lstStyle/>
+          <a:p>
+            <a:pPr algn="ctr"/>
+            <a:r>
+              <a:rPr sz="1400" b="1" i="0">
+                <a:solidFill>
+                  <a:srgbClr val="FFFFFF"/>
+                </a:solidFill>
+                <a:latin typeface="Calibri"/>
+              </a:rPr>
+              <a:t>A</a:t>
+            </a:r>
+          </a:p>
+        </p:txBody>
+      </p:sp>
+      <p:sp>
+        <p:nvSpPr>
+          <p:cNvPr id="11" name="TextBox 10"/>
+          <p:cNvSpPr txBox="1"/>
+          <p:nvPr/>
+        </p:nvSpPr>
+        <p:spPr>
+          <a:xfrm>
+            <a:off x="1508760" y="3337560"/>
+            <a:ext cx="4297680" cy="868680"/>
+          </a:xfrm>
+          <a:prstGeom prst="rect">
+            <a:avLst/>
+          </a:prstGeom>
+          <a:noFill/>
+        </p:spPr>
+        <p:txBody>
+          <a:bodyPr wrap="square" anchor="ctr" lIns="0" rIns="0" tIns="0" bIns="0">
+            <a:spAutoFit/>
+          </a:bodyPr>
+          <a:lstStyle/>
+          <a:p>
+            <a:pPr algn="l"/>
+            <a:r>
+              <a:rPr sz="1450" b="0" i="0">
+                <a:solidFill>
+                  <a:srgbClr val="1D2433"/>
+                </a:solidFill>
+                <a:latin typeface="Calibri"/>
+              </a:rPr>
+              <a:t>750 m</a:t>
+            </a:r>
+          </a:p>
+        </p:txBody>
+      </p:sp>
+      <p:sp>
+        <p:nvSpPr>
+          <p:cNvPr id="12" name="Rounded Rectangle 11"/>
+          <p:cNvSpPr/>
+          <p:nvPr/>
+        </p:nvSpPr>
+        <p:spPr>
+          <a:xfrm>
+            <a:off x="6172200" y="3337560"/>
+            <a:ext cx="5349240" cy="868680"/>
+          </a:xfrm>
+          <a:prstGeom prst="roundRect">
+            <a:avLst>
+              <a:gd name="adj" fmla="val 12000"/>
+            </a:avLst>
+          </a:prstGeom>
+          <a:solidFill>
+            <a:srgbClr val="EAF1F4"/>
+          </a:solidFill>
+          <a:ln>
+            <a:noFill/>
+          </a:ln>
+          <a:effectLst/>
+        </p:spPr>
+        <p:style>
+          <a:lnRef idx="1">
+            <a:schemeClr val="accent1"/>
+          </a:lnRef>
+          <a:fillRef idx="3">
+            <a:schemeClr val="accent1"/>
+          </a:fillRef>
+          <a:effectRef idx="2">
+            <a:schemeClr val="accent1"/>
+          </a:effectRef>
+          <a:fontRef idx="minor">
+            <a:schemeClr val="lt1"/>
+          </a:fontRef>
+        </p:style>
+        <p:txBody>
+          <a:bodyPr rtlCol="0" anchor="ctr"/>
+          <a:lstStyle/>
+          <a:p>
+            <a:pPr algn="ctr"/>
+          </a:p>
+        </p:txBody>
+      </p:sp>
+      <p:sp>
+        <p:nvSpPr>
+          <p:cNvPr id="13" name="Oval 12"/>
+          <p:cNvSpPr/>
+          <p:nvPr/>
+        </p:nvSpPr>
+        <p:spPr>
+          <a:xfrm>
+            <a:off x="6446520" y="3566160"/>
+            <a:ext cx="411480" cy="411480"/>
+          </a:xfrm>
+          <a:prstGeom prst="ellipse">
+            <a:avLst/>
+          </a:prstGeom>
+          <a:solidFill>
+            <a:srgbClr val="6A4C93"/>
+          </a:solidFill>
+          <a:ln>
+            <a:noFill/>
+          </a:ln>
+          <a:effectLst/>
+        </p:spPr>
+        <p:style>
+          <a:lnRef idx="1">
+            <a:schemeClr val="accent1"/>
+          </a:lnRef>
+          <a:fillRef idx="3">
+            <a:schemeClr val="accent1"/>
+          </a:fillRef>
+          <a:effectRef idx="2">
+            <a:schemeClr val="accent1"/>
+          </a:effectRef>
+          <a:fontRef idx="minor">
+            <a:schemeClr val="lt1"/>
+          </a:fontRef>
+        </p:style>
+        <p:txBody>
+          <a:bodyPr rtlCol="0" anchor="ctr"/>
+          <a:lstStyle/>
+          <a:p>
+            <a:pPr algn="ctr"/>
+          </a:p>
+        </p:txBody>
+      </p:sp>
+      <p:sp>
+        <p:nvSpPr>
+          <p:cNvPr id="14" name="TextBox 13"/>
+          <p:cNvSpPr txBox="1"/>
+          <p:nvPr/>
+        </p:nvSpPr>
+        <p:spPr>
+          <a:xfrm>
+            <a:off x="6446520" y="3566160"/>
+            <a:ext cx="411480" cy="411480"/>
+          </a:xfrm>
+          <a:prstGeom prst="rect">
+            <a:avLst/>
+          </a:prstGeom>
+          <a:noFill/>
+        </p:spPr>
+        <p:txBody>
+          <a:bodyPr wrap="square" anchor="ctr" lIns="0" rIns="0" tIns="0" bIns="0">
+            <a:spAutoFit/>
+          </a:bodyPr>
+          <a:lstStyle/>
+          <a:p>
+            <a:pPr algn="ctr"/>
+            <a:r>
+              <a:rPr sz="1400" b="1" i="0">
+                <a:solidFill>
+                  <a:srgbClr val="FFFFFF"/>
+                </a:solidFill>
+                <a:latin typeface="Calibri"/>
+              </a:rPr>
+              <a:t>B</a:t>
+            </a:r>
+          </a:p>
+        </p:txBody>
+      </p:sp>
+      <p:sp>
+        <p:nvSpPr>
+          <p:cNvPr id="15" name="TextBox 14"/>
+          <p:cNvSpPr txBox="1"/>
+          <p:nvPr/>
+        </p:nvSpPr>
+        <p:spPr>
+          <a:xfrm>
+            <a:off x="7040880" y="3337560"/>
+            <a:ext cx="4297680" cy="868680"/>
+          </a:xfrm>
+          <a:prstGeom prst="rect">
+            <a:avLst/>
+          </a:prstGeom>
+          <a:noFill/>
+        </p:spPr>
+        <p:txBody>
+          <a:bodyPr wrap="square" anchor="ctr" lIns="0" rIns="0" tIns="0" bIns="0">
+            <a:spAutoFit/>
+          </a:bodyPr>
+          <a:lstStyle/>
+          <a:p>
+            <a:pPr algn="l"/>
+            <a:r>
+              <a:rPr sz="1450" b="0" i="0">
+                <a:solidFill>
+                  <a:srgbClr val="1D2433"/>
+                </a:solidFill>
+                <a:latin typeface="Calibri"/>
+              </a:rPr>
+              <a:t>375 m</a:t>
+            </a:r>
+          </a:p>
+        </p:txBody>
+      </p:sp>
+      <p:sp>
+        <p:nvSpPr>
+          <p:cNvPr id="16" name="Rounded Rectangle 15"/>
+          <p:cNvSpPr/>
+          <p:nvPr/>
+        </p:nvSpPr>
+        <p:spPr>
+          <a:xfrm>
+            <a:off x="640080" y="4370831"/>
+            <a:ext cx="5349240" cy="868680"/>
+          </a:xfrm>
+          <a:prstGeom prst="roundRect">
+            <a:avLst>
+              <a:gd name="adj" fmla="val 12000"/>
+            </a:avLst>
+          </a:prstGeom>
+          <a:solidFill>
+            <a:srgbClr val="EAF1F4"/>
+          </a:solidFill>
+          <a:ln>
+            <a:noFill/>
+          </a:ln>
+          <a:effectLst/>
+        </p:spPr>
+        <p:style>
+          <a:lnRef idx="1">
+            <a:schemeClr val="accent1"/>
+          </a:lnRef>
+          <a:fillRef idx="3">
+            <a:schemeClr val="accent1"/>
+          </a:fillRef>
+          <a:effectRef idx="2">
+            <a:schemeClr val="accent1"/>
+          </a:effectRef>
+          <a:fontRef idx="minor">
+            <a:schemeClr val="lt1"/>
+          </a:fontRef>
+        </p:style>
+        <p:txBody>
+          <a:bodyPr rtlCol="0" anchor="ctr"/>
+          <a:lstStyle/>
+          <a:p>
+            <a:pPr algn="ctr"/>
+          </a:p>
+        </p:txBody>
+      </p:sp>
+      <p:sp>
+        <p:nvSpPr>
+          <p:cNvPr id="17" name="Oval 16"/>
+          <p:cNvSpPr/>
+          <p:nvPr/>
+        </p:nvSpPr>
+        <p:spPr>
+          <a:xfrm>
+            <a:off x="914400" y="4599431"/>
+            <a:ext cx="411480" cy="411480"/>
+          </a:xfrm>
+          <a:prstGeom prst="ellipse">
+            <a:avLst/>
+          </a:prstGeom>
+          <a:solidFill>
+            <a:srgbClr val="6A4C93"/>
+          </a:solidFill>
+          <a:ln>
+            <a:noFill/>
+          </a:ln>
+          <a:effectLst/>
+        </p:spPr>
+        <p:style>
+          <a:lnRef idx="1">
+            <a:schemeClr val="accent1"/>
+          </a:lnRef>
+          <a:fillRef idx="3">
+            <a:schemeClr val="accent1"/>
+          </a:fillRef>
+          <a:effectRef idx="2">
+            <a:schemeClr val="accent1"/>
+          </a:effectRef>
+          <a:fontRef idx="minor">
+            <a:schemeClr val="lt1"/>
+          </a:fontRef>
+        </p:style>
+        <p:txBody>
+          <a:bodyPr rtlCol="0" anchor="ctr"/>
+          <a:lstStyle/>
+          <a:p>
+            <a:pPr algn="ctr"/>
+          </a:p>
+        </p:txBody>
+      </p:sp>
+      <p:sp>
+        <p:nvSpPr>
+          <p:cNvPr id="18" name="TextBox 17"/>
+          <p:cNvSpPr txBox="1"/>
+          <p:nvPr/>
+        </p:nvSpPr>
+        <p:spPr>
+          <a:xfrm>
+            <a:off x="914400" y="4599431"/>
+            <a:ext cx="411480" cy="411480"/>
+          </a:xfrm>
+          <a:prstGeom prst="rect">
+            <a:avLst/>
+          </a:prstGeom>
+          <a:noFill/>
+        </p:spPr>
+        <p:txBody>
+          <a:bodyPr wrap="square" anchor="ctr" lIns="0" rIns="0" tIns="0" bIns="0">
+            <a:spAutoFit/>
+          </a:bodyPr>
+          <a:lstStyle/>
+          <a:p>
+            <a:pPr algn="ctr"/>
+            <a:r>
+              <a:rPr sz="1400" b="1" i="0">
+                <a:solidFill>
+                  <a:srgbClr val="FFFFFF"/>
+                </a:solidFill>
+                <a:latin typeface="Calibri"/>
+              </a:rPr>
+              <a:t>C</a:t>
+            </a:r>
+          </a:p>
+        </p:txBody>
+      </p:sp>
+      <p:sp>
+        <p:nvSpPr>
+          <p:cNvPr id="19" name="TextBox 18"/>
+          <p:cNvSpPr txBox="1"/>
+          <p:nvPr/>
+        </p:nvSpPr>
+        <p:spPr>
+          <a:xfrm>
+            <a:off x="1508760" y="4370831"/>
+            <a:ext cx="4297680" cy="868680"/>
+          </a:xfrm>
+          <a:prstGeom prst="rect">
+            <a:avLst/>
+          </a:prstGeom>
+          <a:noFill/>
+        </p:spPr>
+        <p:txBody>
+          <a:bodyPr wrap="square" anchor="ctr" lIns="0" rIns="0" tIns="0" bIns="0">
+            <a:spAutoFit/>
+          </a:bodyPr>
+          <a:lstStyle/>
+          <a:p>
+            <a:pPr algn="l"/>
+            <a:r>
+              <a:rPr sz="1450" b="0" i="0">
+                <a:solidFill>
+                  <a:srgbClr val="1D2433"/>
+                </a:solidFill>
+                <a:latin typeface="Calibri"/>
+              </a:rPr>
+              <a:t>3000 m</a:t>
+            </a:r>
+          </a:p>
+        </p:txBody>
+      </p:sp>
+      <p:sp>
+        <p:nvSpPr>
+          <p:cNvPr id="20" name="Rounded Rectangle 19"/>
+          <p:cNvSpPr/>
+          <p:nvPr/>
+        </p:nvSpPr>
+        <p:spPr>
+          <a:xfrm>
+            <a:off x="6172200" y="4370831"/>
+            <a:ext cx="5349240" cy="868680"/>
+          </a:xfrm>
+          <a:prstGeom prst="roundRect">
+            <a:avLst>
+              <a:gd name="adj" fmla="val 12000"/>
+            </a:avLst>
+          </a:prstGeom>
+          <a:solidFill>
+            <a:srgbClr val="EAF1F4"/>
+          </a:solidFill>
+          <a:ln>
+            <a:noFill/>
+          </a:ln>
+          <a:effectLst/>
+        </p:spPr>
+        <p:style>
+          <a:lnRef idx="1">
+            <a:schemeClr val="accent1"/>
+          </a:lnRef>
+          <a:fillRef idx="3">
+            <a:schemeClr val="accent1"/>
+          </a:fillRef>
+          <a:effectRef idx="2">
+            <a:schemeClr val="accent1"/>
+          </a:effectRef>
+          <a:fontRef idx="minor">
+            <a:schemeClr val="lt1"/>
+          </a:fontRef>
+        </p:style>
+        <p:txBody>
+          <a:bodyPr rtlCol="0" anchor="ctr"/>
+          <a:lstStyle/>
+          <a:p>
+            <a:pPr algn="ctr"/>
+          </a:p>
+        </p:txBody>
+      </p:sp>
+      <p:sp>
+        <p:nvSpPr>
+          <p:cNvPr id="21" name="Oval 20"/>
+          <p:cNvSpPr/>
+          <p:nvPr/>
+        </p:nvSpPr>
+        <p:spPr>
+          <a:xfrm>
+            <a:off x="6446520" y="4599431"/>
+            <a:ext cx="411480" cy="411480"/>
+          </a:xfrm>
+          <a:prstGeom prst="ellipse">
+            <a:avLst/>
+          </a:prstGeom>
+          <a:solidFill>
+            <a:srgbClr val="6A4C93"/>
+          </a:solidFill>
+          <a:ln>
+            <a:noFill/>
+          </a:ln>
+          <a:effectLst/>
+        </p:spPr>
+        <p:style>
+          <a:lnRef idx="1">
+            <a:schemeClr val="accent1"/>
+          </a:lnRef>
+          <a:fillRef idx="3">
+            <a:schemeClr val="accent1"/>
+          </a:fillRef>
+          <a:effectRef idx="2">
+            <a:schemeClr val="accent1"/>
+          </a:effectRef>
+          <a:fontRef idx="minor">
+            <a:schemeClr val="lt1"/>
+          </a:fontRef>
+        </p:style>
+        <p:txBody>
+          <a:bodyPr rtlCol="0" anchor="ctr"/>
+          <a:lstStyle/>
+          <a:p>
+            <a:pPr algn="ctr"/>
+          </a:p>
+        </p:txBody>
+      </p:sp>
+      <p:sp>
+        <p:nvSpPr>
+          <p:cNvPr id="22" name="TextBox 21"/>
+          <p:cNvSpPr txBox="1"/>
+          <p:nvPr/>
+        </p:nvSpPr>
+        <p:spPr>
+          <a:xfrm>
+            <a:off x="6446520" y="4599431"/>
+            <a:ext cx="411480" cy="411480"/>
+          </a:xfrm>
+          <a:prstGeom prst="rect">
+            <a:avLst/>
+          </a:prstGeom>
+          <a:noFill/>
+        </p:spPr>
+        <p:txBody>
+          <a:bodyPr wrap="square" anchor="ctr" lIns="0" rIns="0" tIns="0" bIns="0">
+            <a:spAutoFit/>
+          </a:bodyPr>
+          <a:lstStyle/>
+          <a:p>
+            <a:pPr algn="ctr"/>
+            <a:r>
+              <a:rPr sz="1400" b="1" i="0">
+                <a:solidFill>
+                  <a:srgbClr val="FFFFFF"/>
+                </a:solidFill>
+                <a:latin typeface="Calibri"/>
+              </a:rPr>
+              <a:t>D</a:t>
+            </a:r>
+          </a:p>
+        </p:txBody>
+      </p:sp>
+      <p:sp>
+        <p:nvSpPr>
+          <p:cNvPr id="23" name="TextBox 22"/>
+          <p:cNvSpPr txBox="1"/>
+          <p:nvPr/>
+        </p:nvSpPr>
+        <p:spPr>
+          <a:xfrm>
+            <a:off x="7040880" y="4370831"/>
+            <a:ext cx="4297680" cy="868680"/>
+          </a:xfrm>
+          <a:prstGeom prst="rect">
+            <a:avLst/>
+          </a:prstGeom>
+          <a:noFill/>
+        </p:spPr>
+        <p:txBody>
+          <a:bodyPr wrap="square" anchor="ctr" lIns="0" rIns="0" tIns="0" bIns="0">
+            <a:spAutoFit/>
+          </a:bodyPr>
+          <a:lstStyle/>
+          <a:p>
+            <a:pPr algn="l"/>
+            <a:r>
+              <a:rPr sz="1450" b="0" i="0">
+                <a:solidFill>
+                  <a:srgbClr val="1D2433"/>
+                </a:solidFill>
+                <a:latin typeface="Calibri"/>
+              </a:rPr>
+              <a:t>1500 m</a:t>
+            </a:r>
+          </a:p>
+        </p:txBody>
+      </p:sp>
+    </p:spTree>
+  </p:cSld>
+  <p:clrMapOvr>
+    <a:masterClrMapping/>
+  </p:clrMapOvr>
+</p:sld>
+</file>
+
+<file path=ppt/slides/slide36.xml><?xml version="1.0" encoding="utf-8"?>
+<p:sld xmlns:a="http://schemas.openxmlformats.org/drawingml/2006/main" xmlns:p="http://schemas.openxmlformats.org/presentationml/2006/main" xmlns:r="http://schemas.openxmlformats.org/officeDocument/2006/relationships">
+  <p:cSld>
+    <p:bg>
+      <p:bgPr>
+        <a:solidFill>
+          <a:srgbClr val="F4F6F8"/>
+        </a:solidFill>
+        <a:effectLst/>
+      </p:bgPr>
+    </p:bg>
+    <p:spTree>
+      <p:nvGrpSpPr>
+        <p:cNvPr id="1" name=""/>
+        <p:cNvGrpSpPr/>
+        <p:nvPr/>
+      </p:nvGrpSpPr>
+      <p:grpSpPr/>
+      <p:sp>
+        <p:nvSpPr>
+          <p:cNvPr id="2" name="Oval 1"/>
+          <p:cNvSpPr/>
+          <p:nvPr/>
+        </p:nvSpPr>
+        <p:spPr>
+          <a:xfrm>
+            <a:off x="10927080" y="365760"/>
+            <a:ext cx="868680" cy="868680"/>
+          </a:xfrm>
+          <a:prstGeom prst="ellipse">
+            <a:avLst/>
+          </a:prstGeom>
+          <a:noFill/>
+          <a:ln w="15875">
+            <a:solidFill>
+              <a:srgbClr val="DDE2E8"/>
+            </a:solidFill>
+          </a:ln>
+          <a:effectLst/>
+        </p:spPr>
+        <p:style>
+          <a:lnRef idx="1">
+            <a:schemeClr val="accent1"/>
+          </a:lnRef>
+          <a:fillRef idx="3">
+            <a:schemeClr val="accent1"/>
+          </a:fillRef>
+          <a:effectRef idx="2">
+            <a:schemeClr val="accent1"/>
+          </a:effectRef>
+          <a:fontRef idx="minor">
+            <a:schemeClr val="lt1"/>
+          </a:fontRef>
+        </p:style>
+        <p:txBody>
+          <a:bodyPr rtlCol="0" anchor="ctr"/>
+          <a:lstStyle/>
+          <a:p>
+            <a:pPr algn="ctr"/>
+          </a:p>
+        </p:txBody>
+      </p:sp>
+      <p:sp>
+        <p:nvSpPr>
+          <p:cNvPr id="3" name="Rectangle 2"/>
+          <p:cNvSpPr/>
+          <p:nvPr/>
+        </p:nvSpPr>
+        <p:spPr>
+          <a:xfrm>
+            <a:off x="548640" y="502920"/>
+            <a:ext cx="256032" cy="256032"/>
+          </a:xfrm>
+          <a:prstGeom prst="rect">
+            <a:avLst/>
+          </a:prstGeom>
+          <a:solidFill>
+            <a:srgbClr val="2A9D8F"/>
+          </a:solidFill>
+          <a:ln>
+            <a:noFill/>
+          </a:ln>
+          <a:effectLst/>
+        </p:spPr>
+        <p:style>
+          <a:lnRef idx="1">
+            <a:schemeClr val="accent1"/>
+          </a:lnRef>
+          <a:fillRef idx="3">
+            <a:schemeClr val="accent1"/>
+          </a:fillRef>
+          <a:effectRef idx="2">
+            <a:schemeClr val="accent1"/>
+          </a:effectRef>
+          <a:fontRef idx="minor">
+            <a:schemeClr val="lt1"/>
+          </a:fontRef>
+        </p:style>
+        <p:txBody>
+          <a:bodyPr rtlCol="0" anchor="ctr"/>
+          <a:lstStyle/>
+          <a:p>
+            <a:pPr algn="ctr"/>
+          </a:p>
+        </p:txBody>
+      </p:sp>
+      <p:sp>
+        <p:nvSpPr>
+          <p:cNvPr id="4" name="TextBox 3"/>
+          <p:cNvSpPr txBox="1"/>
+          <p:nvPr/>
+        </p:nvSpPr>
+        <p:spPr>
+          <a:xfrm>
+            <a:off x="914400" y="457200"/>
+            <a:ext cx="9509760" cy="320040"/>
+          </a:xfrm>
+          <a:prstGeom prst="rect">
+            <a:avLst/>
+          </a:prstGeom>
+          <a:noFill/>
+        </p:spPr>
+        <p:txBody>
+          <a:bodyPr wrap="square" anchor="t" lIns="0" rIns="0" tIns="0" bIns="0">
+            <a:spAutoFit/>
+          </a:bodyPr>
+          <a:lstStyle/>
+          <a:p>
+            <a:pPr algn="l"/>
+            <a:r>
+              <a:rPr sz="1300" b="1" i="0">
+                <a:solidFill>
+                  <a:srgbClr val="2A9D8F"/>
+                </a:solidFill>
+                <a:latin typeface="Arial"/>
+              </a:rPr>
+              <a:t>ANSWER REVEALED</a:t>
+            </a:r>
+          </a:p>
+        </p:txBody>
+      </p:sp>
+      <p:sp>
+        <p:nvSpPr>
+          <p:cNvPr id="5" name="TextBox 4"/>
+          <p:cNvSpPr txBox="1"/>
+          <p:nvPr/>
+        </p:nvSpPr>
+        <p:spPr>
+          <a:xfrm>
+            <a:off x="548640" y="777240"/>
+            <a:ext cx="9966960" cy="822960"/>
+          </a:xfrm>
+          <a:prstGeom prst="rect">
+            <a:avLst/>
+          </a:prstGeom>
+          <a:noFill/>
+        </p:spPr>
+        <p:txBody>
+          <a:bodyPr wrap="square" anchor="t" lIns="0" rIns="0" tIns="0" bIns="0">
+            <a:spAutoFit/>
+          </a:bodyPr>
+          <a:lstStyle/>
+          <a:p>
+            <a:pPr algn="l"/>
+            <a:r>
+              <a:rPr sz="3000" b="1" i="0">
+                <a:solidFill>
+                  <a:srgbClr val="1D2433"/>
+                </a:solidFill>
+                <a:latin typeface="Calibri"/>
+              </a:rPr>
+              <a:t>Q5 — SONAR Depth</a:t>
+            </a:r>
+          </a:p>
+        </p:txBody>
+      </p:sp>
+      <p:sp>
+        <p:nvSpPr>
+          <p:cNvPr id="6" name="Rounded Rectangle 5"/>
+          <p:cNvSpPr/>
+          <p:nvPr/>
+        </p:nvSpPr>
+        <p:spPr>
+          <a:xfrm>
+            <a:off x="640080" y="1783080"/>
+            <a:ext cx="10881360" cy="1325880"/>
+          </a:xfrm>
+          <a:prstGeom prst="roundRect">
+            <a:avLst>
+              <a:gd name="adj" fmla="val 4000"/>
+            </a:avLst>
+          </a:prstGeom>
+          <a:solidFill>
+            <a:srgbClr val="FFFFFF"/>
+          </a:solidFill>
+          <a:ln>
+            <a:noFill/>
+          </a:ln>
+          <a:effectLst>
+            <a:outerShdw blurRad="88900" dist="38100" dir="5400000" rotWithShape="0" algn="bl">
+              <a:srgbClr val="000000">
+                <a:alpha val="16000"/>
+              </a:srgbClr>
+            </a:outerShdw>
+          </a:effectLst>
+        </p:spPr>
+        <p:style>
+          <a:lnRef idx="1">
+            <a:schemeClr val="accent1"/>
+          </a:lnRef>
+          <a:fillRef idx="3">
+            <a:schemeClr val="accent1"/>
+          </a:fillRef>
+          <a:effectRef idx="2">
+            <a:schemeClr val="accent1"/>
+          </a:effectRef>
+          <a:fontRef idx="minor">
+            <a:schemeClr val="lt1"/>
+          </a:fontRef>
+        </p:style>
+        <p:txBody>
+          <a:bodyPr rtlCol="0" anchor="ctr"/>
+          <a:lstStyle/>
+          <a:p>
+            <a:pPr algn="ctr"/>
+          </a:p>
+        </p:txBody>
+      </p:sp>
+      <p:sp>
+        <p:nvSpPr>
+          <p:cNvPr id="7" name="TextBox 6"/>
+          <p:cNvSpPr txBox="1"/>
+          <p:nvPr/>
+        </p:nvSpPr>
+        <p:spPr>
+          <a:xfrm>
+            <a:off x="1005840" y="1783080"/>
+            <a:ext cx="10149840" cy="1325880"/>
+          </a:xfrm>
+          <a:prstGeom prst="rect">
+            <a:avLst/>
+          </a:prstGeom>
+          <a:noFill/>
+        </p:spPr>
+        <p:txBody>
+          <a:bodyPr wrap="square" anchor="ctr" lIns="0" rIns="0" tIns="0" bIns="0">
+            <a:spAutoFit/>
+          </a:bodyPr>
+          <a:lstStyle/>
+          <a:p>
+            <a:pPr algn="l"/>
+            <a:r>
+              <a:rPr sz="1800" b="1" i="0">
+                <a:solidFill>
+                  <a:srgbClr val="1D2433"/>
+                </a:solidFill>
+                <a:latin typeface="Calibri"/>
+              </a:rPr>
+              <a:t>A ship's SONAR pulse returns from the seabed in 0.5 s. If sound travels at 1500 m/s in water, the depth is:</a:t>
+            </a:r>
+          </a:p>
+        </p:txBody>
+      </p:sp>
+      <p:sp>
+        <p:nvSpPr>
+          <p:cNvPr id="8" name="Rounded Rectangle 7"/>
+          <p:cNvSpPr/>
+          <p:nvPr/>
+        </p:nvSpPr>
+        <p:spPr>
+          <a:xfrm>
+            <a:off x="640080" y="3337560"/>
+            <a:ext cx="5349240" cy="868680"/>
+          </a:xfrm>
+          <a:prstGeom prst="roundRect">
+            <a:avLst>
+              <a:gd name="adj" fmla="val 12000"/>
+            </a:avLst>
+          </a:prstGeom>
+          <a:solidFill>
+            <a:srgbClr val="EAF1F4"/>
+          </a:solidFill>
+          <a:ln>
+            <a:noFill/>
+          </a:ln>
+          <a:effectLst/>
+        </p:spPr>
+        <p:style>
+          <a:lnRef idx="1">
+            <a:schemeClr val="accent1"/>
+          </a:lnRef>
+          <a:fillRef idx="3">
+            <a:schemeClr val="accent1"/>
+          </a:fillRef>
+          <a:effectRef idx="2">
+            <a:schemeClr val="accent1"/>
+          </a:effectRef>
+          <a:fontRef idx="minor">
+            <a:schemeClr val="lt1"/>
+          </a:fontRef>
+        </p:style>
+        <p:txBody>
+          <a:bodyPr rtlCol="0" anchor="ctr"/>
+          <a:lstStyle/>
+          <a:p>
+            <a:pPr algn="ctr"/>
+          </a:p>
+        </p:txBody>
+      </p:sp>
+      <p:sp>
+        <p:nvSpPr>
+          <p:cNvPr id="9" name="Oval 8"/>
+          <p:cNvSpPr/>
+          <p:nvPr/>
+        </p:nvSpPr>
+        <p:spPr>
+          <a:xfrm>
+            <a:off x="914400" y="3566160"/>
+            <a:ext cx="411480" cy="411480"/>
+          </a:xfrm>
+          <a:prstGeom prst="ellipse">
+            <a:avLst/>
+          </a:prstGeom>
+          <a:solidFill>
+            <a:srgbClr val="B7C2CC"/>
+          </a:solidFill>
+          <a:ln>
+            <a:noFill/>
+          </a:ln>
+          <a:effectLst/>
+        </p:spPr>
+        <p:style>
+          <a:lnRef idx="1">
+            <a:schemeClr val="accent1"/>
+          </a:lnRef>
+          <a:fillRef idx="3">
+            <a:schemeClr val="accent1"/>
+          </a:fillRef>
+          <a:effectRef idx="2">
+            <a:schemeClr val="accent1"/>
+          </a:effectRef>
+          <a:fontRef idx="minor">
+            <a:schemeClr val="lt1"/>
+          </a:fontRef>
+        </p:style>
+        <p:txBody>
+          <a:bodyPr rtlCol="0" anchor="ctr"/>
+          <a:lstStyle/>
+          <a:p>
+            <a:pPr algn="ctr"/>
+          </a:p>
+        </p:txBody>
+      </p:sp>
+      <p:sp>
+        <p:nvSpPr>
+          <p:cNvPr id="10" name="TextBox 9"/>
+          <p:cNvSpPr txBox="1"/>
+          <p:nvPr/>
+        </p:nvSpPr>
+        <p:spPr>
+          <a:xfrm>
+            <a:off x="914400" y="3566160"/>
+            <a:ext cx="411480" cy="411480"/>
+          </a:xfrm>
+          <a:prstGeom prst="rect">
+            <a:avLst/>
+          </a:prstGeom>
+          <a:noFill/>
+        </p:spPr>
+        <p:txBody>
+          <a:bodyPr wrap="square" anchor="ctr" lIns="0" rIns="0" tIns="0" bIns="0">
+            <a:spAutoFit/>
+          </a:bodyPr>
+          <a:lstStyle/>
+          <a:p>
+            <a:pPr algn="ctr"/>
+            <a:r>
+              <a:rPr sz="1400" b="1" i="0">
+                <a:solidFill>
+                  <a:srgbClr val="FFFFFF"/>
+                </a:solidFill>
+                <a:latin typeface="Calibri"/>
+              </a:rPr>
+              <a:t>A</a:t>
+            </a:r>
+          </a:p>
+        </p:txBody>
+      </p:sp>
+      <p:sp>
+        <p:nvSpPr>
+          <p:cNvPr id="11" name="TextBox 10"/>
+          <p:cNvSpPr txBox="1"/>
+          <p:nvPr/>
+        </p:nvSpPr>
+        <p:spPr>
+          <a:xfrm>
+            <a:off x="1508760" y="3337560"/>
+            <a:ext cx="4297680" cy="868680"/>
+          </a:xfrm>
+          <a:prstGeom prst="rect">
+            <a:avLst/>
+          </a:prstGeom>
+          <a:noFill/>
+        </p:spPr>
+        <p:txBody>
+          <a:bodyPr wrap="square" anchor="ctr" lIns="0" rIns="0" tIns="0" bIns="0">
+            <a:spAutoFit/>
+          </a:bodyPr>
+          <a:lstStyle/>
+          <a:p>
+            <a:pPr algn="l"/>
+            <a:r>
+              <a:rPr sz="1450" b="0" i="0">
+                <a:solidFill>
+                  <a:srgbClr val="6B7280"/>
+                </a:solidFill>
+                <a:latin typeface="Calibri"/>
+              </a:rPr>
+              <a:t>750 m</a:t>
+            </a:r>
+          </a:p>
+        </p:txBody>
+      </p:sp>
+      <p:sp>
+        <p:nvSpPr>
+          <p:cNvPr id="12" name="Rounded Rectangle 11"/>
+          <p:cNvSpPr/>
+          <p:nvPr/>
+        </p:nvSpPr>
+        <p:spPr>
+          <a:xfrm>
+            <a:off x="6172200" y="3337560"/>
+            <a:ext cx="5349240" cy="868680"/>
+          </a:xfrm>
+          <a:prstGeom prst="roundRect">
+            <a:avLst>
+              <a:gd name="adj" fmla="val 12000"/>
+            </a:avLst>
+          </a:prstGeom>
+          <a:solidFill>
+            <a:srgbClr val="E9F5F0"/>
+          </a:solidFill>
+          <a:ln w="25400">
+            <a:solidFill>
+              <a:srgbClr val="2A9D8F"/>
+            </a:solidFill>
+          </a:ln>
+          <a:effectLst/>
+        </p:spPr>
+        <p:style>
+          <a:lnRef idx="1">
+            <a:schemeClr val="accent1"/>
+          </a:lnRef>
+          <a:fillRef idx="3">
+            <a:schemeClr val="accent1"/>
+          </a:fillRef>
+          <a:effectRef idx="2">
+            <a:schemeClr val="accent1"/>
+          </a:effectRef>
+          <a:fontRef idx="minor">
+            <a:schemeClr val="lt1"/>
+          </a:fontRef>
+        </p:style>
+        <p:txBody>
+          <a:bodyPr rtlCol="0" anchor="ctr"/>
+          <a:lstStyle/>
+          <a:p>
+            <a:pPr algn="ctr"/>
+          </a:p>
+        </p:txBody>
+      </p:sp>
+      <p:sp>
+        <p:nvSpPr>
+          <p:cNvPr id="13" name="Oval 12"/>
+          <p:cNvSpPr/>
+          <p:nvPr/>
+        </p:nvSpPr>
+        <p:spPr>
+          <a:xfrm>
+            <a:off x="6446520" y="3566160"/>
+            <a:ext cx="411480" cy="411480"/>
+          </a:xfrm>
+          <a:prstGeom prst="ellipse">
+            <a:avLst/>
+          </a:prstGeom>
+          <a:solidFill>
+            <a:srgbClr val="2A9D8F"/>
+          </a:solidFill>
+          <a:ln>
+            <a:noFill/>
+          </a:ln>
+          <a:effectLst/>
+        </p:spPr>
+        <p:style>
+          <a:lnRef idx="1">
+            <a:schemeClr val="accent1"/>
+          </a:lnRef>
+          <a:fillRef idx="3">
+            <a:schemeClr val="accent1"/>
+          </a:fillRef>
+          <a:effectRef idx="2">
+            <a:schemeClr val="accent1"/>
+          </a:effectRef>
+          <a:fontRef idx="minor">
+            <a:schemeClr val="lt1"/>
+          </a:fontRef>
+        </p:style>
+        <p:txBody>
+          <a:bodyPr rtlCol="0" anchor="ctr"/>
+          <a:lstStyle/>
+          <a:p>
+            <a:pPr algn="ctr"/>
+          </a:p>
+        </p:txBody>
+      </p:sp>
+      <p:sp>
+        <p:nvSpPr>
+          <p:cNvPr id="14" name="TextBox 13"/>
+          <p:cNvSpPr txBox="1"/>
+          <p:nvPr/>
+        </p:nvSpPr>
+        <p:spPr>
+          <a:xfrm>
+            <a:off x="6446520" y="3566160"/>
+            <a:ext cx="411480" cy="411480"/>
+          </a:xfrm>
+          <a:prstGeom prst="rect">
+            <a:avLst/>
+          </a:prstGeom>
+          <a:noFill/>
+        </p:spPr>
+        <p:txBody>
+          <a:bodyPr wrap="square" anchor="ctr" lIns="0" rIns="0" tIns="0" bIns="0">
+            <a:spAutoFit/>
+          </a:bodyPr>
+          <a:lstStyle/>
+          <a:p>
+            <a:pPr algn="ctr"/>
+            <a:r>
+              <a:rPr sz="1400" b="1" i="0">
+                <a:solidFill>
+                  <a:srgbClr val="FFFFFF"/>
+                </a:solidFill>
+                <a:latin typeface="Calibri"/>
+              </a:rPr>
+              <a:t>✓</a:t>
+            </a:r>
+          </a:p>
+        </p:txBody>
+      </p:sp>
+      <p:sp>
+        <p:nvSpPr>
+          <p:cNvPr id="15" name="TextBox 14"/>
+          <p:cNvSpPr txBox="1"/>
+          <p:nvPr/>
+        </p:nvSpPr>
+        <p:spPr>
+          <a:xfrm>
+            <a:off x="7040880" y="3337560"/>
+            <a:ext cx="4297680" cy="868680"/>
+          </a:xfrm>
+          <a:prstGeom prst="rect">
+            <a:avLst/>
+          </a:prstGeom>
+          <a:noFill/>
+        </p:spPr>
+        <p:txBody>
+          <a:bodyPr wrap="square" anchor="ctr" lIns="0" rIns="0" tIns="0" bIns="0">
+            <a:spAutoFit/>
+          </a:bodyPr>
+          <a:lstStyle/>
+          <a:p>
+            <a:pPr algn="l"/>
+            <a:r>
+              <a:rPr sz="1450" b="1" i="0">
+                <a:solidFill>
+                  <a:srgbClr val="1D2433"/>
+                </a:solidFill>
+                <a:latin typeface="Calibri"/>
+              </a:rPr>
+              <a:t>375 m</a:t>
+            </a:r>
+          </a:p>
+        </p:txBody>
+      </p:sp>
+      <p:sp>
+        <p:nvSpPr>
+          <p:cNvPr id="16" name="Rounded Rectangle 15"/>
+          <p:cNvSpPr/>
+          <p:nvPr/>
+        </p:nvSpPr>
+        <p:spPr>
+          <a:xfrm>
+            <a:off x="640080" y="4370831"/>
+            <a:ext cx="5349240" cy="868680"/>
+          </a:xfrm>
+          <a:prstGeom prst="roundRect">
+            <a:avLst>
+              <a:gd name="adj" fmla="val 12000"/>
+            </a:avLst>
+          </a:prstGeom>
+          <a:solidFill>
+            <a:srgbClr val="EAF1F4"/>
+          </a:solidFill>
+          <a:ln>
+            <a:noFill/>
+          </a:ln>
+          <a:effectLst/>
+        </p:spPr>
+        <p:style>
+          <a:lnRef idx="1">
+            <a:schemeClr val="accent1"/>
+          </a:lnRef>
+          <a:fillRef idx="3">
+            <a:schemeClr val="accent1"/>
+          </a:fillRef>
+          <a:effectRef idx="2">
+            <a:schemeClr val="accent1"/>
+          </a:effectRef>
+          <a:fontRef idx="minor">
+            <a:schemeClr val="lt1"/>
+          </a:fontRef>
+        </p:style>
+        <p:txBody>
+          <a:bodyPr rtlCol="0" anchor="ctr"/>
+          <a:lstStyle/>
+          <a:p>
+            <a:pPr algn="ctr"/>
+          </a:p>
+        </p:txBody>
+      </p:sp>
+      <p:sp>
+        <p:nvSpPr>
+          <p:cNvPr id="17" name="Oval 16"/>
+          <p:cNvSpPr/>
+          <p:nvPr/>
+        </p:nvSpPr>
+        <p:spPr>
+          <a:xfrm>
+            <a:off x="914400" y="4599431"/>
+            <a:ext cx="411480" cy="411480"/>
+          </a:xfrm>
+          <a:prstGeom prst="ellipse">
+            <a:avLst/>
+          </a:prstGeom>
+          <a:solidFill>
+            <a:srgbClr val="B7C2CC"/>
+          </a:solidFill>
+          <a:ln>
+            <a:noFill/>
+          </a:ln>
+          <a:effectLst/>
+        </p:spPr>
+        <p:style>
+          <a:lnRef idx="1">
+            <a:schemeClr val="accent1"/>
+          </a:lnRef>
+          <a:fillRef idx="3">
+            <a:schemeClr val="accent1"/>
+          </a:fillRef>
+          <a:effectRef idx="2">
+            <a:schemeClr val="accent1"/>
+          </a:effectRef>
+          <a:fontRef idx="minor">
+            <a:schemeClr val="lt1"/>
+          </a:fontRef>
+        </p:style>
+        <p:txBody>
+          <a:bodyPr rtlCol="0" anchor="ctr"/>
+          <a:lstStyle/>
+          <a:p>
+            <a:pPr algn="ctr"/>
+          </a:p>
+        </p:txBody>
+      </p:sp>
+      <p:sp>
+        <p:nvSpPr>
+          <p:cNvPr id="18" name="TextBox 17"/>
+          <p:cNvSpPr txBox="1"/>
+          <p:nvPr/>
+        </p:nvSpPr>
+        <p:spPr>
+          <a:xfrm>
+            <a:off x="914400" y="4599431"/>
+            <a:ext cx="411480" cy="411480"/>
+          </a:xfrm>
+          <a:prstGeom prst="rect">
+            <a:avLst/>
+          </a:prstGeom>
+          <a:noFill/>
+        </p:spPr>
+        <p:txBody>
+          <a:bodyPr wrap="square" anchor="ctr" lIns="0" rIns="0" tIns="0" bIns="0">
+            <a:spAutoFit/>
+          </a:bodyPr>
+          <a:lstStyle/>
+          <a:p>
+            <a:pPr algn="ctr"/>
+            <a:r>
+              <a:rPr sz="1400" b="1" i="0">
+                <a:solidFill>
+                  <a:srgbClr val="FFFFFF"/>
+                </a:solidFill>
+                <a:latin typeface="Calibri"/>
+              </a:rPr>
+              <a:t>C</a:t>
+            </a:r>
+          </a:p>
+        </p:txBody>
+      </p:sp>
+      <p:sp>
+        <p:nvSpPr>
+          <p:cNvPr id="19" name="TextBox 18"/>
+          <p:cNvSpPr txBox="1"/>
+          <p:nvPr/>
+        </p:nvSpPr>
+        <p:spPr>
+          <a:xfrm>
+            <a:off x="1508760" y="4370831"/>
+            <a:ext cx="4297680" cy="868680"/>
+          </a:xfrm>
+          <a:prstGeom prst="rect">
+            <a:avLst/>
+          </a:prstGeom>
+          <a:noFill/>
+        </p:spPr>
+        <p:txBody>
+          <a:bodyPr wrap="square" anchor="ctr" lIns="0" rIns="0" tIns="0" bIns="0">
+            <a:spAutoFit/>
+          </a:bodyPr>
+          <a:lstStyle/>
+          <a:p>
+            <a:pPr algn="l"/>
+            <a:r>
+              <a:rPr sz="1450" b="0" i="0">
+                <a:solidFill>
+                  <a:srgbClr val="6B7280"/>
+                </a:solidFill>
+                <a:latin typeface="Calibri"/>
+              </a:rPr>
+              <a:t>3000 m</a:t>
+            </a:r>
+          </a:p>
+        </p:txBody>
+      </p:sp>
+      <p:sp>
+        <p:nvSpPr>
+          <p:cNvPr id="20" name="Rounded Rectangle 19"/>
+          <p:cNvSpPr/>
+          <p:nvPr/>
+        </p:nvSpPr>
+        <p:spPr>
+          <a:xfrm>
+            <a:off x="6172200" y="4370831"/>
+            <a:ext cx="5349240" cy="868680"/>
+          </a:xfrm>
+          <a:prstGeom prst="roundRect">
+            <a:avLst>
+              <a:gd name="adj" fmla="val 12000"/>
+            </a:avLst>
+          </a:prstGeom>
+          <a:solidFill>
+            <a:srgbClr val="EAF1F4"/>
+          </a:solidFill>
+          <a:ln>
+            <a:noFill/>
+          </a:ln>
+          <a:effectLst/>
+        </p:spPr>
+        <p:style>
+          <a:lnRef idx="1">
+            <a:schemeClr val="accent1"/>
+          </a:lnRef>
+          <a:fillRef idx="3">
+            <a:schemeClr val="accent1"/>
+          </a:fillRef>
+          <a:effectRef idx="2">
+            <a:schemeClr val="accent1"/>
+          </a:effectRef>
+          <a:fontRef idx="minor">
+            <a:schemeClr val="lt1"/>
+          </a:fontRef>
+        </p:style>
+        <p:txBody>
+          <a:bodyPr rtlCol="0" anchor="ctr"/>
+          <a:lstStyle/>
+          <a:p>
+            <a:pPr algn="ctr"/>
+          </a:p>
+        </p:txBody>
+      </p:sp>
+      <p:sp>
+        <p:nvSpPr>
+          <p:cNvPr id="21" name="Oval 20"/>
+          <p:cNvSpPr/>
+          <p:nvPr/>
+        </p:nvSpPr>
+        <p:spPr>
+          <a:xfrm>
+            <a:off x="6446520" y="4599431"/>
+            <a:ext cx="411480" cy="411480"/>
+          </a:xfrm>
+          <a:prstGeom prst="ellipse">
+            <a:avLst/>
+          </a:prstGeom>
+          <a:solidFill>
+            <a:srgbClr val="B7C2CC"/>
+          </a:solidFill>
+          <a:ln>
+            <a:noFill/>
+          </a:ln>
+          <a:effectLst/>
+        </p:spPr>
+        <p:style>
+          <a:lnRef idx="1">
+            <a:schemeClr val="accent1"/>
+          </a:lnRef>
+          <a:fillRef idx="3">
+            <a:schemeClr val="accent1"/>
+          </a:fillRef>
+          <a:effectRef idx="2">
+            <a:schemeClr val="accent1"/>
+          </a:effectRef>
+          <a:fontRef idx="minor">
+            <a:schemeClr val="lt1"/>
+          </a:fontRef>
+        </p:style>
+        <p:txBody>
+          <a:bodyPr rtlCol="0" anchor="ctr"/>
+          <a:lstStyle/>
+          <a:p>
+            <a:pPr algn="ctr"/>
+          </a:p>
+        </p:txBody>
+      </p:sp>
+      <p:sp>
+        <p:nvSpPr>
+          <p:cNvPr id="22" name="TextBox 21"/>
+          <p:cNvSpPr txBox="1"/>
+          <p:nvPr/>
+        </p:nvSpPr>
+        <p:spPr>
+          <a:xfrm>
+            <a:off x="6446520" y="4599431"/>
+            <a:ext cx="411480" cy="411480"/>
+          </a:xfrm>
+          <a:prstGeom prst="rect">
+            <a:avLst/>
+          </a:prstGeom>
+          <a:noFill/>
+        </p:spPr>
+        <p:txBody>
+          <a:bodyPr wrap="square" anchor="ctr" lIns="0" rIns="0" tIns="0" bIns="0">
+            <a:spAutoFit/>
+          </a:bodyPr>
+          <a:lstStyle/>
+          <a:p>
+            <a:pPr algn="ctr"/>
+            <a:r>
+              <a:rPr sz="1400" b="1" i="0">
+                <a:solidFill>
+                  <a:srgbClr val="FFFFFF"/>
+                </a:solidFill>
+                <a:latin typeface="Calibri"/>
+              </a:rPr>
+              <a:t>D</a:t>
+            </a:r>
+          </a:p>
+        </p:txBody>
+      </p:sp>
+      <p:sp>
+        <p:nvSpPr>
+          <p:cNvPr id="23" name="TextBox 22"/>
+          <p:cNvSpPr txBox="1"/>
+          <p:nvPr/>
+        </p:nvSpPr>
+        <p:spPr>
+          <a:xfrm>
+            <a:off x="7040880" y="4370831"/>
+            <a:ext cx="4297680" cy="868680"/>
+          </a:xfrm>
+          <a:prstGeom prst="rect">
+            <a:avLst/>
+          </a:prstGeom>
+          <a:noFill/>
+        </p:spPr>
+        <p:txBody>
+          <a:bodyPr wrap="square" anchor="ctr" lIns="0" rIns="0" tIns="0" bIns="0">
+            <a:spAutoFit/>
+          </a:bodyPr>
+          <a:lstStyle/>
+          <a:p>
+            <a:pPr algn="l"/>
+            <a:r>
+              <a:rPr sz="1450" b="0" i="0">
+                <a:solidFill>
+                  <a:srgbClr val="6B7280"/>
+                </a:solidFill>
+                <a:latin typeface="Calibri"/>
+              </a:rPr>
+              <a:t>1500 m</a:t>
+            </a:r>
+          </a:p>
+        </p:txBody>
+      </p:sp>
+      <p:sp>
+        <p:nvSpPr>
+          <p:cNvPr id="24" name="Rounded Rectangle 23"/>
+          <p:cNvSpPr/>
+          <p:nvPr/>
+        </p:nvSpPr>
+        <p:spPr>
+          <a:xfrm>
+            <a:off x="640080" y="5440680"/>
+            <a:ext cx="10881360" cy="1097280"/>
+          </a:xfrm>
+          <a:prstGeom prst="roundRect">
+            <a:avLst>
+              <a:gd name="adj" fmla="val 5000"/>
+            </a:avLst>
+          </a:prstGeom>
+          <a:solidFill>
+            <a:srgbClr val="FFFFFF"/>
+          </a:solidFill>
+          <a:ln>
+            <a:noFill/>
+          </a:ln>
+          <a:effectLst>
+            <a:outerShdw blurRad="88900" dist="38100" dir="5400000" rotWithShape="0" algn="bl">
+              <a:srgbClr val="000000">
+                <a:alpha val="16000"/>
+              </a:srgbClr>
+            </a:outerShdw>
+          </a:effectLst>
+        </p:spPr>
+        <p:style>
+          <a:lnRef idx="1">
+            <a:schemeClr val="accent1"/>
+          </a:lnRef>
+          <a:fillRef idx="3">
+            <a:schemeClr val="accent1"/>
+          </a:fillRef>
+          <a:effectRef idx="2">
+            <a:schemeClr val="accent1"/>
+          </a:effectRef>
+          <a:fontRef idx="minor">
+            <a:schemeClr val="lt1"/>
+          </a:fontRef>
+        </p:style>
+        <p:txBody>
+          <a:bodyPr rtlCol="0" anchor="ctr"/>
+          <a:lstStyle/>
+          <a:p>
+            <a:pPr algn="ctr"/>
+          </a:p>
+        </p:txBody>
+      </p:sp>
+      <p:sp>
+        <p:nvSpPr>
+          <p:cNvPr id="25" name="TextBox 24"/>
+          <p:cNvSpPr txBox="1"/>
+          <p:nvPr/>
+        </p:nvSpPr>
+        <p:spPr>
+          <a:xfrm>
+            <a:off x="1005840" y="5596128"/>
+            <a:ext cx="4572000" cy="320040"/>
+          </a:xfrm>
+          <a:prstGeom prst="rect">
+            <a:avLst/>
+          </a:prstGeom>
+          <a:noFill/>
+        </p:spPr>
+        <p:txBody>
+          <a:bodyPr wrap="square" anchor="t" lIns="0" rIns="0" tIns="0" bIns="0">
+            <a:spAutoFit/>
+          </a:bodyPr>
+          <a:lstStyle/>
+          <a:p>
+            <a:pPr algn="l"/>
+            <a:r>
+              <a:rPr sz="1300" b="1" i="0">
+                <a:solidFill>
+                  <a:srgbClr val="2A9D8F"/>
+                </a:solidFill>
+                <a:latin typeface="Arial"/>
+              </a:rPr>
+              <a:t>WHY</a:t>
+            </a:r>
+          </a:p>
+        </p:txBody>
+      </p:sp>
+      <p:sp>
+        <p:nvSpPr>
+          <p:cNvPr id="26" name="TextBox 25"/>
+          <p:cNvSpPr txBox="1"/>
+          <p:nvPr/>
+        </p:nvSpPr>
+        <p:spPr>
+          <a:xfrm>
+            <a:off x="1005840" y="5943600"/>
+            <a:ext cx="10149840" cy="548640"/>
+          </a:xfrm>
+          <a:prstGeom prst="rect">
+            <a:avLst/>
+          </a:prstGeom>
+          <a:noFill/>
+        </p:spPr>
+        <p:txBody>
+          <a:bodyPr wrap="square" anchor="t" lIns="0" rIns="0" tIns="0" bIns="0">
+            <a:spAutoFit/>
+          </a:bodyPr>
+          <a:lstStyle/>
+          <a:p>
+            <a:pPr algn="l">
+              <a:lnSpc>
+                <a:spcPct val="105000"/>
+              </a:lnSpc>
+            </a:pPr>
+            <a:r>
+              <a:rPr sz="1450" b="0" i="0">
+                <a:solidFill>
+                  <a:srgbClr val="1D2433"/>
+                </a:solidFill>
+                <a:latin typeface="Calibri"/>
+              </a:rPr>
+              <a:t>Total path = 1500 × 0.5 = 750 m for the round trip, so the depth is 750 / 2 = 375 m. Always halve the echo distance.</a:t>
+            </a:r>
+          </a:p>
+        </p:txBody>
+      </p:sp>
+    </p:spTree>
+  </p:cSld>
+  <p:clrMapOvr>
+    <a:masterClrMapping/>
+  </p:clrMapOvr>
+</p:sld>
+</file>
+
+<file path=ppt/slides/slide37.xml><?xml version="1.0" encoding="utf-8"?>
 <p:sld xmlns:a="http://schemas.openxmlformats.org/drawingml/2006/main" xmlns:p="http://schemas.openxmlformats.org/presentationml/2006/main" xmlns:r="http://schemas.openxmlformats.org/officeDocument/2006/relationships">
   <p:cSld>
     <p:bg>
